--- a/docs/submission/室内大棚温湿度监测与风扇控制系统_答辩汇报_脱敏版.pptx
+++ b/docs/submission/室内大棚温湿度监测与风扇控制系统_答辩汇报_脱敏版.pptx
@@ -2263,17 +2263,14 @@
                 <a:cs typeface="Arial"/>
               </a:defRPr>
             </a:pPr>
-            <a:r>
-              <a:rPr sz="1575" b="0">
-                <a:solidFill>
-                  <a:srgbClr val="68746E"/>
-                </a:solidFill>
-                <a:latin typeface="Arial"/>
-                <a:ea typeface="Arial"/>
-                <a:cs typeface="Arial"/>
-              </a:rPr>
-              <a:t/>
-            </a:r>
+            <a:endParaRPr sz="1575" b="0">
+              <a:solidFill>
+                <a:srgbClr val="68746E"/>
+              </a:solidFill>
+              <a:latin typeface="Arial"/>
+              <a:ea typeface="Arial"/>
+              <a:cs typeface="Arial"/>
+            </a:endParaRPr>
           </a:p>
         </p:txBody>
       </p:sp>
@@ -2766,8 +2763,8 @@
         </p:nvSpPr>
         <p:spPr>
           <a:xfrm>
-            <a:off x="685800" y="1333500"/>
-            <a:ext cx="8096250" cy="361950"/>
+            <a:off x="685800" y="1308100"/>
+            <a:ext cx="10033000" cy="558800"/>
           </a:xfrm>
           <a:prstGeom prst="rect">
             <a:avLst/>
@@ -2778,8 +2775,8 @@
           </a:ln>
         </p:spPr>
         <p:txBody>
-          <a:bodyPr anchor="ctr">
-            <a:normAutofit fontScale="94667" lnSpcReduction="10000"/>
+          <a:bodyPr wrap="square" anchor="ctr">
+            <a:noAutofit/>
           </a:bodyPr>
           <a:lstStyle/>
           <a:p>
@@ -2794,7 +2791,7 @@
               </a:defRPr>
             </a:pPr>
             <a:r>
-              <a:rPr sz="1875" b="1">
+              <a:rPr lang="zh-CN" altLang="en-US" sz="1600" b="1">
                 <a:solidFill>
                   <a:srgbClr val="2F7A63"/>
                 </a:solidFill>
@@ -2802,8 +2799,116 @@
                 <a:ea typeface="Arial"/>
                 <a:cs typeface="Arial"/>
               </a:rPr>
-              <a:t>蓝牙模块使用 Uno 硬件串口，波特率为 9600</a:t>
-            </a:r>
+              <a:t>蓝牙模块使用 </a:t>
+            </a:r>
+            <a:r>
+              <a:rPr lang="en-US" sz="1600" b="1">
+                <a:solidFill>
+                  <a:srgbClr val="2F7A63"/>
+                </a:solidFill>
+                <a:latin typeface="Arial"/>
+                <a:ea typeface="Arial"/>
+                <a:cs typeface="Arial"/>
+              </a:rPr>
+              <a:t>Uno </a:t>
+            </a:r>
+            <a:r>
+              <a:rPr lang="zh-CN" altLang="en-US" sz="1600" b="1">
+                <a:solidFill>
+                  <a:srgbClr val="2F7A63"/>
+                </a:solidFill>
+                <a:latin typeface="Arial"/>
+                <a:ea typeface="Arial"/>
+                <a:cs typeface="Arial"/>
+              </a:rPr>
+              <a:t>硬件串口，波特率 </a:t>
+            </a:r>
+            <a:r>
+              <a:rPr lang="en-US" altLang="zh-CN" sz="1600" b="1">
+                <a:solidFill>
+                  <a:srgbClr val="2F7A63"/>
+                </a:solidFill>
+                <a:latin typeface="Arial"/>
+                <a:ea typeface="Arial"/>
+                <a:cs typeface="Arial"/>
+              </a:rPr>
+              <a:t>9600</a:t>
+            </a:r>
+            <a:r>
+              <a:rPr lang="zh-CN" altLang="en-US" sz="1600" b="1">
+                <a:solidFill>
+                  <a:srgbClr val="2F7A63"/>
+                </a:solidFill>
+                <a:latin typeface="Arial"/>
+                <a:ea typeface="Arial"/>
+                <a:cs typeface="Arial"/>
+              </a:rPr>
+              <a:t>，命令以换行符结束。</a:t>
+            </a:r>
+          </a:p>
+          <a:p>
+            <a:pPr algn="l">
+              <a:defRPr sz="1875" b="1">
+                <a:solidFill>
+                  <a:srgbClr val="2F7A63"/>
+                </a:solidFill>
+                <a:latin typeface="Arial"/>
+                <a:ea typeface="Arial"/>
+                <a:cs typeface="Arial"/>
+              </a:defRPr>
+            </a:pPr>
+            <a:r>
+              <a:rPr lang="zh-CN" altLang="en-US" sz="1600" b="1">
+                <a:solidFill>
+                  <a:srgbClr val="2F7A63"/>
+                </a:solidFill>
+                <a:latin typeface="Arial"/>
+                <a:ea typeface="Arial"/>
+                <a:cs typeface="Arial"/>
+              </a:rPr>
+              <a:t>校时 </a:t>
+            </a:r>
+            <a:r>
+              <a:rPr lang="en-US" sz="1600" b="1">
+                <a:solidFill>
+                  <a:srgbClr val="2F7A63"/>
+                </a:solidFill>
+                <a:latin typeface="Arial"/>
+                <a:ea typeface="Arial"/>
+                <a:cs typeface="Arial"/>
+              </a:rPr>
+              <a:t>TIME HH:MM[:SS]；</a:t>
+            </a:r>
+            <a:r>
+              <a:rPr lang="zh-CN" altLang="en-US" sz="1600" b="1">
+                <a:solidFill>
+                  <a:srgbClr val="2F7A63"/>
+                </a:solidFill>
+                <a:latin typeface="Arial"/>
+                <a:ea typeface="Arial"/>
+                <a:cs typeface="Arial"/>
+              </a:rPr>
+              <a:t>阈值 </a:t>
+            </a:r>
+            <a:r>
+              <a:rPr lang="en-US" sz="1600" b="1">
+                <a:solidFill>
+                  <a:srgbClr val="2F7A63"/>
+                </a:solidFill>
+                <a:latin typeface="Arial"/>
+                <a:ea typeface="Arial"/>
+                <a:cs typeface="Arial"/>
+              </a:rPr>
+              <a:t>SET DAY/PM/NIGHT W C、SET HUM W C。</a:t>
+            </a:r>
+            <a:endParaRPr sz="1600" b="1">
+              <a:solidFill>
+                <a:srgbClr val="2F7A63"/>
+              </a:solidFill>
+              <a:latin typeface="Arial"/>
+              <a:ea typeface="Arial"/>
+              <a:cs typeface="Arial"/>
+            </a:endParaRPr>
           </a:p>
         </p:txBody>
       </p:sp>
@@ -2811,7 +2916,13 @@
         <p:nvGraphicFramePr>
           <p:cNvPr id="10" name="表格 9"/>
           <p:cNvGraphicFramePr/>
-          <p:nvPr/>
+          <p:nvPr>
+            <p:extLst>
+              <p:ext uri="{D42A27DB-BD31-4B8C-83A1-F6EECF244321}">
+                <p14:modId xmlns:p14="http://schemas.microsoft.com/office/powerpoint/2010/main" val="3398677151"/>
+              </p:ext>
+            </p:extLst>
+          </p:nvPr>
         </p:nvGraphicFramePr>
         <p:xfrm>
           <a:off x="1524000" y="2095500"/>
@@ -2837,7 +2948,7 @@
                   </a:extLst>
                 </a:gridCol>
               </a:tblGrid>
-              <a:tr h="421821">
+              <a:tr h="304800">
                 <a:tc>
                   <a:txBody>
                     <a:bodyPr/>
@@ -2892,7 +3003,7 @@
                   </a:ext>
                 </a:extLst>
               </a:tr>
-              <a:tr h="421821">
+              <a:tr h="285750">
                 <a:tc>
                   <a:txBody>
                     <a:bodyPr/>
@@ -2939,7 +3050,7 @@
                   </a:ext>
                 </a:extLst>
               </a:tr>
-              <a:tr h="421821">
+              <a:tr h="285750">
                 <a:tc>
                   <a:txBody>
                     <a:bodyPr/>
@@ -2986,7 +3097,7 @@
                   </a:ext>
                 </a:extLst>
               </a:tr>
-              <a:tr h="421821">
+              <a:tr h="285750">
                 <a:tc>
                   <a:txBody>
                     <a:bodyPr/>
@@ -3033,7 +3144,7 @@
                   </a:ext>
                 </a:extLst>
               </a:tr>
-              <a:tr h="421821">
+              <a:tr h="285750">
                 <a:tc>
                   <a:txBody>
                     <a:bodyPr/>
@@ -3080,7 +3191,7 @@
                   </a:ext>
                 </a:extLst>
               </a:tr>
-              <a:tr h="421821">
+              <a:tr h="285750">
                 <a:tc>
                   <a:txBody>
                     <a:bodyPr/>
@@ -3127,7 +3238,240 @@
                   </a:ext>
                 </a:extLst>
               </a:tr>
-              <a:tr h="421821">
+              <a:tr h="285750">
+                <a:tc>
+                  <a:txBody>
+                    <a:bodyPr/>
+                    <a:lstStyle/>
+                    <a:p>
+                      <a:r>
+                        <a:rPr lang="en-US" sz="1275" b="0">
+                          <a:solidFill>
+                            <a:srgbClr val="16261F"/>
+                          </a:solidFill>
+                          <a:latin typeface="Arial" panose="020B0604020202020204" pitchFamily="34" charset="0"/>
+                          <a:ea typeface="Arial"/>
+                          <a:cs typeface="Arial"/>
+                        </a:rPr>
+                        <a:t>TIME HH:MM[:SS]</a:t>
+                      </a:r>
+                      <a:endParaRPr sz="1275" b="0">
+                        <a:solidFill>
+                          <a:srgbClr val="16261F"/>
+                        </a:solidFill>
+                        <a:latin typeface="Arial" panose="020B0604020202020204" pitchFamily="34" charset="0"/>
+                        <a:ea typeface="Arial"/>
+                        <a:cs typeface="Arial"/>
+                      </a:endParaRPr>
+                    </a:p>
+                  </a:txBody>
+                  <a:tcPr/>
+                </a:tc>
+                <a:tc>
+                  <a:txBody>
+                    <a:bodyPr/>
+                    <a:lstStyle/>
+                    <a:p>
+                      <a:r>
+                        <a:rPr lang="zh-CN" altLang="en-US" sz="1275" b="0">
+                          <a:solidFill>
+                            <a:srgbClr val="16261F"/>
+                          </a:solidFill>
+                          <a:latin typeface="Arial" panose="020B0604020202020204" pitchFamily="34" charset="0"/>
+                          <a:ea typeface="Arial"/>
+                          <a:cs typeface="Arial"/>
+                        </a:rPr>
+                        <a:t>校正时钟，决定当前生效的时段</a:t>
+                      </a:r>
+                      <a:endParaRPr sz="1275" b="0">
+                        <a:solidFill>
+                          <a:srgbClr val="16261F"/>
+                        </a:solidFill>
+                        <a:latin typeface="Arial" panose="020B0604020202020204" pitchFamily="34" charset="0"/>
+                        <a:ea typeface="Arial"/>
+                        <a:cs typeface="Arial"/>
+                      </a:endParaRPr>
+                    </a:p>
+                  </a:txBody>
+                  <a:tcPr/>
+                </a:tc>
+                <a:extLst>
+                  <a:ext uri="{0D108BD9-81ED-4DB2-BD59-A6C34878D82A}">
+                    <a16:rowId xmlns:a16="http://schemas.microsoft.com/office/drawing/2014/main" val="1515349115"/>
+                  </a:ext>
+                </a:extLst>
+              </a:tr>
+              <a:tr h="285750">
+                <a:tc>
+                  <a:txBody>
+                    <a:bodyPr/>
+                    <a:lstStyle/>
+                    <a:p>
+                      <a:r>
+                        <a:rPr lang="en-US" sz="1275" b="0">
+                          <a:solidFill>
+                            <a:srgbClr val="16261F"/>
+                          </a:solidFill>
+                          <a:latin typeface="Arial" panose="020B0604020202020204" pitchFamily="34" charset="0"/>
+                          <a:ea typeface="Arial"/>
+                          <a:cs typeface="Arial"/>
+                        </a:rPr>
+                        <a:t>SET DAY/PM/NIGHT W C</a:t>
+                      </a:r>
+                      <a:endParaRPr sz="1275" b="0">
+                        <a:solidFill>
+                          <a:srgbClr val="16261F"/>
+                        </a:solidFill>
+                        <a:latin typeface="Arial" panose="020B0604020202020204" pitchFamily="34" charset="0"/>
+                        <a:ea typeface="Arial"/>
+                        <a:cs typeface="Arial"/>
+                      </a:endParaRPr>
+                    </a:p>
+                  </a:txBody>
+                  <a:tcPr/>
+                </a:tc>
+                <a:tc>
+                  <a:txBody>
+                    <a:bodyPr/>
+                    <a:lstStyle/>
+                    <a:p>
+                      <a:r>
+                        <a:rPr lang="zh-CN" altLang="en-US" sz="1275" b="0">
+                          <a:solidFill>
+                            <a:srgbClr val="16261F"/>
+                          </a:solidFill>
+                          <a:latin typeface="Arial" panose="020B0604020202020204" pitchFamily="34" charset="0"/>
+                          <a:ea typeface="Arial"/>
+                          <a:cs typeface="Arial"/>
+                        </a:rPr>
+                        <a:t>设置各时段温度阈值（预警</a:t>
+                      </a:r>
+                      <a:r>
+                        <a:rPr lang="en-US" altLang="zh-CN" sz="1275" b="0">
+                          <a:solidFill>
+                            <a:srgbClr val="16261F"/>
+                          </a:solidFill>
+                          <a:latin typeface="Arial" panose="020B0604020202020204" pitchFamily="34" charset="0"/>
+                          <a:ea typeface="Arial"/>
+                          <a:cs typeface="Arial"/>
+                        </a:rPr>
+                        <a:t>/</a:t>
+                      </a:r>
+                      <a:r>
+                        <a:rPr lang="zh-CN" altLang="en-US" sz="1275" b="0">
+                          <a:solidFill>
+                            <a:srgbClr val="16261F"/>
+                          </a:solidFill>
+                          <a:latin typeface="Arial" panose="020B0604020202020204" pitchFamily="34" charset="0"/>
+                          <a:ea typeface="Arial"/>
+                          <a:cs typeface="Arial"/>
+                        </a:rPr>
+                        <a:t>严重）</a:t>
+                      </a:r>
+                      <a:endParaRPr sz="1275" b="0">
+                        <a:solidFill>
+                          <a:srgbClr val="16261F"/>
+                        </a:solidFill>
+                        <a:latin typeface="Arial" panose="020B0604020202020204" pitchFamily="34" charset="0"/>
+                        <a:ea typeface="Arial"/>
+                        <a:cs typeface="Arial"/>
+                      </a:endParaRPr>
+                    </a:p>
+                  </a:txBody>
+                  <a:tcPr/>
+                </a:tc>
+                <a:extLst>
+                  <a:ext uri="{0D108BD9-81ED-4DB2-BD59-A6C34878D82A}">
+                    <a16:rowId xmlns:a16="http://schemas.microsoft.com/office/drawing/2014/main" val="4130180361"/>
+                  </a:ext>
+                </a:extLst>
+              </a:tr>
+              <a:tr h="285750">
+                <a:tc>
+                  <a:txBody>
+                    <a:bodyPr/>
+                    <a:lstStyle/>
+                    <a:p>
+                      <a:r>
+                        <a:rPr lang="en-US" sz="1275" b="0">
+                          <a:solidFill>
+                            <a:srgbClr val="16261F"/>
+                          </a:solidFill>
+                          <a:latin typeface="Arial" panose="020B0604020202020204" pitchFamily="34" charset="0"/>
+                          <a:ea typeface="Arial"/>
+                          <a:cs typeface="Arial"/>
+                        </a:rPr>
+                        <a:t>SET HUM W C</a:t>
+                      </a:r>
+                      <a:endParaRPr sz="1275" b="0">
+                        <a:solidFill>
+                          <a:srgbClr val="16261F"/>
+                        </a:solidFill>
+                        <a:latin typeface="Arial" panose="020B0604020202020204" pitchFamily="34" charset="0"/>
+                        <a:ea typeface="Arial"/>
+                        <a:cs typeface="Arial"/>
+                      </a:endParaRPr>
+                    </a:p>
+                  </a:txBody>
+                  <a:tcPr/>
+                </a:tc>
+                <a:tc>
+                  <a:txBody>
+                    <a:bodyPr/>
+                    <a:lstStyle/>
+                    <a:p>
+                      <a:r>
+                        <a:rPr lang="zh-CN" altLang="en-US" sz="1275" b="0">
+                          <a:solidFill>
+                            <a:srgbClr val="16261F"/>
+                          </a:solidFill>
+                          <a:latin typeface="Arial" panose="020B0604020202020204" pitchFamily="34" charset="0"/>
+                          <a:ea typeface="Arial"/>
+                          <a:cs typeface="Arial"/>
+                        </a:rPr>
+                        <a:t>设置全天湿度阈值（预警</a:t>
+                      </a:r>
+                      <a:r>
+                        <a:rPr lang="en-US" altLang="zh-CN" sz="1275" b="0">
+                          <a:solidFill>
+                            <a:srgbClr val="16261F"/>
+                          </a:solidFill>
+                          <a:latin typeface="Arial" panose="020B0604020202020204" pitchFamily="34" charset="0"/>
+                          <a:ea typeface="Arial"/>
+                          <a:cs typeface="Arial"/>
+                        </a:rPr>
+                        <a:t>/</a:t>
+                      </a:r>
+                      <a:r>
+                        <a:rPr lang="zh-CN" altLang="en-US" sz="1275" b="0">
+                          <a:solidFill>
+                            <a:srgbClr val="16261F"/>
+                          </a:solidFill>
+                          <a:latin typeface="Arial" panose="020B0604020202020204" pitchFamily="34" charset="0"/>
+                          <a:ea typeface="Arial"/>
+                          <a:cs typeface="Arial"/>
+                        </a:rPr>
+                        <a:t>严重）</a:t>
+                      </a:r>
+                      <a:endParaRPr sz="1275" b="0">
+                        <a:solidFill>
+                          <a:srgbClr val="16261F"/>
+                        </a:solidFill>
+                        <a:latin typeface="Arial" panose="020B0604020202020204" pitchFamily="34" charset="0"/>
+                        <a:ea typeface="Arial"/>
+                        <a:cs typeface="Arial"/>
+                      </a:endParaRPr>
+                    </a:p>
+                  </a:txBody>
+                  <a:tcPr/>
+                </a:tc>
+                <a:extLst>
+                  <a:ext uri="{0D108BD9-81ED-4DB2-BD59-A6C34878D82A}">
+                    <a16:rowId xmlns:a16="http://schemas.microsoft.com/office/drawing/2014/main" val="3809904709"/>
+                  </a:ext>
+                </a:extLst>
+              </a:tr>
+              <a:tr h="285750">
                 <a:tc>
                   <a:txBody>
                     <a:bodyPr/>
@@ -3178,6 +3522,206 @@
           </a:graphicData>
         </a:graphic>
       </p:graphicFrame>
+      <p:sp>
+        <p:nvSpPr>
+          <p:cNvPr id="5" name="ExampleBox">
+            <a:extLst>
+              <a:ext uri="{FF2B5EF4-FFF2-40B4-BE49-F238E27FC236}">
+                <a16:creationId xmlns:a16="http://schemas.microsoft.com/office/drawing/2014/main" id="{6A5DD939-D14A-1E93-F9ED-4F7ED3351392}"/>
+              </a:ext>
+            </a:extLst>
+          </p:cNvPr>
+          <p:cNvSpPr txBox="1"/>
+          <p:nvPr/>
+        </p:nvSpPr>
+        <p:spPr>
+          <a:xfrm>
+            <a:off x="685800" y="5080000"/>
+            <a:ext cx="10820400" cy="507831"/>
+          </a:xfrm>
+          <a:prstGeom prst="rect">
+            <a:avLst/>
+          </a:prstGeom>
+          <a:noFill/>
+          <a:ln>
+            <a:solidFill>
+              <a:srgbClr val="D0D8C9"/>
+            </a:solidFill>
+          </a:ln>
+        </p:spPr>
+        <p:txBody>
+          <a:bodyPr vert="horz" wrap="square" rtlCol="0">
+            <a:spAutoFit/>
+          </a:bodyPr>
+          <a:lstStyle/>
+          <a:p>
+            <a:r>
+              <a:rPr lang="zh-CN" altLang="en-US" sz="1350">
+                <a:solidFill>
+                  <a:srgbClr val="68746E"/>
+                </a:solidFill>
+                <a:latin typeface="Arial" panose="020B0604020202020204" pitchFamily="34" charset="0"/>
+              </a:rPr>
+              <a:t>示例：</a:t>
+            </a:r>
+            <a:r>
+              <a:rPr lang="en-US" altLang="zh-CN" sz="1350">
+                <a:solidFill>
+                  <a:srgbClr val="68746E"/>
+                </a:solidFill>
+                <a:latin typeface="Arial" panose="020B0604020202020204" pitchFamily="34" charset="0"/>
+              </a:rPr>
+              <a:t>TIME 08:00 </a:t>
+            </a:r>
+            <a:r>
+              <a:rPr lang="zh-CN" altLang="en-US" sz="1350">
+                <a:solidFill>
+                  <a:srgbClr val="68746E"/>
+                </a:solidFill>
+                <a:latin typeface="Arial" panose="020B0604020202020204" pitchFamily="34" charset="0"/>
+              </a:rPr>
+              <a:t>校时后时段为上午（</a:t>
+            </a:r>
+            <a:r>
+              <a:rPr lang="en-US" altLang="zh-CN" sz="1350">
+                <a:solidFill>
+                  <a:srgbClr val="68746E"/>
+                </a:solidFill>
+                <a:latin typeface="Arial" panose="020B0604020202020204" pitchFamily="34" charset="0"/>
+              </a:rPr>
+              <a:t>DAY</a:t>
+            </a:r>
+            <a:r>
+              <a:rPr lang="zh-CN" altLang="en-US" sz="1350">
+                <a:solidFill>
+                  <a:srgbClr val="68746E"/>
+                </a:solidFill>
+                <a:latin typeface="Arial" panose="020B0604020202020204" pitchFamily="34" charset="0"/>
+              </a:rPr>
+              <a:t>）；</a:t>
+            </a:r>
+            <a:r>
+              <a:rPr lang="en-US" altLang="zh-CN" sz="1350">
+                <a:solidFill>
+                  <a:srgbClr val="68746E"/>
+                </a:solidFill>
+                <a:latin typeface="Arial" panose="020B0604020202020204" pitchFamily="34" charset="0"/>
+              </a:rPr>
+              <a:t>SET DAY 26 31 </a:t>
+            </a:r>
+            <a:r>
+              <a:rPr lang="zh-CN" altLang="en-US" sz="1350">
+                <a:solidFill>
+                  <a:srgbClr val="68746E"/>
+                </a:solidFill>
+                <a:latin typeface="Arial" panose="020B0604020202020204" pitchFamily="34" charset="0"/>
+              </a:rPr>
+              <a:t>把上午改为 </a:t>
+            </a:r>
+            <a:r>
+              <a:rPr lang="en-US" altLang="zh-CN" sz="1350">
+                <a:solidFill>
+                  <a:srgbClr val="68746E"/>
+                </a:solidFill>
+                <a:latin typeface="Arial" panose="020B0604020202020204" pitchFamily="34" charset="0"/>
+              </a:rPr>
+              <a:t>26/31 ℃</a:t>
+            </a:r>
+            <a:r>
+              <a:rPr lang="zh-CN" altLang="en-US" sz="1350">
+                <a:solidFill>
+                  <a:srgbClr val="68746E"/>
+                </a:solidFill>
+                <a:latin typeface="Arial" panose="020B0604020202020204" pitchFamily="34" charset="0"/>
+              </a:rPr>
+              <a:t>；</a:t>
+            </a:r>
+            <a:r>
+              <a:rPr lang="en-US" altLang="zh-CN" sz="1350">
+                <a:solidFill>
+                  <a:srgbClr val="68746E"/>
+                </a:solidFill>
+                <a:latin typeface="Arial" panose="020B0604020202020204" pitchFamily="34" charset="0"/>
+              </a:rPr>
+              <a:t>SET HUM 75 85 </a:t>
+            </a:r>
+            <a:r>
+              <a:rPr lang="zh-CN" altLang="en-US" sz="1350">
+                <a:solidFill>
+                  <a:srgbClr val="68746E"/>
+                </a:solidFill>
+                <a:latin typeface="Arial" panose="020B0604020202020204" pitchFamily="34" charset="0"/>
+              </a:rPr>
+              <a:t>把湿度改为 </a:t>
+            </a:r>
+            <a:r>
+              <a:rPr lang="en-US" altLang="zh-CN" sz="1350">
+                <a:solidFill>
+                  <a:srgbClr val="68746E"/>
+                </a:solidFill>
+                <a:latin typeface="Arial" panose="020B0604020202020204" pitchFamily="34" charset="0"/>
+              </a:rPr>
+              <a:t>75/85 %RH</a:t>
+            </a:r>
+            <a:r>
+              <a:rPr lang="zh-CN" altLang="en-US" sz="1350">
+                <a:solidFill>
+                  <a:srgbClr val="68746E"/>
+                </a:solidFill>
+                <a:latin typeface="Arial" panose="020B0604020202020204" pitchFamily="34" charset="0"/>
+              </a:rPr>
+              <a:t>。</a:t>
+            </a:r>
+          </a:p>
+          <a:p>
+            <a:r>
+              <a:rPr lang="zh-CN" altLang="en-US" sz="1350">
+                <a:solidFill>
+                  <a:srgbClr val="68746E"/>
+                </a:solidFill>
+                <a:latin typeface="Arial" panose="020B0604020202020204" pitchFamily="34" charset="0"/>
+              </a:rPr>
+              <a:t>参数前为预警值、后为严重值；不满足约束时返回 </a:t>
+            </a:r>
+            <a:r>
+              <a:rPr lang="en-US" altLang="zh-CN" sz="1350">
+                <a:solidFill>
+                  <a:srgbClr val="68746E"/>
+                </a:solidFill>
+                <a:latin typeface="Arial" panose="020B0604020202020204" pitchFamily="34" charset="0"/>
+              </a:rPr>
+              <a:t>ERR </a:t>
+            </a:r>
+            <a:r>
+              <a:rPr lang="zh-CN" altLang="en-US" sz="1350">
+                <a:solidFill>
+                  <a:srgbClr val="68746E"/>
+                </a:solidFill>
+                <a:latin typeface="Arial" panose="020B0604020202020204" pitchFamily="34" charset="0"/>
+              </a:rPr>
+              <a:t>并保持原值。</a:t>
+            </a:r>
+            <a:r>
+              <a:rPr lang="en-US" altLang="zh-CN" sz="1350">
+                <a:solidFill>
+                  <a:srgbClr val="68746E"/>
+                </a:solidFill>
+                <a:latin typeface="Arial" panose="020B0604020202020204" pitchFamily="34" charset="0"/>
+              </a:rPr>
+              <a:t>[TIME][SET] </a:t>
+            </a:r>
+            <a:r>
+              <a:rPr lang="zh-CN" altLang="en-US" sz="1350">
+                <a:solidFill>
+                  <a:srgbClr val="68746E"/>
+                </a:solidFill>
+                <a:latin typeface="Arial" panose="020B0604020202020204" pitchFamily="34" charset="0"/>
+              </a:rPr>
+              <a:t>需在复位后重新发送。</a:t>
+            </a:r>
+          </a:p>
+        </p:txBody>
+      </p:sp>
     </p:spTree>
     <p:extLst>
       <p:ext uri="{BB962C8B-B14F-4D97-AF65-F5344CB8AC3E}">
@@ -3391,8 +3935,8 @@
         </p:nvSpPr>
         <p:spPr>
           <a:xfrm>
-            <a:off x="685800" y="1333500"/>
-            <a:ext cx="8096250" cy="361950"/>
+            <a:off x="685800" y="1308100"/>
+            <a:ext cx="10160000" cy="558800"/>
           </a:xfrm>
           <a:prstGeom prst="rect">
             <a:avLst/>
@@ -3403,7 +3947,7 @@
           </a:ln>
         </p:spPr>
         <p:txBody>
-          <a:bodyPr anchor="ctr">
+          <a:bodyPr wrap="square" anchor="ctr">
             <a:normAutofit fontScale="94667" lnSpcReduction="10000"/>
           </a:bodyPr>
           <a:lstStyle/>
@@ -3419,7 +3963,7 @@
               </a:defRPr>
             </a:pPr>
             <a:r>
-              <a:rPr sz="1875" b="1">
+              <a:rPr lang="en-US" altLang="zh-CN" sz="1600" b="1">
                 <a:solidFill>
                   <a:srgbClr val="2F7A63"/>
                 </a:solidFill>
@@ -3427,8 +3971,49 @@
                 <a:ea typeface="Arial"/>
                 <a:cs typeface="Arial"/>
               </a:rPr>
-              <a:t>已完成 7 项现场功能验证，结果均为通过</a:t>
-            </a:r>
+              <a:t>4 </a:t>
+            </a:r>
+            <a:r>
+              <a:rPr lang="zh-CN" altLang="en-US" sz="1600" b="1">
+                <a:solidFill>
+                  <a:srgbClr val="2F7A63"/>
+                </a:solidFill>
+                <a:latin typeface="Arial"/>
+                <a:ea typeface="Arial"/>
+                <a:cs typeface="Arial"/>
+              </a:rPr>
+              <a:t>项现场实测通过；回差、安全覆盖、传感器失效 </a:t>
+            </a:r>
+            <a:r>
+              <a:rPr lang="en-US" altLang="zh-CN" sz="1600" b="1">
+                <a:solidFill>
+                  <a:srgbClr val="2F7A63"/>
+                </a:solidFill>
+                <a:latin typeface="Arial"/>
+                <a:ea typeface="Arial"/>
+                <a:cs typeface="Arial"/>
+              </a:rPr>
+              <a:t>3 </a:t>
+            </a:r>
+            <a:r>
+              <a:rPr lang="zh-CN" altLang="en-US" sz="1600" b="1">
+                <a:solidFill>
+                  <a:srgbClr val="2F7A63"/>
+                </a:solidFill>
+                <a:latin typeface="Arial"/>
+                <a:ea typeface="Arial"/>
+                <a:cs typeface="Arial"/>
+              </a:rPr>
+              <a:t>项为宿主机逻辑测试，未现场验证</a:t>
+            </a:r>
+            <a:endParaRPr sz="1600" b="1">
+              <a:solidFill>
+                <a:srgbClr val="2F7A63"/>
+              </a:solidFill>
+              <a:latin typeface="Arial"/>
+              <a:ea typeface="Arial"/>
+              <a:cs typeface="Arial"/>
+            </a:endParaRPr>
           </a:p>
         </p:txBody>
       </p:sp>
@@ -3436,7 +4021,13 @@
         <p:nvGraphicFramePr>
           <p:cNvPr id="10" name="表格 9"/>
           <p:cNvGraphicFramePr/>
-          <p:nvPr/>
+          <p:nvPr>
+            <p:extLst>
+              <p:ext uri="{D42A27DB-BD31-4B8C-83A1-F6EECF244321}">
+                <p14:modId xmlns:p14="http://schemas.microsoft.com/office/powerpoint/2010/main" val="2530562955"/>
+              </p:ext>
+            </p:extLst>
+          </p:nvPr>
         </p:nvGraphicFramePr>
         <p:xfrm>
           <a:off x="685800" y="1952625"/>
@@ -3840,7 +4431,7 @@
                   </a:ext>
                 </a:extLst>
               </a:tr>
-              <a:tr h="398859">
+              <a:tr h="398780">
                 <a:tc>
                   <a:txBody>
                     <a:bodyPr/>
@@ -3887,7 +4478,7 @@
                     <a:lstStyle/>
                     <a:p>
                       <a:r>
-                        <a:rPr sz="1125">
+                        <a:rPr lang="en-US" sz="1125">
                           <a:solidFill>
                             <a:srgbClr val="16261F"/>
                           </a:solidFill>
@@ -3895,8 +4486,16 @@
                           <a:ea typeface="Arial"/>
                           <a:cs typeface="Arial"/>
                         </a:rPr>
-                        <a:t>阈值附近状态切换正常</a:t>
+                        <a:t>28→27→26 ℃：WARNING→WARNING→NORMAL</a:t>
                       </a:r>
+                      <a:endParaRPr sz="1125">
+                        <a:solidFill>
+                          <a:srgbClr val="16261F"/>
+                        </a:solidFill>
+                        <a:latin typeface="Arial"/>
+                        <a:ea typeface="Arial"/>
+                        <a:cs typeface="Arial"/>
+                      </a:endParaRPr>
                     </a:p>
                   </a:txBody>
                   <a:tcPr/>
@@ -3907,7 +4506,7 @@
                     <a:lstStyle/>
                     <a:p>
                       <a:r>
-                        <a:rPr sz="1125">
+                        <a:rPr lang="zh-CN" altLang="en-US" sz="1125" b="0">
                           <a:solidFill>
                             <a:srgbClr val="16261F"/>
                           </a:solidFill>
@@ -3915,8 +4514,16 @@
                           <a:ea typeface="Arial"/>
                           <a:cs typeface="Arial"/>
                         </a:rPr>
-                        <a:t>通过</a:t>
+                        <a:t>按代码逻辑，未现场验证</a:t>
                       </a:r>
+                      <a:endParaRPr sz="1125" b="0">
+                        <a:solidFill>
+                          <a:srgbClr val="16261F"/>
+                        </a:solidFill>
+                        <a:latin typeface="Arial"/>
+                        <a:ea typeface="Arial"/>
+                        <a:cs typeface="Arial"/>
+                      </a:endParaRPr>
                     </a:p>
                   </a:txBody>
                   <a:tcPr/>
@@ -3927,7 +4534,7 @@
                   </a:ext>
                 </a:extLst>
               </a:tr>
-              <a:tr h="398859">
+              <a:tr h="398780">
                 <a:tc>
                   <a:txBody>
                     <a:bodyPr/>
@@ -3974,7 +4581,7 @@
                     <a:lstStyle/>
                     <a:p>
                       <a:r>
-                        <a:rPr sz="1125">
+                        <a:rPr lang="en-US" sz="1125">
                           <a:solidFill>
                             <a:srgbClr val="16261F"/>
                           </a:solidFill>
@@ -3982,8 +4589,49 @@
                           <a:ea typeface="Arial"/>
                           <a:cs typeface="Arial"/>
                         </a:rPr>
-                        <a:t>严重报警下风扇安全逻辑正常</a:t>
+                        <a:t>CRITICAL </a:t>
                       </a:r>
+                      <a:r>
+                        <a:rPr lang="zh-CN" altLang="en-US" sz="1125">
+                          <a:solidFill>
+                            <a:srgbClr val="16261F"/>
+                          </a:solidFill>
+                          <a:latin typeface="Arial"/>
+                          <a:ea typeface="Arial"/>
+                          <a:cs typeface="Arial"/>
+                        </a:rPr>
+                        <a:t>下 </a:t>
+                      </a:r>
+                      <a:r>
+                        <a:rPr lang="en-US" sz="1125">
+                          <a:solidFill>
+                            <a:srgbClr val="16261F"/>
+                          </a:solidFill>
+                          <a:latin typeface="Arial"/>
+                          <a:ea typeface="Arial"/>
+                          <a:cs typeface="Arial"/>
+                        </a:rPr>
+                        <a:t>FAN OFF </a:t>
+                      </a:r>
+                      <a:r>
+                        <a:rPr lang="zh-CN" altLang="en-US" sz="1125">
+                          <a:solidFill>
+                            <a:srgbClr val="16261F"/>
+                          </a:solidFill>
+                          <a:latin typeface="Arial"/>
+                          <a:ea typeface="Arial"/>
+                          <a:cs typeface="Arial"/>
+                        </a:rPr>
+                        <a:t>仍保持风扇开启</a:t>
+                      </a:r>
+                      <a:endParaRPr sz="1125">
+                        <a:solidFill>
+                          <a:srgbClr val="16261F"/>
+                        </a:solidFill>
+                        <a:latin typeface="Arial"/>
+                        <a:ea typeface="Arial"/>
+                        <a:cs typeface="Arial"/>
+                      </a:endParaRPr>
                     </a:p>
                   </a:txBody>
                   <a:tcPr/>
@@ -3994,7 +4642,7 @@
                     <a:lstStyle/>
                     <a:p>
                       <a:r>
-                        <a:rPr sz="1125">
+                        <a:rPr lang="zh-CN" altLang="en-US" sz="1125" b="0">
                           <a:solidFill>
                             <a:srgbClr val="16261F"/>
                           </a:solidFill>
@@ -4002,8 +4650,16 @@
                           <a:ea typeface="Arial"/>
                           <a:cs typeface="Arial"/>
                         </a:rPr>
-                        <a:t>通过</a:t>
+                        <a:t>按代码逻辑，未现场验证</a:t>
                       </a:r>
+                      <a:endParaRPr sz="1125" b="0">
+                        <a:solidFill>
+                          <a:srgbClr val="16261F"/>
+                        </a:solidFill>
+                        <a:latin typeface="Arial"/>
+                        <a:ea typeface="Arial"/>
+                        <a:cs typeface="Arial"/>
+                      </a:endParaRPr>
                     </a:p>
                   </a:txBody>
                   <a:tcPr/>
@@ -4014,7 +4670,7 @@
                   </a:ext>
                 </a:extLst>
               </a:tr>
-              <a:tr h="398859">
+              <a:tr h="398780">
                 <a:tc>
                   <a:txBody>
                     <a:bodyPr/>
@@ -4101,7 +4757,7 @@
                   </a:ext>
                 </a:extLst>
               </a:tr>
-              <a:tr h="398859">
+              <a:tr h="398780">
                 <a:tc>
                   <a:txBody>
                     <a:bodyPr/>
@@ -4148,7 +4804,7 @@
                     <a:lstStyle/>
                     <a:p>
                       <a:r>
-                        <a:rPr sz="1125">
+                        <a:rPr lang="zh-CN" altLang="en-US" sz="1125">
                           <a:solidFill>
                             <a:srgbClr val="16261F"/>
                           </a:solidFill>
@@ -4156,8 +4812,16 @@
                           <a:ea typeface="Arial"/>
                           <a:cs typeface="Arial"/>
                         </a:rPr>
-                        <a:t>失效提示及安全逻辑正常</a:t>
+                        <a:t>后断线风扇开；上电即断线风扇关</a:t>
                       </a:r>
+                      <a:endParaRPr sz="1125">
+                        <a:solidFill>
+                          <a:srgbClr val="16261F"/>
+                        </a:solidFill>
+                        <a:latin typeface="Arial"/>
+                        <a:ea typeface="Arial"/>
+                        <a:cs typeface="Arial"/>
+                      </a:endParaRPr>
                     </a:p>
                   </a:txBody>
                   <a:tcPr/>
@@ -4168,7 +4832,7 @@
                     <a:lstStyle/>
                     <a:p>
                       <a:r>
-                        <a:rPr sz="1125">
+                        <a:rPr lang="zh-CN" altLang="en-US" sz="1125" b="0">
                           <a:solidFill>
                             <a:srgbClr val="16261F"/>
                           </a:solidFill>
@@ -4176,8 +4840,16 @@
                           <a:ea typeface="Arial"/>
                           <a:cs typeface="Arial"/>
                         </a:rPr>
-                        <a:t>通过</a:t>
+                        <a:t>按代码逻辑，未现场验证</a:t>
                       </a:r>
+                      <a:endParaRPr sz="1125" b="0">
+                        <a:solidFill>
+                          <a:srgbClr val="16261F"/>
+                        </a:solidFill>
+                        <a:latin typeface="Arial"/>
+                        <a:ea typeface="Arial"/>
+                        <a:cs typeface="Arial"/>
+                      </a:endParaRPr>
                     </a:p>
                   </a:txBody>
                   <a:tcPr/>
@@ -4192,6 +4864,167 @@
           </a:graphicData>
         </a:graphic>
       </p:graphicFrame>
+      <p:sp>
+        <p:nvSpPr>
+          <p:cNvPr id="5" name="SplitNote">
+            <a:extLst>
+              <a:ext uri="{FF2B5EF4-FFF2-40B4-BE49-F238E27FC236}">
+                <a16:creationId xmlns:a16="http://schemas.microsoft.com/office/drawing/2014/main" id="{27FF6047-AF87-3A77-5F4D-915C6313B418}"/>
+              </a:ext>
+            </a:extLst>
+          </p:cNvPr>
+          <p:cNvSpPr txBox="1"/>
+          <p:nvPr/>
+        </p:nvSpPr>
+        <p:spPr>
+          <a:xfrm>
+            <a:off x="685800" y="5334000"/>
+            <a:ext cx="10820400" cy="523220"/>
+          </a:xfrm>
+          <a:prstGeom prst="rect">
+            <a:avLst/>
+          </a:prstGeom>
+          <a:noFill/>
+        </p:spPr>
+        <p:txBody>
+          <a:bodyPr vert="horz" wrap="square" rtlCol="0">
+            <a:spAutoFit/>
+          </a:bodyPr>
+          <a:lstStyle/>
+          <a:p>
+            <a:r>
+              <a:rPr lang="zh-CN" altLang="en-US" sz="1400">
+                <a:solidFill>
+                  <a:srgbClr val="68746E"/>
+                </a:solidFill>
+              </a:rPr>
+              <a:t>分时功能：</a:t>
+            </a:r>
+            <a:r>
+              <a:rPr lang="en-US" altLang="zh-CN" sz="1400">
+                <a:solidFill>
+                  <a:srgbClr val="68746E"/>
+                </a:solidFill>
+              </a:rPr>
+              <a:t>TIME </a:t>
+            </a:r>
+            <a:r>
+              <a:rPr lang="zh-CN" altLang="en-US" sz="1400">
+                <a:solidFill>
+                  <a:srgbClr val="68746E"/>
+                </a:solidFill>
+              </a:rPr>
+              <a:t>跨 </a:t>
+            </a:r>
+            <a:r>
+              <a:rPr lang="en-US" altLang="zh-CN" sz="1400">
+                <a:solidFill>
+                  <a:srgbClr val="68746E"/>
+                </a:solidFill>
+              </a:rPr>
+              <a:t>06:00 / 12:00 / 18:00 </a:t>
+            </a:r>
+            <a:r>
+              <a:rPr lang="zh-CN" altLang="en-US" sz="1400">
+                <a:solidFill>
+                  <a:srgbClr val="68746E"/>
+                </a:solidFill>
+              </a:rPr>
+              <a:t>自动切换；</a:t>
+            </a:r>
+            <a:r>
+              <a:rPr lang="en-US" altLang="zh-CN" sz="1400">
+                <a:solidFill>
+                  <a:srgbClr val="68746E"/>
+                </a:solidFill>
+              </a:rPr>
+              <a:t>SET DAY/PM/NIGHT</a:t>
+            </a:r>
+            <a:r>
+              <a:rPr lang="zh-CN" altLang="en-US" sz="1400">
+                <a:solidFill>
+                  <a:srgbClr val="68746E"/>
+                </a:solidFill>
+              </a:rPr>
+              <a:t>、</a:t>
+            </a:r>
+            <a:r>
+              <a:rPr lang="en-US" altLang="zh-CN" sz="1400">
+                <a:solidFill>
+                  <a:srgbClr val="68746E"/>
+                </a:solidFill>
+              </a:rPr>
+              <a:t>SET HUM </a:t>
+            </a:r>
+            <a:r>
+              <a:rPr lang="zh-CN" altLang="en-US" sz="1400">
+                <a:solidFill>
+                  <a:srgbClr val="68746E"/>
+                </a:solidFill>
+              </a:rPr>
+              <a:t>后 </a:t>
+            </a:r>
+            <a:r>
+              <a:rPr lang="en-US" altLang="zh-CN" sz="1400">
+                <a:solidFill>
+                  <a:srgbClr val="68746E"/>
+                </a:solidFill>
+              </a:rPr>
+              <a:t>STATUS </a:t>
+            </a:r>
+            <a:r>
+              <a:rPr lang="zh-CN" altLang="en-US" sz="1400">
+                <a:solidFill>
+                  <a:srgbClr val="68746E"/>
+                </a:solidFill>
+              </a:rPr>
+              <a:t>与 </a:t>
+            </a:r>
+            <a:r>
+              <a:rPr lang="en-US" altLang="zh-CN" sz="1400">
+                <a:solidFill>
+                  <a:srgbClr val="68746E"/>
+                </a:solidFill>
+              </a:rPr>
+              <a:t>OLED </a:t>
+            </a:r>
+            <a:r>
+              <a:rPr lang="zh-CN" altLang="en-US" sz="1400">
+                <a:solidFill>
+                  <a:srgbClr val="68746E"/>
+                </a:solidFill>
+              </a:rPr>
+              <a:t>读回一致。</a:t>
+            </a:r>
+          </a:p>
+          <a:p>
+            <a:r>
+              <a:rPr lang="zh-CN" altLang="en-US" sz="1400">
+                <a:solidFill>
+                  <a:srgbClr val="68746E"/>
+                </a:solidFill>
+              </a:rPr>
+              <a:t>回差、安全覆盖、传感器失效 </a:t>
+            </a:r>
+            <a:r>
+              <a:rPr lang="en-US" altLang="zh-CN" sz="1400">
+                <a:solidFill>
+                  <a:srgbClr val="68746E"/>
+                </a:solidFill>
+              </a:rPr>
+              <a:t>3 </a:t>
+            </a:r>
+            <a:r>
+              <a:rPr lang="zh-CN" altLang="en-US" sz="1400">
+                <a:solidFill>
+                  <a:srgbClr val="68746E"/>
+                </a:solidFill>
+              </a:rPr>
+              <a:t>项为宿主机逻辑测试，未现场验证；分时阈值沿用同一套安全逻辑。</a:t>
+            </a:r>
+          </a:p>
+        </p:txBody>
+      </p:sp>
     </p:spTree>
     <p:extLst>
       <p:ext uri="{BB962C8B-B14F-4D97-AF65-F5344CB8AC3E}">
@@ -4369,7 +5202,7 @@
                   <a:srgbClr val="4F5936"/>
                 </a:solidFill>
               </a:rPr>
-              <a:t>左侧视频介绍硬件功能；右侧四段视频为实际功能验证证据。</a:t>
+              <a:t>左侧视频介绍硬件功能；右侧五段视频为实际功能验证证据（未验证项以文字说明标出）。</a:t>
             </a:r>
           </a:p>
         </p:txBody>
@@ -4484,7 +5317,7 @@
         <p:spPr>
           <a:xfrm>
             <a:off x="6096000" y="1841500"/>
-            <a:ext cx="5334000" cy="400110"/>
+            <a:ext cx="5334000" cy="384721"/>
           </a:xfrm>
           <a:prstGeom prst="rect">
             <a:avLst/>
@@ -4498,12 +5331,28 @@
           <a:lstStyle/>
           <a:p>
             <a:r>
-              <a:rPr lang="zh-CN" altLang="en-US" sz="2000" b="1">
+              <a:rPr lang="zh-CN" altLang="en-US" sz="1900" b="1">
                 <a:solidFill>
                   <a:srgbClr val="4F5936"/>
                 </a:solidFill>
               </a:rPr>
-              <a:t>功能测试视频</a:t>
+              <a:t>功能测试视频（</a:t>
+            </a:r>
+            <a:r>
+              <a:rPr lang="en-US" altLang="zh-CN" sz="1900" b="1">
+                <a:solidFill>
+                  <a:srgbClr val="4F5936"/>
+                </a:solidFill>
+              </a:rPr>
+              <a:t>5 </a:t>
+            </a:r>
+            <a:r>
+              <a:rPr lang="zh-CN" altLang="en-US" sz="1900" b="1">
+                <a:solidFill>
+                  <a:srgbClr val="4F5936"/>
+                </a:solidFill>
+              </a:rPr>
+              <a:t>段）</a:t>
             </a:r>
           </a:p>
         </p:txBody>
@@ -4523,7 +5372,7 @@
         </p:nvSpPr>
         <p:spPr>
           <a:xfrm>
-            <a:off x="6096000" y="2286000"/>
+            <a:off x="6096000" y="2184400"/>
             <a:ext cx="5334000" cy="482600"/>
           </a:xfrm>
           <a:prstGeom prst="roundRect">
@@ -4560,7 +5409,7 @@
           <a:p>
             <a:pPr algn="ctr"/>
             <a:r>
-              <a:rPr lang="zh-CN" altLang="en-US" sz="1500" b="1">
+              <a:rPr lang="zh-CN" altLang="en-US" sz="1350" b="1">
                 <a:solidFill>
                   <a:srgbClr val="323B1F"/>
                 </a:solidFill>
@@ -4568,7 +5417,7 @@
               <a:t>▶  测试</a:t>
             </a:r>
             <a:r>
-              <a:rPr lang="en-US" altLang="zh-CN" sz="1500" b="1">
+              <a:rPr lang="en-US" altLang="zh-CN" sz="1350" b="1">
                 <a:solidFill>
                   <a:srgbClr val="323B1F"/>
                 </a:solidFill>
@@ -4576,7 +5425,7 @@
               <a:t>1  </a:t>
             </a:r>
             <a:r>
-              <a:rPr lang="zh-CN" altLang="en-US" sz="1500" b="1">
+              <a:rPr lang="zh-CN" altLang="en-US" sz="1350" b="1">
                 <a:solidFill>
                   <a:srgbClr val="323B1F"/>
                 </a:solidFill>
@@ -4601,7 +5450,7 @@
         </p:nvSpPr>
         <p:spPr>
           <a:xfrm>
-            <a:off x="6096000" y="2870200"/>
+            <a:off x="6096000" y="2641600"/>
             <a:ext cx="5334000" cy="482600"/>
           </a:xfrm>
           <a:prstGeom prst="roundRect">
@@ -4638,7 +5487,7 @@
           <a:p>
             <a:pPr algn="ctr"/>
             <a:r>
-              <a:rPr lang="zh-CN" altLang="en-US" sz="1500" b="1">
+              <a:rPr lang="zh-CN" altLang="en-US" sz="1350" b="1">
                 <a:solidFill>
                   <a:srgbClr val="323B1F"/>
                 </a:solidFill>
@@ -4646,7 +5495,7 @@
               <a:t>▶  测试</a:t>
             </a:r>
             <a:r>
-              <a:rPr lang="en-US" altLang="zh-CN" sz="1500" b="1">
+              <a:rPr lang="en-US" altLang="zh-CN" sz="1350" b="1">
                 <a:solidFill>
                   <a:srgbClr val="323B1F"/>
                 </a:solidFill>
@@ -4654,7 +5503,7 @@
               <a:t>2  </a:t>
             </a:r>
             <a:r>
-              <a:rPr lang="zh-CN" altLang="en-US" sz="1500" b="1">
+              <a:rPr lang="zh-CN" altLang="en-US" sz="1350" b="1">
                 <a:solidFill>
                   <a:srgbClr val="323B1F"/>
                 </a:solidFill>
@@ -4679,7 +5528,7 @@
         </p:nvSpPr>
         <p:spPr>
           <a:xfrm>
-            <a:off x="6096000" y="3454400"/>
+            <a:off x="6096000" y="3098800"/>
             <a:ext cx="5334000" cy="482600"/>
           </a:xfrm>
           <a:prstGeom prst="roundRect">
@@ -4716,7 +5565,7 @@
           <a:p>
             <a:pPr algn="ctr"/>
             <a:r>
-              <a:rPr lang="zh-CN" altLang="en-US" sz="1500" b="1">
+              <a:rPr lang="zh-CN" altLang="en-US" sz="1350" b="1">
                 <a:solidFill>
                   <a:srgbClr val="323B1F"/>
                 </a:solidFill>
@@ -4724,7 +5573,7 @@
               <a:t>▶  测试</a:t>
             </a:r>
             <a:r>
-              <a:rPr lang="en-US" altLang="zh-CN" sz="1500" b="1">
+              <a:rPr lang="en-US" altLang="zh-CN" sz="1350" b="1">
                 <a:solidFill>
                   <a:srgbClr val="323B1F"/>
                 </a:solidFill>
@@ -4732,7 +5581,7 @@
               <a:t>3  </a:t>
             </a:r>
             <a:r>
-              <a:rPr lang="zh-CN" altLang="en-US" sz="1500" b="1">
+              <a:rPr lang="zh-CN" altLang="en-US" sz="1350" b="1">
                 <a:solidFill>
                   <a:srgbClr val="323B1F"/>
                 </a:solidFill>
@@ -4757,7 +5606,7 @@
         </p:nvSpPr>
         <p:spPr>
           <a:xfrm>
-            <a:off x="6096000" y="4038600"/>
+            <a:off x="6096000" y="3556000"/>
             <a:ext cx="5334000" cy="482600"/>
           </a:xfrm>
           <a:prstGeom prst="roundRect">
@@ -4794,7 +5643,7 @@
           <a:p>
             <a:pPr algn="ctr"/>
             <a:r>
-              <a:rPr lang="zh-CN" altLang="en-US" sz="1500" b="1">
+              <a:rPr lang="zh-CN" altLang="en-US" sz="1350" b="1">
                 <a:solidFill>
                   <a:srgbClr val="323B1F"/>
                 </a:solidFill>
@@ -4802,7 +5651,7 @@
               <a:t>▶  测试</a:t>
             </a:r>
             <a:r>
-              <a:rPr lang="en-US" altLang="zh-CN" sz="1500" b="1">
+              <a:rPr lang="en-US" altLang="zh-CN" sz="1350" b="1">
                 <a:solidFill>
                   <a:srgbClr val="323B1F"/>
                 </a:solidFill>
@@ -4810,7 +5659,7 @@
               <a:t>4  </a:t>
             </a:r>
             <a:r>
-              <a:rPr lang="zh-CN" altLang="en-US" sz="1500" b="1">
+              <a:rPr lang="zh-CN" altLang="en-US" sz="1350" b="1">
                 <a:solidFill>
                   <a:srgbClr val="323B1F"/>
                 </a:solidFill>
@@ -4866,16 +5715,94 @@
           </a:fontRef>
         </p:style>
         <p:txBody>
-          <a:bodyPr lIns="203200" tIns="127000" rtlCol="0" anchor="t"/>
-          <a:lstStyle/>
-          <a:p>
-            <a:r>
-              <a:rPr lang="zh-CN" altLang="en-US" sz="1500">
+          <a:bodyPr wrap="square" lIns="203200" tIns="127000" rtlCol="0" anchor="t"/>
+          <a:lstStyle/>
+          <a:p>
+            <a:r>
+              <a:rPr lang="zh-CN" altLang="en-US" sz="1450">
                 <a:solidFill>
                   <a:srgbClr val="323B1F"/>
                 </a:solidFill>
               </a:rPr>
-              <a:t>实际验证内容：正常采集与显示｜预警状态联动｜严重报警与风扇运行｜报警静音后其他状态保持。</a:t>
+              <a:t>实际验证内容：① 正常采集与显示　② 预警状态联动　③ 严重报警与风扇运行　④ 报警静音后其他状态保持　⑤ 蓝牙校时、跨时段阈值自动切换</a:t>
+            </a:r>
+          </a:p>
+        </p:txBody>
+      </p:sp>
+      <p:sp>
+        <p:nvSpPr>
+          <p:cNvPr id="7" name="Rounded Rectangle 21">
+            <a:hlinkClick r:id="rId8" action="ppaction://hlinkfile"/>
+            <a:extLst>
+              <a:ext uri="{FF2B5EF4-FFF2-40B4-BE49-F238E27FC236}">
+                <a16:creationId xmlns:a16="http://schemas.microsoft.com/office/drawing/2014/main" id="{3D99C3BB-6691-FD3A-6685-7688736DC951}"/>
+              </a:ext>
+            </a:extLst>
+          </p:cNvPr>
+          <p:cNvSpPr/>
+          <p:nvPr/>
+        </p:nvSpPr>
+        <p:spPr>
+          <a:xfrm>
+            <a:off x="6096000" y="4013200"/>
+            <a:ext cx="5334000" cy="482600"/>
+          </a:xfrm>
+          <a:prstGeom prst="roundRect">
+            <a:avLst/>
+          </a:prstGeom>
+          <a:solidFill>
+            <a:srgbClr val="F7FAF7"/>
+          </a:solidFill>
+          <a:ln>
+            <a:solidFill>
+              <a:srgbClr val="C3CFB8"/>
+            </a:solidFill>
+          </a:ln>
+        </p:spPr>
+        <p:style>
+          <a:lnRef idx="2">
+            <a:schemeClr val="accent1">
+              <a:shade val="15000"/>
+            </a:schemeClr>
+          </a:lnRef>
+          <a:fillRef idx="1">
+            <a:schemeClr val="accent1"/>
+          </a:fillRef>
+          <a:effectRef idx="0">
+            <a:schemeClr val="accent1"/>
+          </a:effectRef>
+          <a:fontRef idx="minor">
+            <a:schemeClr val="lt1"/>
+          </a:fontRef>
+        </p:style>
+        <p:txBody>
+          <a:bodyPr wrap="square" rtlCol="0" anchor="ctr"/>
+          <a:lstStyle/>
+          <a:p>
+            <a:pPr algn="ctr"/>
+            <a:r>
+              <a:rPr lang="zh-CN" altLang="en-US" sz="1350" b="1">
+                <a:solidFill>
+                  <a:srgbClr val="323B1F"/>
+                </a:solidFill>
+              </a:rPr>
+              <a:t>▶  测试</a:t>
+            </a:r>
+            <a:r>
+              <a:rPr lang="en-US" altLang="zh-CN" sz="1350" b="1">
+                <a:solidFill>
+                  <a:srgbClr val="323B1F"/>
+                </a:solidFill>
+              </a:rPr>
+              <a:t>5  </a:t>
+            </a:r>
+            <a:r>
+              <a:rPr lang="zh-CN" altLang="en-US" sz="1350" b="1">
+                <a:solidFill>
+                  <a:srgbClr val="323B1F"/>
+                </a:solidFill>
+              </a:rPr>
+              <a:t>校时与分时切换</a:t>
             </a:r>
           </a:p>
         </p:txBody>
@@ -10286,8 +11213,8 @@
         </p:nvSpPr>
         <p:spPr>
           <a:xfrm>
-            <a:off x="781050" y="5810250"/>
-            <a:ext cx="10096500" cy="381000"/>
+            <a:off x="762000" y="5740400"/>
+            <a:ext cx="10820400" cy="711200"/>
           </a:xfrm>
           <a:prstGeom prst="rect">
             <a:avLst/>
@@ -10298,7 +11225,7 @@
           </a:ln>
         </p:spPr>
         <p:txBody>
-          <a:bodyPr anchor="ctr">
+          <a:bodyPr wrap="square" anchor="ctr">
             <a:normAutofit/>
           </a:bodyPr>
           <a:lstStyle/>
@@ -10314,7 +11241,7 @@
               </a:defRPr>
             </a:pPr>
             <a:r>
-              <a:rPr sz="1500" b="0">
+              <a:rPr lang="zh-CN" altLang="en-US" sz="1400" b="0">
                 <a:solidFill>
                   <a:srgbClr val="68746E"/>
                 </a:solidFill>
@@ -10322,8 +11249,193 @@
                 <a:ea typeface="Arial"/>
                 <a:cs typeface="Arial"/>
               </a:rPr>
-              <a:t>报警阈值：温度 28 / 30 ℃，湿度 70 / 80 %RH。退出报警采用温度 1 ℃、湿度 5 %RH 回差。</a:t>
-            </a:r>
+              <a:t>报警阈值分时：上午 </a:t>
+            </a:r>
+            <a:r>
+              <a:rPr lang="en-US" altLang="zh-CN" sz="1400" b="0">
+                <a:solidFill>
+                  <a:srgbClr val="68746E"/>
+                </a:solidFill>
+                <a:latin typeface="Arial"/>
+                <a:ea typeface="Arial"/>
+                <a:cs typeface="Arial"/>
+              </a:rPr>
+              <a:t>25/30</a:t>
+            </a:r>
+            <a:r>
+              <a:rPr lang="zh-CN" altLang="en-US" sz="1400" b="0">
+                <a:solidFill>
+                  <a:srgbClr val="68746E"/>
+                </a:solidFill>
+                <a:latin typeface="Arial"/>
+                <a:ea typeface="Arial"/>
+                <a:cs typeface="Arial"/>
+              </a:rPr>
+              <a:t>、下午 </a:t>
+            </a:r>
+            <a:r>
+              <a:rPr lang="en-US" altLang="zh-CN" sz="1400" b="0">
+                <a:solidFill>
+                  <a:srgbClr val="68746E"/>
+                </a:solidFill>
+                <a:latin typeface="Arial"/>
+                <a:ea typeface="Arial"/>
+                <a:cs typeface="Arial"/>
+              </a:rPr>
+              <a:t>23/28</a:t>
+            </a:r>
+            <a:r>
+              <a:rPr lang="zh-CN" altLang="en-US" sz="1400" b="0">
+                <a:solidFill>
+                  <a:srgbClr val="68746E"/>
+                </a:solidFill>
+                <a:latin typeface="Arial"/>
+                <a:ea typeface="Arial"/>
+                <a:cs typeface="Arial"/>
+              </a:rPr>
+              <a:t>、夜间 </a:t>
+            </a:r>
+            <a:r>
+              <a:rPr lang="en-US" altLang="zh-CN" sz="1400" b="0">
+                <a:solidFill>
+                  <a:srgbClr val="68746E"/>
+                </a:solidFill>
+                <a:latin typeface="Arial"/>
+                <a:ea typeface="Arial"/>
+                <a:cs typeface="Arial"/>
+              </a:rPr>
+              <a:t>12/15 ℃</a:t>
+            </a:r>
+            <a:r>
+              <a:rPr lang="zh-CN" altLang="en-US" sz="1400" b="0">
+                <a:solidFill>
+                  <a:srgbClr val="68746E"/>
+                </a:solidFill>
+                <a:latin typeface="Arial"/>
+                <a:ea typeface="Arial"/>
+                <a:cs typeface="Arial"/>
+              </a:rPr>
+              <a:t>；湿度全天 </a:t>
+            </a:r>
+            <a:r>
+              <a:rPr lang="en-US" altLang="zh-CN" sz="1400" b="0">
+                <a:solidFill>
+                  <a:srgbClr val="68746E"/>
+                </a:solidFill>
+                <a:latin typeface="Arial"/>
+                <a:ea typeface="Arial"/>
+                <a:cs typeface="Arial"/>
+              </a:rPr>
+              <a:t>70/80 %RH</a:t>
+            </a:r>
+            <a:r>
+              <a:rPr lang="zh-CN" altLang="en-US" sz="1400" b="0">
+                <a:solidFill>
+                  <a:srgbClr val="68746E"/>
+                </a:solidFill>
+                <a:latin typeface="Arial"/>
+                <a:ea typeface="Arial"/>
+                <a:cs typeface="Arial"/>
+              </a:rPr>
+              <a:t>。退出报警采用温度 </a:t>
+            </a:r>
+            <a:r>
+              <a:rPr lang="en-US" altLang="zh-CN" sz="1400" b="0">
+                <a:solidFill>
+                  <a:srgbClr val="68746E"/>
+                </a:solidFill>
+                <a:latin typeface="Arial"/>
+                <a:ea typeface="Arial"/>
+                <a:cs typeface="Arial"/>
+              </a:rPr>
+              <a:t>1 ℃</a:t>
+            </a:r>
+            <a:r>
+              <a:rPr lang="zh-CN" altLang="en-US" sz="1400" b="0">
+                <a:solidFill>
+                  <a:srgbClr val="68746E"/>
+                </a:solidFill>
+                <a:latin typeface="Arial"/>
+                <a:ea typeface="Arial"/>
+                <a:cs typeface="Arial"/>
+              </a:rPr>
+              <a:t>、湿度 </a:t>
+            </a:r>
+            <a:r>
+              <a:rPr lang="en-US" altLang="zh-CN" sz="1400" b="0">
+                <a:solidFill>
+                  <a:srgbClr val="68746E"/>
+                </a:solidFill>
+                <a:latin typeface="Arial"/>
+                <a:ea typeface="Arial"/>
+                <a:cs typeface="Arial"/>
+              </a:rPr>
+              <a:t>5 %RH </a:t>
+            </a:r>
+            <a:r>
+              <a:rPr lang="zh-CN" altLang="en-US" sz="1400" b="0">
+                <a:solidFill>
+                  <a:srgbClr val="68746E"/>
+                </a:solidFill>
+                <a:latin typeface="Arial"/>
+                <a:ea typeface="Arial"/>
+                <a:cs typeface="Arial"/>
+              </a:rPr>
+              <a:t>回差；</a:t>
+            </a:r>
+          </a:p>
+          <a:p>
+            <a:pPr algn="l">
+              <a:defRPr sz="1500" b="0">
+                <a:solidFill>
+                  <a:srgbClr val="68746E"/>
+                </a:solidFill>
+                <a:latin typeface="Arial"/>
+                <a:ea typeface="Arial"/>
+                <a:cs typeface="Arial"/>
+              </a:defRPr>
+            </a:pPr>
+            <a:r>
+              <a:rPr lang="zh-CN" altLang="en-US" sz="1400" b="0">
+                <a:solidFill>
+                  <a:srgbClr val="68746E"/>
+                </a:solidFill>
+                <a:latin typeface="Arial"/>
+                <a:ea typeface="Arial"/>
+                <a:cs typeface="Arial"/>
+              </a:rPr>
+              <a:t>复位后未校时使用默认 </a:t>
+            </a:r>
+            <a:r>
+              <a:rPr lang="en-US" altLang="zh-CN" sz="1400" b="0">
+                <a:solidFill>
+                  <a:srgbClr val="68746E"/>
+                </a:solidFill>
+                <a:latin typeface="Arial"/>
+                <a:ea typeface="Arial"/>
+                <a:cs typeface="Arial"/>
+              </a:rPr>
+              <a:t>28/30 ℃</a:t>
+            </a:r>
+            <a:r>
+              <a:rPr lang="zh-CN" altLang="en-US" sz="1400" b="0">
+                <a:solidFill>
+                  <a:srgbClr val="68746E"/>
+                </a:solidFill>
+                <a:latin typeface="Arial"/>
+                <a:ea typeface="Arial"/>
+                <a:cs typeface="Arial"/>
+              </a:rPr>
+              <a:t>。</a:t>
+            </a:r>
+            <a:endParaRPr sz="1400" b="0">
+              <a:solidFill>
+                <a:srgbClr val="68746E"/>
+              </a:solidFill>
+              <a:latin typeface="Arial"/>
+              <a:ea typeface="Arial"/>
+              <a:cs typeface="Arial"/>
+            </a:endParaRPr>
           </a:p>
         </p:txBody>
       </p:sp>

--- a/docs/submission/室内大棚温湿度监测与风扇控制系统_答辩汇报_脱敏版.pptx
+++ b/docs/submission/室内大棚温湿度监测与风扇控制系统_答辩汇报_脱敏版.pptx
@@ -7795,7 +7795,7 @@
         </p:nvSpPr>
         <p:spPr>
           <a:xfrm>
-            <a:off x="781050" y="3476625"/>
+            <a:off x="781050" y="3477260"/>
             <a:ext cx="7048500" cy="838200"/>
           </a:xfrm>
           <a:prstGeom prst="rect">
@@ -7823,7 +7823,7 @@
               </a:defRPr>
             </a:pPr>
             <a:r>
-              <a:rPr sz="2025" b="0">
+              <a:rPr lang="zh-CN" altLang="en-US" sz="2025" b="0">
                 <a:solidFill>
                   <a:srgbClr val="DDEFE8"/>
                 </a:solidFill>
@@ -7831,7 +7831,7 @@
                 <a:ea typeface="Arial"/>
                 <a:cs typeface="Arial"/>
               </a:rPr>
-              <a:t>完成三种工况对比统计与七项功能验证，</a:t>
+              <a:t>完成三种工况对比统计与功能验证，</a:t>
             </a:r>
           </a:p>
           <a:p>
@@ -7846,7 +7846,7 @@
               </a:defRPr>
             </a:pPr>
             <a:r>
-              <a:rPr sz="2025" b="0">
+              <a:rPr lang="zh-CN" altLang="en-US" sz="2025" b="0">
                 <a:solidFill>
                   <a:srgbClr val="DDEFE8"/>
                 </a:solidFill>
@@ -7854,8 +7854,60 @@
                 <a:ea typeface="Arial"/>
                 <a:cs typeface="Arial"/>
               </a:rPr>
-              <a:t>形成答辩汇报材料。</a:t>
-            </a:r>
+              <a:t>其中 </a:t>
+            </a:r>
+            <a:r>
+              <a:rPr lang="en-US" altLang="zh-CN" sz="2025" b="0">
+                <a:solidFill>
+                  <a:srgbClr val="DDEFE8"/>
+                </a:solidFill>
+                <a:latin typeface="Arial"/>
+                <a:ea typeface="Arial"/>
+                <a:cs typeface="Arial"/>
+              </a:rPr>
+              <a:t>4 </a:t>
+            </a:r>
+            <a:r>
+              <a:rPr lang="zh-CN" altLang="en-US" sz="2025" b="0">
+                <a:solidFill>
+                  <a:srgbClr val="DDEFE8"/>
+                </a:solidFill>
+                <a:latin typeface="Arial"/>
+                <a:ea typeface="Arial"/>
+                <a:cs typeface="Arial"/>
+              </a:rPr>
+              <a:t>项实机通过、</a:t>
+            </a:r>
+            <a:r>
+              <a:rPr lang="en-US" altLang="zh-CN" sz="2025" b="0">
+                <a:solidFill>
+                  <a:srgbClr val="DDEFE8"/>
+                </a:solidFill>
+                <a:latin typeface="Arial"/>
+                <a:ea typeface="Arial"/>
+                <a:cs typeface="Arial"/>
+              </a:rPr>
+              <a:t>3 </a:t>
+            </a:r>
+            <a:r>
+              <a:rPr lang="zh-CN" altLang="en-US" sz="2025" b="0">
+                <a:solidFill>
+                  <a:srgbClr val="DDEFE8"/>
+                </a:solidFill>
+                <a:latin typeface="Arial"/>
+                <a:ea typeface="Arial"/>
+                <a:cs typeface="Arial"/>
+              </a:rPr>
+              <a:t>项为逻辑测试。</a:t>
+            </a:r>
+            <a:endParaRPr sz="2025" b="0">
+              <a:solidFill>
+                <a:srgbClr val="DDEFE8"/>
+              </a:solidFill>
+              <a:latin typeface="Arial"/>
+              <a:ea typeface="Arial"/>
+              <a:cs typeface="Arial"/>
+            </a:endParaRPr>
           </a:p>
         </p:txBody>
       </p:sp>
@@ -8609,8 +8661,17 @@
                   <a:srgbClr val="323B1F"/>
                 </a:solidFill>
               </a:rPr>
-              <a:t>视频展示
-硬件功能介绍与四项实际验证</a:t>
+              <a:t>视频展示</a:t>
+            </a:r>
+          </a:p>
+          <a:p>
+            <a:r>
+              <a:rPr lang="zh-CN" altLang="en-US" sz="1400">
+                <a:solidFill>
+                  <a:srgbClr val="323B1F"/>
+                </a:solidFill>
+              </a:rPr>
+              <a:t>硬件功能介绍与五项实际验证</a:t>
             </a:r>
           </a:p>
         </p:txBody>
@@ -11213,8 +11274,8 @@
         </p:nvSpPr>
         <p:spPr>
           <a:xfrm>
-            <a:off x="762000" y="5740400"/>
-            <a:ext cx="10820400" cy="711200"/>
+            <a:off x="762000" y="5664200"/>
+            <a:ext cx="10820400" cy="990600"/>
           </a:xfrm>
           <a:prstGeom prst="rect">
             <a:avLst/>
@@ -11241,7 +11302,7 @@
               </a:defRPr>
             </a:pPr>
             <a:r>
-              <a:rPr lang="zh-CN" altLang="en-US" sz="1400" b="0">
+              <a:rPr lang="zh-CN" altLang="en-US" sz="1250" b="0">
                 <a:solidFill>
                   <a:srgbClr val="68746E"/>
                 </a:solidFill>
@@ -11249,10 +11310,10 @@
                 <a:ea typeface="Arial"/>
                 <a:cs typeface="Arial"/>
               </a:rPr>
-              <a:t>报警阈值分时：上午 </a:t>
-            </a:r>
-            <a:r>
-              <a:rPr lang="en-US" altLang="zh-CN" sz="1400" b="0">
+              <a:t>温度阈值分时（上午 </a:t>
+            </a:r>
+            <a:r>
+              <a:rPr lang="en-US" altLang="zh-CN" sz="1250" b="0">
                 <a:solidFill>
                   <a:srgbClr val="68746E"/>
                 </a:solidFill>
@@ -11263,7 +11324,7 @@
               <a:t>25/30</a:t>
             </a:r>
             <a:r>
-              <a:rPr lang="zh-CN" altLang="en-US" sz="1400" b="0">
+              <a:rPr lang="zh-CN" altLang="en-US" sz="1250" b="0">
                 <a:solidFill>
                   <a:srgbClr val="68746E"/>
                 </a:solidFill>
@@ -11274,7 +11335,7 @@
               <a:t>、下午 </a:t>
             </a:r>
             <a:r>
-              <a:rPr lang="en-US" altLang="zh-CN" sz="1400" b="0">
+              <a:rPr lang="en-US" altLang="zh-CN" sz="1250" b="0">
                 <a:solidFill>
                   <a:srgbClr val="68746E"/>
                 </a:solidFill>
@@ -11285,7 +11346,7 @@
               <a:t>23/28</a:t>
             </a:r>
             <a:r>
-              <a:rPr lang="zh-CN" altLang="en-US" sz="1400" b="0">
+              <a:rPr lang="zh-CN" altLang="en-US" sz="1250" b="0">
                 <a:solidFill>
                   <a:srgbClr val="68746E"/>
                 </a:solidFill>
@@ -11296,7 +11357,7 @@
               <a:t>、夜间 </a:t>
             </a:r>
             <a:r>
-              <a:rPr lang="en-US" altLang="zh-CN" sz="1400" b="0">
+              <a:rPr lang="en-US" altLang="zh-CN" sz="1250" b="0">
                 <a:solidFill>
                   <a:srgbClr val="68746E"/>
                 </a:solidFill>
@@ -11307,7 +11368,7 @@
               <a:t>12/15 ℃</a:t>
             </a:r>
             <a:r>
-              <a:rPr lang="zh-CN" altLang="en-US" sz="1400" b="0">
+              <a:rPr lang="zh-CN" altLang="en-US" sz="1250" b="0">
                 <a:solidFill>
                   <a:srgbClr val="68746E"/>
                 </a:solidFill>
@@ -11315,10 +11376,10 @@
                 <a:ea typeface="Arial"/>
                 <a:cs typeface="Arial"/>
               </a:rPr>
-              <a:t>；湿度全天 </a:t>
-            </a:r>
-            <a:r>
-              <a:rPr lang="en-US" altLang="zh-CN" sz="1400" b="0">
+              <a:t>，依据为变温管理）；湿度全天 </a:t>
+            </a:r>
+            <a:r>
+              <a:rPr lang="en-US" altLang="zh-CN" sz="1250" b="0">
                 <a:solidFill>
                   <a:srgbClr val="68746E"/>
                 </a:solidFill>
@@ -11326,10 +11387,10 @@
                 <a:ea typeface="Arial"/>
                 <a:cs typeface="Arial"/>
               </a:rPr>
-              <a:t>70/80 %RH</a:t>
-            </a:r>
-            <a:r>
-              <a:rPr lang="zh-CN" altLang="en-US" sz="1400" b="0">
+              <a:t>70/80 %RH </a:t>
+            </a:r>
+            <a:r>
+              <a:rPr lang="zh-CN" altLang="en-US" sz="1250" b="0">
                 <a:solidFill>
                   <a:srgbClr val="68746E"/>
                 </a:solidFill>
@@ -11337,10 +11398,10 @@
                 <a:ea typeface="Arial"/>
                 <a:cs typeface="Arial"/>
               </a:rPr>
-              <a:t>。退出报警采用温度 </a:t>
-            </a:r>
-            <a:r>
-              <a:rPr lang="en-US" altLang="zh-CN" sz="1400" b="0">
+              <a:t>不分时：灰霉病孢子萌发需叶面自由水，结露多在夜间降温阶段，夜间更不应放宽</a:t>
+            </a:r>
+            <a:r>
+              <a:rPr lang="en-US" altLang="zh-CN" sz="1250" b="0">
                 <a:solidFill>
                   <a:srgbClr val="68746E"/>
                 </a:solidFill>
@@ -11348,10 +11409,10 @@
                 <a:ea typeface="Arial"/>
                 <a:cs typeface="Arial"/>
               </a:rPr>
-              <a:t>1 ℃</a:t>
-            </a:r>
-            <a:r>
-              <a:rPr lang="zh-CN" altLang="en-US" sz="1400" b="0">
+              <a:t>[12][13]</a:t>
+            </a:r>
+            <a:r>
+              <a:rPr lang="zh-CN" altLang="en-US" sz="1250" b="0">
                 <a:solidFill>
                   <a:srgbClr val="68746E"/>
                 </a:solidFill>
@@ -11359,29 +11420,7 @@
                 <a:ea typeface="Arial"/>
                 <a:cs typeface="Arial"/>
               </a:rPr>
-              <a:t>、湿度 </a:t>
-            </a:r>
-            <a:r>
-              <a:rPr lang="en-US" altLang="zh-CN" sz="1400" b="0">
-                <a:solidFill>
-                  <a:srgbClr val="68746E"/>
-                </a:solidFill>
-                <a:latin typeface="Arial"/>
-                <a:ea typeface="Arial"/>
-                <a:cs typeface="Arial"/>
-              </a:rPr>
-              <a:t>5 %RH </a:t>
-            </a:r>
-            <a:r>
-              <a:rPr lang="zh-CN" altLang="en-US" sz="1400" b="0">
-                <a:solidFill>
-                  <a:srgbClr val="68746E"/>
-                </a:solidFill>
-                <a:latin typeface="Arial"/>
-                <a:ea typeface="Arial"/>
-                <a:cs typeface="Arial"/>
-              </a:rPr>
-              <a:t>回差；</a:t>
+              <a:t>。</a:t>
             </a:r>
           </a:p>
           <a:p>
@@ -11396,7 +11435,7 @@
               </a:defRPr>
             </a:pPr>
             <a:r>
-              <a:rPr lang="zh-CN" altLang="en-US" sz="1400" b="0">
+              <a:rPr lang="zh-CN" altLang="en-US" sz="1250" b="0">
                 <a:solidFill>
                   <a:srgbClr val="68746E"/>
                 </a:solidFill>
@@ -11404,10 +11443,10 @@
                 <a:ea typeface="Arial"/>
                 <a:cs typeface="Arial"/>
               </a:rPr>
-              <a:t>复位后未校时使用默认 </a:t>
-            </a:r>
-            <a:r>
-              <a:rPr lang="en-US" altLang="zh-CN" sz="1400" b="0">
+              <a:t>退出报警采用温度 </a:t>
+            </a:r>
+            <a:r>
+              <a:rPr lang="en-US" altLang="zh-CN" sz="1250" b="0">
                 <a:solidFill>
                   <a:srgbClr val="68746E"/>
                 </a:solidFill>
@@ -11415,10 +11454,54 @@
                 <a:ea typeface="Arial"/>
                 <a:cs typeface="Arial"/>
               </a:rPr>
+              <a:t>1 ℃</a:t>
+            </a:r>
+            <a:r>
+              <a:rPr lang="zh-CN" altLang="en-US" sz="1250" b="0">
+                <a:solidFill>
+                  <a:srgbClr val="68746E"/>
+                </a:solidFill>
+                <a:latin typeface="Arial"/>
+                <a:ea typeface="Arial"/>
+                <a:cs typeface="Arial"/>
+              </a:rPr>
+              <a:t>、湿度 </a:t>
+            </a:r>
+            <a:r>
+              <a:rPr lang="en-US" altLang="zh-CN" sz="1250" b="0">
+                <a:solidFill>
+                  <a:srgbClr val="68746E"/>
+                </a:solidFill>
+                <a:latin typeface="Arial"/>
+                <a:ea typeface="Arial"/>
+                <a:cs typeface="Arial"/>
+              </a:rPr>
+              <a:t>5 %RH </a:t>
+            </a:r>
+            <a:r>
+              <a:rPr lang="zh-CN" altLang="en-US" sz="1250" b="0">
+                <a:solidFill>
+                  <a:srgbClr val="68746E"/>
+                </a:solidFill>
+                <a:latin typeface="Arial"/>
+                <a:ea typeface="Arial"/>
+                <a:cs typeface="Arial"/>
+              </a:rPr>
+              <a:t>回差；复位后未校时使用默认 </a:t>
+            </a:r>
+            <a:r>
+              <a:rPr lang="en-US" altLang="zh-CN" sz="1250" b="0">
+                <a:solidFill>
+                  <a:srgbClr val="68746E"/>
+                </a:solidFill>
+                <a:latin typeface="Arial"/>
+                <a:ea typeface="Arial"/>
+                <a:cs typeface="Arial"/>
+              </a:rPr>
               <a:t>28/30 ℃</a:t>
             </a:r>
             <a:r>
-              <a:rPr lang="zh-CN" altLang="en-US" sz="1400" b="0">
+              <a:rPr lang="zh-CN" altLang="en-US" sz="1250" b="0">
                 <a:solidFill>
                   <a:srgbClr val="68746E"/>
                 </a:solidFill>
@@ -11428,7 +11511,7 @@
               </a:rPr>
               <a:t>。</a:t>
             </a:r>
-            <a:endParaRPr sz="1400" b="0">
+            <a:endParaRPr sz="1250" b="0">
               <a:solidFill>
                 <a:srgbClr val="68746E"/>
               </a:solidFill>
@@ -12057,7 +12140,7 @@
               </a:defRPr>
             </a:pPr>
             <a:r>
-              <a:rPr sz="1350" b="0">
+              <a:rPr lang="zh-CN" altLang="en-US" sz="1350" b="0">
                 <a:solidFill>
                   <a:srgbClr val="68746E"/>
                 </a:solidFill>
@@ -12065,7 +12148,18 @@
                 <a:ea typeface="Arial"/>
                 <a:cs typeface="Arial"/>
               </a:rPr>
-              <a:t>温度≥28 ℃ 或湿度≥70 %RH</a:t>
+              <a:t>温度≥当前时段预警值 或 湿度≥</a:t>
+            </a:r>
+            <a:r>
+              <a:rPr lang="en-US" altLang="zh-CN" sz="1350" b="0">
+                <a:solidFill>
+                  <a:srgbClr val="68746E"/>
+                </a:solidFill>
+                <a:latin typeface="Arial"/>
+                <a:ea typeface="Arial"/>
+                <a:cs typeface="Arial"/>
+              </a:rPr>
+              <a:t>70 %RH</a:t>
             </a:r>
           </a:p>
           <a:p>
@@ -12080,7 +12174,7 @@
               </a:defRPr>
             </a:pPr>
             <a:r>
-              <a:rPr sz="1350" b="0">
+              <a:rPr lang="en-US" altLang="zh-CN" sz="1350" b="0">
                 <a:solidFill>
                   <a:srgbClr val="68746E"/>
                 </a:solidFill>
@@ -12088,7 +12182,18 @@
                 <a:ea typeface="Arial"/>
                 <a:cs typeface="Arial"/>
               </a:rPr>
-              <a:t>LED 闪烁、蜂鸣器间歇响</a:t>
+              <a:t>LED </a:t>
+            </a:r>
+            <a:r>
+              <a:rPr lang="zh-CN" altLang="en-US" sz="1350" b="0">
+                <a:solidFill>
+                  <a:srgbClr val="68746E"/>
+                </a:solidFill>
+                <a:latin typeface="Arial"/>
+                <a:ea typeface="Arial"/>
+                <a:cs typeface="Arial"/>
+              </a:rPr>
+              <a:t>闪烁、蜂鸣器间歇响</a:t>
             </a:r>
           </a:p>
           <a:p>
@@ -12103,7 +12208,7 @@
               </a:defRPr>
             </a:pPr>
             <a:r>
-              <a:rPr sz="1350" b="0">
+              <a:rPr lang="en-US" altLang="zh-CN" sz="1350" b="0">
                 <a:solidFill>
                   <a:srgbClr val="68746E"/>
                 </a:solidFill>
@@ -12111,8 +12216,27 @@
                 <a:ea typeface="Arial"/>
                 <a:cs typeface="Arial"/>
               </a:rPr>
-              <a:t>AUTO 模式下风扇运行</a:t>
-            </a:r>
+              <a:t>AUTO </a:t>
+            </a:r>
+            <a:r>
+              <a:rPr lang="zh-CN" altLang="en-US" sz="1350" b="0">
+                <a:solidFill>
+                  <a:srgbClr val="68746E"/>
+                </a:solidFill>
+                <a:latin typeface="Arial"/>
+                <a:ea typeface="Arial"/>
+                <a:cs typeface="Arial"/>
+              </a:rPr>
+              <a:t>模式下风扇运行</a:t>
+            </a:r>
+            <a:endParaRPr sz="1350" b="0">
+              <a:solidFill>
+                <a:srgbClr val="68746E"/>
+              </a:solidFill>
+              <a:latin typeface="Arial"/>
+              <a:ea typeface="Arial"/>
+              <a:cs typeface="Arial"/>
+            </a:endParaRPr>
           </a:p>
         </p:txBody>
       </p:sp>
@@ -12297,7 +12421,7 @@
               </a:defRPr>
             </a:pPr>
             <a:r>
-              <a:rPr sz="1350" b="0">
+              <a:rPr lang="zh-CN" altLang="en-US" sz="1350" b="0">
                 <a:solidFill>
                   <a:srgbClr val="68746E"/>
                 </a:solidFill>
@@ -12305,7 +12429,18 @@
                 <a:ea typeface="Arial"/>
                 <a:cs typeface="Arial"/>
               </a:rPr>
-              <a:t>温度≥30 ℃ 或湿度≥80 %RH</a:t>
+              <a:t>温度≥当前时段严重值 或 湿度≥</a:t>
+            </a:r>
+            <a:r>
+              <a:rPr lang="en-US" altLang="zh-CN" sz="1350" b="0">
+                <a:solidFill>
+                  <a:srgbClr val="68746E"/>
+                </a:solidFill>
+                <a:latin typeface="Arial"/>
+                <a:ea typeface="Arial"/>
+                <a:cs typeface="Arial"/>
+              </a:rPr>
+              <a:t>80 %RH</a:t>
             </a:r>
           </a:p>
           <a:p>
@@ -12320,7 +12455,7 @@
               </a:defRPr>
             </a:pPr>
             <a:r>
-              <a:rPr sz="1350" b="0">
+              <a:rPr lang="en-US" altLang="zh-CN" sz="1350" b="0">
                 <a:solidFill>
                   <a:srgbClr val="68746E"/>
                 </a:solidFill>
@@ -12328,7 +12463,18 @@
                 <a:ea typeface="Arial"/>
                 <a:cs typeface="Arial"/>
               </a:rPr>
-              <a:t>LED 常亮、蜂鸣器持续响</a:t>
+              <a:t>LED </a:t>
+            </a:r>
+            <a:r>
+              <a:rPr lang="zh-CN" altLang="en-US" sz="1350" b="0">
+                <a:solidFill>
+                  <a:srgbClr val="68746E"/>
+                </a:solidFill>
+                <a:latin typeface="Arial"/>
+                <a:ea typeface="Arial"/>
+                <a:cs typeface="Arial"/>
+              </a:rPr>
+              <a:t>常亮、蜂鸣器持续响</a:t>
             </a:r>
           </a:p>
           <a:p>
@@ -12343,7 +12489,7 @@
               </a:defRPr>
             </a:pPr>
             <a:r>
-              <a:rPr sz="1350" b="0">
+              <a:rPr lang="zh-CN" altLang="en-US" sz="1350" b="0">
                 <a:solidFill>
                   <a:srgbClr val="68746E"/>
                 </a:solidFill>
@@ -12353,6 +12499,14 @@
               </a:rPr>
               <a:t>安全逻辑强制风扇运行</a:t>
             </a:r>
+            <a:endParaRPr sz="1350" b="0">
+              <a:solidFill>
+                <a:srgbClr val="68746E"/>
+              </a:solidFill>
+              <a:latin typeface="Arial"/>
+              <a:ea typeface="Arial"/>
+              <a:cs typeface="Arial"/>
+            </a:endParaRPr>
           </a:p>
         </p:txBody>
       </p:sp>
@@ -13306,7 +13460,13 @@
         <p:nvGraphicFramePr>
           <p:cNvPr id="14" name="表格 13"/>
           <p:cNvGraphicFramePr/>
-          <p:nvPr/>
+          <p:nvPr>
+            <p:extLst>
+              <p:ext uri="{D42A27DB-BD31-4B8C-83A1-F6EECF244321}">
+                <p14:modId xmlns:p14="http://schemas.microsoft.com/office/powerpoint/2010/main" val="2472991045"/>
+              </p:ext>
+            </p:extLst>
+          </p:nvPr>
         </p:nvGraphicFramePr>
         <p:xfrm>
           <a:off x="685800" y="2095500"/>
@@ -13346,7 +13506,7 @@
                   </a:extLst>
                 </a:gridCol>
               </a:tblGrid>
-              <a:tr h="619125">
+              <a:tr h="711200">
                 <a:tc>
                   <a:txBody>
                     <a:bodyPr/>
@@ -13449,7 +13609,7 @@
                   </a:ext>
                 </a:extLst>
               </a:tr>
-              <a:tr h="619125">
+              <a:tr h="711200">
                 <a:tc>
                   <a:txBody>
                     <a:bodyPr/>
@@ -13536,7 +13696,7 @@
                   </a:ext>
                 </a:extLst>
               </a:tr>
-              <a:tr h="619125">
+              <a:tr h="711200">
                 <a:tc>
                   <a:txBody>
                     <a:bodyPr/>
@@ -13623,7 +13783,7 @@
                   </a:ext>
                 </a:extLst>
               </a:tr>
-              <a:tr h="619125">
+              <a:tr h="711200">
                 <a:tc>
                   <a:txBody>
                     <a:bodyPr/>
@@ -13670,7 +13830,7 @@
                     <a:lstStyle/>
                     <a:p>
                       <a:r>
-                        <a:rPr sz="1200">
+                        <a:rPr lang="zh-CN" altLang="en-US" sz="1200">
                           <a:solidFill>
                             <a:srgbClr val="16261F"/>
                           </a:solidFill>
@@ -13678,8 +13838,38 @@
                           <a:ea typeface="Arial"/>
                           <a:cs typeface="Arial"/>
                         </a:rPr>
-                        <a:t>正常、报警、回差、安全、静音与失效逻辑</a:t>
+                        <a:t>正常、预警、严重、静音 </a:t>
                       </a:r>
+                      <a:r>
+                        <a:rPr lang="en-US" altLang="zh-CN" sz="1200">
+                          <a:solidFill>
+                            <a:srgbClr val="16261F"/>
+                          </a:solidFill>
+                          <a:latin typeface="Arial"/>
+                          <a:ea typeface="Arial"/>
+                          <a:cs typeface="Arial"/>
+                        </a:rPr>
+                        <a:t>4 </a:t>
+                      </a:r>
+                      <a:r>
+                        <a:rPr lang="zh-CN" altLang="en-US" sz="1200">
+                          <a:solidFill>
+                            <a:srgbClr val="16261F"/>
+                          </a:solidFill>
+                          <a:latin typeface="Arial"/>
+                          <a:ea typeface="Arial"/>
+                          <a:cs typeface="Arial"/>
+                        </a:rPr>
+                        <a:t>项实机验证；回差、安全覆盖、失效为逻辑测试</a:t>
+                      </a:r>
+                      <a:endParaRPr sz="1200">
+                        <a:solidFill>
+                          <a:srgbClr val="16261F"/>
+                        </a:solidFill>
+                        <a:latin typeface="Arial"/>
+                        <a:ea typeface="Arial"/>
+                        <a:cs typeface="Arial"/>
+                      </a:endParaRPr>
                     </a:p>
                   </a:txBody>
                   <a:tcPr/>
@@ -13690,7 +13880,7 @@
                     <a:lstStyle/>
                     <a:p>
                       <a:r>
-                        <a:rPr sz="1200">
+                        <a:rPr lang="en-US" altLang="zh-CN" sz="1200">
                           <a:solidFill>
                             <a:srgbClr val="16261F"/>
                           </a:solidFill>
@@ -13698,8 +13888,27 @@
                           <a:ea typeface="Arial"/>
                           <a:cs typeface="Arial"/>
                         </a:rPr>
-                        <a:t>全部通过</a:t>
+                        <a:t>4 </a:t>
                       </a:r>
+                      <a:r>
+                        <a:rPr lang="zh-CN" altLang="en-US" sz="1200">
+                          <a:solidFill>
+                            <a:srgbClr val="16261F"/>
+                          </a:solidFill>
+                          <a:latin typeface="Arial"/>
+                          <a:ea typeface="Arial"/>
+                          <a:cs typeface="Arial"/>
+                        </a:rPr>
+                        <a:t>项实测通过</a:t>
+                      </a:r>
+                      <a:endParaRPr sz="1200">
+                        <a:solidFill>
+                          <a:srgbClr val="16261F"/>
+                        </a:solidFill>
+                        <a:latin typeface="Arial"/>
+                        <a:ea typeface="Arial"/>
+                        <a:cs typeface="Arial"/>
+                      </a:endParaRPr>
                     </a:p>
                   </a:txBody>
                   <a:tcPr/>

--- a/docs/submission/室内大棚温湿度监测与风扇控制系统_答辩汇报_脱敏版.pptx
+++ b/docs/submission/室内大棚温湿度监测与风扇控制系统_答辩汇报_脱敏版.pptx
@@ -11,6 +11,7 @@
     <p:sldId id="256" r:id="rId2"/>
     <p:sldId id="271" r:id="rId3"/>
     <p:sldId id="257" r:id="rId4"/>
+    <p:sldId id="272" r:id="rId23"/>
     <p:sldId id="258" r:id="rId5"/>
     <p:sldId id="259" r:id="rId6"/>
     <p:sldId id="260" r:id="rId7"/>
@@ -500,7 +501,7 @@
           <a:lstStyle/>
           <a:p>
             <a:r>
-              <a:t>项目来源：温湿度监测系统实验记录表_功能测试完成版.xlsx，功能安全测试页。7项功能测试均已现场通过。</a:t>
+              <a:t>项目来源：温湿度监测系统实验记录表、现场测试记录。表内 5 项均已完成现场实测并通过：正常范围、预警、严重报警、报警静音、校时与分时。</a:t>
             </a:r>
           </a:p>
         </p:txBody>
@@ -808,7 +809,7 @@
           <a:lstStyle/>
           <a:p>
             <a:r>
-              <a:t>项目结论基于当前主程序、新板 DHT22 链路验证、三种工况对比统计和七项功能验证。</a:t>
+              <a:t>项目结论基于当前主程序、新板 DHT22 链路验证、三种工况对比统计和五项功能验证。</a:t>
             </a:r>
           </a:p>
         </p:txBody>
@@ -2249,7 +2250,7 @@
                 <a:ea typeface="Arial"/>
                 <a:cs typeface="Arial"/>
               </a:rPr>
-              <a:t>汇报人：    学号：    班级：</a:t>
+              <a:t>汇报人：    组员：    学号：    班级：</a:t>
             </a:r>
           </a:p>
           <a:p>
@@ -2271,6 +2272,40 @@
               <a:ea typeface="Arial"/>
               <a:cs typeface="Arial"/>
             </a:endParaRPr>
+            <a:r>
+              <a:rPr sz="1575" b="0">
+                <a:solidFill>
+                  <a:srgbClr val="68746E"/>
+                </a:solidFill>
+                <a:latin typeface="Arial"/>
+                <a:ea typeface="Arial"/>
+                <a:cs typeface="Arial"/>
+              </a:rPr>
+              <a:t/>
+            </a:r>
+          </a:p>
+          <a:p>
+            <a:pPr algn="l">
+              <a:defRPr sz="1575" b="0">
+                <a:solidFill>
+                  <a:srgbClr val="68746E"/>
+                </a:solidFill>
+                <a:latin typeface="Arial"/>
+                <a:ea typeface="Arial"/>
+                <a:cs typeface="Arial"/>
+              </a:defRPr>
+            </a:pPr>
+            <a:r>
+              <a:rPr sz="1575" b="0">
+                <a:solidFill>
+                  <a:srgbClr val="68746E"/>
+                </a:solidFill>
+                <a:latin typeface="Arial"/>
+                <a:ea typeface="Arial"/>
+                <a:cs typeface="Arial"/>
+              </a:rPr>
+              <a:t>指导教师：余克强、赵娟、姚志凤</a:t>
+            </a:r>
           </a:p>
         </p:txBody>
       </p:sp>
@@ -2288,6 +2323,922 @@
 </file>
 
 <file path=ppt/slides/slide10.xml><?xml version="1.0" encoding="utf-8"?>
+<p:sld xmlns:a="http://schemas.openxmlformats.org/drawingml/2006/main" xmlns:r="http://schemas.openxmlformats.org/officeDocument/2006/relationships" xmlns:p="http://schemas.openxmlformats.org/presentationml/2006/main">
+  <p:cSld>
+    <p:bg>
+      <p:bgPr>
+        <a:solidFill>
+          <a:srgbClr val="FFFFFF"/>
+        </a:solidFill>
+        <a:effectLst/>
+      </p:bgPr>
+    </p:bg>
+    <p:spTree>
+      <p:nvGrpSpPr>
+        <p:cNvPr id="1" name=""/>
+        <p:cNvGrpSpPr/>
+        <p:nvPr/>
+      </p:nvGrpSpPr>
+      <p:grpSpPr>
+        <a:xfrm>
+          <a:off x="0" y="0"/>
+          <a:ext cx="0" cy="0"/>
+          <a:chOff x="0" y="0"/>
+          <a:chExt cx="0" cy="0"/>
+        </a:xfrm>
+      </p:grpSpPr>
+      <p:sp>
+        <p:nvSpPr>
+          <p:cNvPr id="10" name="矩形 9">
+            <a:extLst>
+              <a:ext uri="{FF2B5EF4-FFF2-40B4-BE49-F238E27FC236}">
+                <a16:creationId xmlns:a16="http://schemas.microsoft.com/office/drawing/2014/main" id="{B2C06F17-B563-4DED-BB97-AB8AB49AFF0D}"/>
+              </a:ext>
+            </a:extLst>
+          </p:cNvPr>
+          <p:cNvSpPr>
+            <a:spLocks noGrp="1"/>
+          </p:cNvSpPr>
+          <p:nvPr/>
+        </p:nvSpPr>
+        <p:spPr>
+          <a:xfrm>
+            <a:off x="685800" y="400050"/>
+            <a:ext cx="9048750" cy="514350"/>
+          </a:xfrm>
+          <a:prstGeom prst="rect">
+            <a:avLst/>
+          </a:prstGeom>
+          <a:noFill/>
+          <a:ln w="0">
+            <a:noFill/>
+          </a:ln>
+        </p:spPr>
+        <p:txBody>
+          <a:bodyPr anchor="ctr">
+            <a:normAutofit/>
+          </a:bodyPr>
+          <a:lstStyle/>
+          <a:p>
+            <a:pPr algn="l">
+              <a:defRPr sz="2550" b="1">
+                <a:solidFill>
+                  <a:srgbClr val="113B36"/>
+                </a:solidFill>
+                <a:latin typeface="Arial"/>
+                <a:ea typeface="Arial"/>
+                <a:cs typeface="Arial"/>
+              </a:defRPr>
+            </a:pPr>
+            <a:r>
+              <a:rPr sz="2550" b="1">
+                <a:solidFill>
+                  <a:srgbClr val="113B36"/>
+                </a:solidFill>
+                <a:latin typeface="Arial"/>
+                <a:ea typeface="Arial"/>
+                <a:cs typeface="Arial"/>
+              </a:rPr>
+              <a:t>教室布点与数据记录</a:t>
+            </a:r>
+          </a:p>
+        </p:txBody>
+      </p:sp>
+      <p:sp>
+        <p:nvSpPr>
+          <p:cNvPr id="2" name="直接连接符 1">
+            <a:extLst>
+              <a:ext uri="{FF2B5EF4-FFF2-40B4-BE49-F238E27FC236}">
+                <a16:creationId xmlns:a16="http://schemas.microsoft.com/office/drawing/2014/main" id="{759348C0-0134-4D76-AB28-2CC2F11ECFD6}"/>
+              </a:ext>
+            </a:extLst>
+          </p:cNvPr>
+          <p:cNvSpPr>
+            <a:spLocks noGrp="1"/>
+          </p:cNvSpPr>
+          <p:nvPr/>
+        </p:nvSpPr>
+        <p:spPr>
+          <a:xfrm>
+            <a:off x="685800" y="1028700"/>
+            <a:ext cx="10820400" cy="0"/>
+          </a:xfrm>
+          <a:prstGeom prst="line">
+            <a:avLst/>
+          </a:prstGeom>
+          <a:noFill/>
+          <a:ln w="9525">
+            <a:solidFill>
+              <a:srgbClr val="C9D8D0"/>
+            </a:solidFill>
+          </a:ln>
+        </p:spPr>
+        <p:txBody>
+          <a:bodyPr/>
+          <a:lstStyle/>
+          <a:p>
+            <a:endParaRPr lang="zh-CN" altLang="en-US"/>
+          </a:p>
+        </p:txBody>
+      </p:sp>
+      <p:sp>
+        <p:nvSpPr>
+          <p:cNvPr id="3" name="矩形 2">
+            <a:extLst>
+              <a:ext uri="{FF2B5EF4-FFF2-40B4-BE49-F238E27FC236}">
+                <a16:creationId xmlns:a16="http://schemas.microsoft.com/office/drawing/2014/main" id="{060562C0-A275-4950-A8D0-3E46EA89AC94}"/>
+              </a:ext>
+            </a:extLst>
+          </p:cNvPr>
+          <p:cNvSpPr>
+            <a:spLocks noGrp="1"/>
+          </p:cNvSpPr>
+          <p:nvPr/>
+        </p:nvSpPr>
+        <p:spPr>
+          <a:xfrm>
+            <a:off x="10906125" y="409575"/>
+            <a:ext cx="571500" cy="342900"/>
+          </a:xfrm>
+          <a:prstGeom prst="rect">
+            <a:avLst/>
+          </a:prstGeom>
+          <a:noFill/>
+          <a:ln w="0">
+            <a:noFill/>
+          </a:ln>
+        </p:spPr>
+        <p:txBody>
+          <a:bodyPr anchor="ctr">
+            <a:normAutofit/>
+          </a:bodyPr>
+          <a:lstStyle/>
+          <a:p>
+            <a:pPr algn="r">
+              <a:defRPr sz="1200" b="1">
+                <a:solidFill>
+                  <a:srgbClr val="2F7A63"/>
+                </a:solidFill>
+                <a:latin typeface="Arial"/>
+                <a:ea typeface="Arial"/>
+                <a:cs typeface="Arial"/>
+              </a:defRPr>
+            </a:pPr>
+            <a:r>
+              <a:rPr lang="en-US" altLang="zh-CN" sz="1600" b="1">
+                <a:solidFill>
+                  <a:srgbClr val="2F7A63"/>
+                </a:solidFill>
+                <a:latin typeface="Arial"/>
+                <a:ea typeface="Arial"/>
+                <a:cs typeface="Arial"/>
+              </a:rPr>
+              <a:t>10</a:t>
+            </a:r>
+            <a:endParaRPr sz="1600" b="1">
+              <a:solidFill>
+                <a:srgbClr val="2F7A63"/>
+              </a:solidFill>
+              <a:latin typeface="Arial"/>
+              <a:ea typeface="Arial"/>
+              <a:cs typeface="Arial"/>
+            </a:endParaRPr>
+          </a:p>
+        </p:txBody>
+      </p:sp>
+      <p:sp>
+        <p:nvSpPr>
+          <p:cNvPr id="4" name="矩形 3">
+            <a:extLst>
+              <a:ext uri="{FF2B5EF4-FFF2-40B4-BE49-F238E27FC236}">
+                <a16:creationId xmlns:a16="http://schemas.microsoft.com/office/drawing/2014/main" id="{331E90BD-0A4D-418F-8CD1-69C1D4112FB8}"/>
+              </a:ext>
+            </a:extLst>
+          </p:cNvPr>
+          <p:cNvSpPr>
+            <a:spLocks noGrp="1"/>
+          </p:cNvSpPr>
+          <p:nvPr/>
+        </p:nvSpPr>
+        <p:spPr>
+          <a:xfrm>
+            <a:off x="685800" y="1333500"/>
+            <a:ext cx="9334500" cy="361950"/>
+          </a:xfrm>
+          <a:prstGeom prst="rect">
+            <a:avLst/>
+          </a:prstGeom>
+          <a:noFill/>
+          <a:ln w="0">
+            <a:noFill/>
+          </a:ln>
+        </p:spPr>
+        <p:txBody>
+          <a:bodyPr anchor="ctr">
+            <a:normAutofit fontScale="94667" lnSpcReduction="10000"/>
+          </a:bodyPr>
+          <a:lstStyle/>
+          <a:p>
+            <a:pPr algn="l">
+              <a:defRPr sz="1875" b="1">
+                <a:solidFill>
+                  <a:srgbClr val="2F7A63"/>
+                </a:solidFill>
+                <a:latin typeface="Arial"/>
+                <a:ea typeface="Arial"/>
+                <a:cs typeface="Arial"/>
+              </a:defRPr>
+            </a:pPr>
+            <a:r>
+              <a:rPr sz="1875" b="1">
+                <a:solidFill>
+                  <a:srgbClr val="2F7A63"/>
+                </a:solidFill>
+                <a:latin typeface="Arial"/>
+                <a:ea typeface="Arial"/>
+                <a:cs typeface="Arial"/>
+              </a:rPr>
+              <a:t>测试空间：长 9.6 m，宽 6.6 m，高 3.4 m</a:t>
+            </a:r>
+          </a:p>
+        </p:txBody>
+      </p:sp>
+      <p:graphicFrame>
+        <p:nvGraphicFramePr>
+          <p:cNvPr id="14" name="表格 13"/>
+          <p:cNvGraphicFramePr/>
+          <p:nvPr>
+            <p:extLst>
+              <p:ext uri="{D42A27DB-BD31-4B8C-83A1-F6EECF244321}">
+                <p14:modId xmlns:p14="http://schemas.microsoft.com/office/powerpoint/2010/main" val="2472991045"/>
+              </p:ext>
+            </p:extLst>
+          </p:nvPr>
+        </p:nvGraphicFramePr>
+        <p:xfrm>
+          <a:off x="685800" y="2095500"/>
+          <a:ext cx="10763252" cy="2476500"/>
+        </p:xfrm>
+        <a:graphic>
+          <a:graphicData uri="http://schemas.openxmlformats.org/drawingml/2006/table">
+            <a:tbl>
+              <a:tblPr firstRow="1" bandRow="1"/>
+              <a:tblGrid>
+                <a:gridCol w="2690813">
+                  <a:extLst>
+                    <a:ext uri="{9D8B030D-6E8A-4147-A177-3AD203B41FA5}">
+                      <a16:colId xmlns:a16="http://schemas.microsoft.com/office/drawing/2014/main" val="20000"/>
+                    </a:ext>
+                  </a:extLst>
+                </a:gridCol>
+                <a:gridCol w="2690813">
+                  <a:extLst>
+                    <a:ext uri="{9D8B030D-6E8A-4147-A177-3AD203B41FA5}">
+                      <a16:colId xmlns:a16="http://schemas.microsoft.com/office/drawing/2014/main" val="20001"/>
+                    </a:ext>
+                  </a:extLst>
+                </a:gridCol>
+                <a:gridCol w="2690813">
+                  <a:extLst>
+                    <a:ext uri="{9D8B030D-6E8A-4147-A177-3AD203B41FA5}">
+                      <a16:colId xmlns:a16="http://schemas.microsoft.com/office/drawing/2014/main" val="20002"/>
+                    </a:ext>
+                  </a:extLst>
+                </a:gridCol>
+                <a:gridCol w="2690813">
+                  <a:extLst>
+                    <a:ext uri="{9D8B030D-6E8A-4147-A177-3AD203B41FA5}">
+                      <a16:colId xmlns:a16="http://schemas.microsoft.com/office/drawing/2014/main" val="20003"/>
+                    </a:ext>
+                  </a:extLst>
+                </a:gridCol>
+              </a:tblGrid>
+              <a:tr h="711200">
+                <a:tc>
+                  <a:txBody>
+                    <a:bodyPr/>
+                    <a:lstStyle/>
+                    <a:p>
+                      <a:r>
+                        <a:rPr sz="1275" b="1">
+                          <a:solidFill>
+                            <a:srgbClr val="FFFFFF"/>
+                          </a:solidFill>
+                          <a:latin typeface="Arial"/>
+                          <a:ea typeface="Arial"/>
+                          <a:cs typeface="Arial"/>
+                        </a:rPr>
+                        <a:t>实验</a:t>
+                      </a:r>
+                    </a:p>
+                  </a:txBody>
+                  <a:tcPr>
+                    <a:solidFill>
+                      <a:srgbClr val="113B36"/>
+                    </a:solidFill>
+                  </a:tcPr>
+                </a:tc>
+                <a:tc>
+                  <a:txBody>
+                    <a:bodyPr/>
+                    <a:lstStyle/>
+                    <a:p>
+                      <a:r>
+                        <a:rPr sz="1275" b="1">
+                          <a:solidFill>
+                            <a:srgbClr val="FFFFFF"/>
+                          </a:solidFill>
+                          <a:latin typeface="Arial"/>
+                          <a:ea typeface="Arial"/>
+                          <a:cs typeface="Arial"/>
+                        </a:rPr>
+                        <a:t>样本量</a:t>
+                      </a:r>
+                    </a:p>
+                  </a:txBody>
+                  <a:tcPr>
+                    <a:solidFill>
+                      <a:srgbClr val="113B36"/>
+                    </a:solidFill>
+                  </a:tcPr>
+                </a:tc>
+                <a:tc>
+                  <a:txBody>
+                    <a:bodyPr/>
+                    <a:lstStyle/>
+                    <a:p>
+                      <a:r>
+                        <a:rPr sz="1275" b="1">
+                          <a:solidFill>
+                            <a:srgbClr val="FFFFFF"/>
+                          </a:solidFill>
+                          <a:latin typeface="Arial"/>
+                          <a:ea typeface="Arial"/>
+                          <a:cs typeface="Arial"/>
+                        </a:rPr>
+                        <a:t>记录内容</a:t>
+                      </a:r>
+                    </a:p>
+                  </a:txBody>
+                  <a:tcPr>
+                    <a:solidFill>
+                      <a:srgbClr val="113B36"/>
+                    </a:solidFill>
+                  </a:tcPr>
+                </a:tc>
+                <a:tc>
+                  <a:txBody>
+                    <a:bodyPr/>
+                    <a:lstStyle/>
+                    <a:p>
+                      <a:r>
+                        <a:rPr sz="1275" b="1">
+                          <a:solidFill>
+                            <a:srgbClr val="FFFFFF"/>
+                          </a:solidFill>
+                          <a:latin typeface="Arial"/>
+                          <a:ea typeface="Arial"/>
+                          <a:cs typeface="Arial"/>
+                        </a:rPr>
+                        <a:t>结果</a:t>
+                      </a:r>
+                    </a:p>
+                  </a:txBody>
+                  <a:tcPr>
+                    <a:solidFill>
+                      <a:srgbClr val="113B36"/>
+                    </a:solidFill>
+                  </a:tcPr>
+                </a:tc>
+                <a:extLst>
+                  <a:ext uri="{0D108BD9-81ED-4DB2-BD59-A6C34878D82A}">
+                    <a16:rowId xmlns:a16="http://schemas.microsoft.com/office/drawing/2014/main" val="10000"/>
+                  </a:ext>
+                </a:extLst>
+              </a:tr>
+              <a:tr h="711200">
+                <a:tc>
+                  <a:txBody>
+                    <a:bodyPr/>
+                    <a:lstStyle/>
+                    <a:p>
+                      <a:r>
+                        <a:rPr sz="1200">
+                          <a:solidFill>
+                            <a:srgbClr val="16261F"/>
+                          </a:solidFill>
+                          <a:latin typeface="Arial"/>
+                          <a:ea typeface="Arial"/>
+                          <a:cs typeface="Arial"/>
+                        </a:rPr>
+                        <a:t>准确性对比</a:t>
+                      </a:r>
+                    </a:p>
+                  </a:txBody>
+                  <a:tcPr/>
+                </a:tc>
+                <a:tc>
+                  <a:txBody>
+                    <a:bodyPr/>
+                    <a:lstStyle/>
+                    <a:p>
+                      <a:r>
+                        <a:rPr sz="1200">
+                          <a:solidFill>
+                            <a:srgbClr val="16261F"/>
+                          </a:solidFill>
+                          <a:latin typeface="Arial"/>
+                          <a:ea typeface="Arial"/>
+                          <a:cs typeface="Arial"/>
+                        </a:rPr>
+                        <a:t>30 组</a:t>
+                      </a:r>
+                    </a:p>
+                  </a:txBody>
+                  <a:tcPr/>
+                </a:tc>
+                <a:tc>
+                  <a:txBody>
+                    <a:bodyPr/>
+                    <a:lstStyle/>
+                    <a:p>
+                      <a:r>
+                        <a:rPr sz="1200">
+                          <a:solidFill>
+                            <a:srgbClr val="16261F"/>
+                          </a:solidFill>
+                          <a:latin typeface="Arial"/>
+                          <a:ea typeface="Arial"/>
+                          <a:cs typeface="Arial"/>
+                        </a:rPr>
+                        <a:t>DHT22 与 SHT40 同位置对比，三种工况各 10 组</a:t>
+                      </a:r>
+                    </a:p>
+                  </a:txBody>
+                  <a:tcPr/>
+                </a:tc>
+                <a:tc>
+                  <a:txBody>
+                    <a:bodyPr/>
+                    <a:lstStyle/>
+                    <a:p>
+                      <a:r>
+                        <a:rPr sz="1200">
+                          <a:solidFill>
+                            <a:srgbClr val="16261F"/>
+                          </a:solidFill>
+                          <a:latin typeface="Arial"/>
+                          <a:ea typeface="Arial"/>
+                          <a:cs typeface="Arial"/>
+                        </a:rPr>
+                        <a:t>完成统计</a:t>
+                      </a:r>
+                    </a:p>
+                  </a:txBody>
+                  <a:tcPr/>
+                </a:tc>
+                <a:extLst>
+                  <a:ext uri="{0D108BD9-81ED-4DB2-BD59-A6C34878D82A}">
+                    <a16:rowId xmlns:a16="http://schemas.microsoft.com/office/drawing/2014/main" val="10001"/>
+                  </a:ext>
+                </a:extLst>
+              </a:tr>
+              <a:tr h="711200">
+                <a:tc>
+                  <a:txBody>
+                    <a:bodyPr/>
+                    <a:lstStyle/>
+                    <a:p>
+                      <a:r>
+                        <a:rPr sz="1200">
+                          <a:solidFill>
+                            <a:srgbClr val="16261F"/>
+                          </a:solidFill>
+                          <a:latin typeface="Arial"/>
+                          <a:ea typeface="Arial"/>
+                          <a:cs typeface="Arial"/>
+                        </a:rPr>
+                        <a:t>三点布点</a:t>
+                      </a:r>
+                    </a:p>
+                  </a:txBody>
+                  <a:tcPr/>
+                </a:tc>
+                <a:tc>
+                  <a:txBody>
+                    <a:bodyPr/>
+                    <a:lstStyle/>
+                    <a:p>
+                      <a:r>
+                        <a:rPr sz="1200">
+                          <a:solidFill>
+                            <a:srgbClr val="16261F"/>
+                          </a:solidFill>
+                          <a:latin typeface="Arial"/>
+                          <a:ea typeface="Arial"/>
+                          <a:cs typeface="Arial"/>
+                        </a:rPr>
+                        <a:t>15 组</a:t>
+                      </a:r>
+                    </a:p>
+                  </a:txBody>
+                  <a:tcPr/>
+                </a:tc>
+                <a:tc>
+                  <a:txBody>
+                    <a:bodyPr/>
+                    <a:lstStyle/>
+                    <a:p>
+                      <a:r>
+                        <a:rPr sz="1200">
+                          <a:solidFill>
+                            <a:srgbClr val="16261F"/>
+                          </a:solidFill>
+                          <a:latin typeface="Arial"/>
+                          <a:ea typeface="Arial"/>
+                          <a:cs typeface="Arial"/>
+                        </a:rPr>
+                        <a:t>门口、中间、末尾各 5 条温湿度记录</a:t>
+                      </a:r>
+                    </a:p>
+                  </a:txBody>
+                  <a:tcPr/>
+                </a:tc>
+                <a:tc>
+                  <a:txBody>
+                    <a:bodyPr/>
+                    <a:lstStyle/>
+                    <a:p>
+                      <a:r>
+                        <a:rPr sz="1200">
+                          <a:solidFill>
+                            <a:srgbClr val="16261F"/>
+                          </a:solidFill>
+                          <a:latin typeface="Arial"/>
+                          <a:ea typeface="Arial"/>
+                          <a:cs typeface="Arial"/>
+                        </a:rPr>
+                        <a:t>完成统计</a:t>
+                      </a:r>
+                    </a:p>
+                  </a:txBody>
+                  <a:tcPr/>
+                </a:tc>
+                <a:extLst>
+                  <a:ext uri="{0D108BD9-81ED-4DB2-BD59-A6C34878D82A}">
+                    <a16:rowId xmlns:a16="http://schemas.microsoft.com/office/drawing/2014/main" val="10002"/>
+                  </a:ext>
+                </a:extLst>
+              </a:tr>
+              <a:tr h="711200">
+                <a:tc>
+                  <a:txBody>
+                    <a:bodyPr/>
+                    <a:lstStyle/>
+                    <a:p>
+                      <a:r>
+                        <a:rPr sz="1200">
+                          <a:solidFill>
+                            <a:srgbClr val="16261F"/>
+                          </a:solidFill>
+                          <a:latin typeface="Arial"/>
+                          <a:ea typeface="Arial"/>
+                          <a:cs typeface="Arial"/>
+                        </a:rPr>
+                        <a:t>功能验证</a:t>
+                      </a:r>
+                    </a:p>
+                  </a:txBody>
+                  <a:tcPr/>
+                </a:tc>
+                <a:tc>
+                  <a:txBody>
+                    <a:bodyPr/>
+                    <a:lstStyle/>
+                    <a:p>
+                      <a:r>
+                        <a:rPr sz="1200">
+                          <a:solidFill>
+                            <a:srgbClr val="16261F"/>
+                          </a:solidFill>
+                          <a:latin typeface="Arial"/>
+                          <a:ea typeface="Arial"/>
+                          <a:cs typeface="Arial"/>
+                        </a:rPr>
+                        <a:t>5 项</a:t>
+                      </a:r>
+                    </a:p>
+                  </a:txBody>
+                  <a:tcPr/>
+                </a:tc>
+                <a:tc>
+                  <a:txBody>
+                    <a:bodyPr/>
+                    <a:lstStyle/>
+                    <a:p>
+                      <a:r>
+                        <a:rPr lang="zh-CN" altLang="en-US" sz="1200">
+                          <a:solidFill>
+                            <a:srgbClr val="16261F"/>
+                          </a:solidFill>
+                          <a:latin typeface="Arial"/>
+                          <a:ea typeface="Arial"/>
+                          <a:cs typeface="Arial"/>
+                        </a:rPr>
+                        <a:t>正常、预警、严重、静音、校时与分时 5 项实机验证</a:t>
+                      </a:r>
+                      <a:endParaRPr sz="1200">
+                        <a:solidFill>
+                          <a:srgbClr val="16261F"/>
+                        </a:solidFill>
+                        <a:latin typeface="Arial"/>
+                        <a:ea typeface="Arial"/>
+                        <a:cs typeface="Arial"/>
+                      </a:endParaRPr>
+                    </a:p>
+                  </a:txBody>
+                  <a:tcPr/>
+                </a:tc>
+                <a:tc>
+                  <a:txBody>
+                    <a:bodyPr/>
+                    <a:lstStyle/>
+                    <a:p>
+                      <a:r>
+                        <a:rPr lang="en-US" altLang="zh-CN" sz="1200">
+                          <a:solidFill>
+                            <a:srgbClr val="16261F"/>
+                          </a:solidFill>
+                          <a:latin typeface="Arial"/>
+                          <a:ea typeface="Arial"/>
+                          <a:cs typeface="Arial"/>
+                        </a:rPr>
+                        <a:t>5 项实测通过</a:t>
+                      </a:r>
+                      <a:endParaRPr sz="1200">
+                        <a:solidFill>
+                          <a:srgbClr val="16261F"/>
+                        </a:solidFill>
+                        <a:latin typeface="Arial"/>
+                        <a:ea typeface="Arial"/>
+                        <a:cs typeface="Arial"/>
+                      </a:endParaRPr>
+                    </a:p>
+                  </a:txBody>
+                  <a:tcPr/>
+                </a:tc>
+                <a:extLst>
+                  <a:ext uri="{0D108BD9-81ED-4DB2-BD59-A6C34878D82A}">
+                    <a16:rowId xmlns:a16="http://schemas.microsoft.com/office/drawing/2014/main" val="10003"/>
+                  </a:ext>
+                </a:extLst>
+              </a:tr>
+            </a:tbl>
+          </a:graphicData>
+        </a:graphic>
+      </p:graphicFrame>
+      <p:sp>
+        <p:nvSpPr>
+          <p:cNvPr id="6" name="矩形 5">
+            <a:extLst>
+              <a:ext uri="{FF2B5EF4-FFF2-40B4-BE49-F238E27FC236}">
+                <a16:creationId xmlns:a16="http://schemas.microsoft.com/office/drawing/2014/main" id="{BB4A1191-94D3-4B22-88FC-432EF1756C39}"/>
+              </a:ext>
+            </a:extLst>
+          </p:cNvPr>
+          <p:cNvSpPr>
+            <a:spLocks noGrp="1"/>
+          </p:cNvSpPr>
+          <p:nvPr/>
+        </p:nvSpPr>
+        <p:spPr>
+          <a:xfrm>
+            <a:off x="685800" y="5200650"/>
+            <a:ext cx="10858500" cy="333375"/>
+          </a:xfrm>
+          <a:prstGeom prst="rect">
+            <a:avLst/>
+          </a:prstGeom>
+          <a:noFill/>
+          <a:ln w="0">
+            <a:noFill/>
+          </a:ln>
+        </p:spPr>
+        <p:txBody>
+          <a:bodyPr anchor="ctr">
+            <a:normAutofit/>
+          </a:bodyPr>
+          <a:lstStyle/>
+          <a:p>
+            <a:pPr algn="l">
+              <a:defRPr sz="1425" b="0">
+                <a:solidFill>
+                  <a:srgbClr val="68746E"/>
+                </a:solidFill>
+                <a:latin typeface="Arial"/>
+                <a:ea typeface="Arial"/>
+                <a:cs typeface="Arial"/>
+              </a:defRPr>
+            </a:pPr>
+            <a:r>
+              <a:rPr sz="1425" b="0">
+                <a:solidFill>
+                  <a:srgbClr val="68746E"/>
+                </a:solidFill>
+                <a:latin typeface="Arial"/>
+                <a:ea typeface="Arial"/>
+                <a:cs typeface="Arial"/>
+              </a:rPr>
+              <a:t>三点均值：门口 27.80 ℃ / 61.06 %RH；中间 26.08 ℃ / 66.04 %RH；末尾 26.44 ℃ / 64.18 %RH。</a:t>
+            </a:r>
+          </a:p>
+        </p:txBody>
+      </p:sp>
+      <p:sp>
+        <p:nvSpPr>
+          <p:cNvPr id="7" name="矩形 6">
+            <a:extLst>
+              <a:ext uri="{FF2B5EF4-FFF2-40B4-BE49-F238E27FC236}">
+                <a16:creationId xmlns:a16="http://schemas.microsoft.com/office/drawing/2014/main" id="{B3E9D2BE-56A2-4439-B605-81C4C990C9D2}"/>
+              </a:ext>
+            </a:extLst>
+          </p:cNvPr>
+          <p:cNvSpPr>
+            <a:spLocks noGrp="1"/>
+          </p:cNvSpPr>
+          <p:nvPr/>
+        </p:nvSpPr>
+        <p:spPr>
+          <a:xfrm>
+            <a:off x="685800" y="5753100"/>
+            <a:ext cx="10858500" cy="285750"/>
+          </a:xfrm>
+          <a:prstGeom prst="rect">
+            <a:avLst/>
+          </a:prstGeom>
+          <a:noFill/>
+          <a:ln w="0">
+            <a:noFill/>
+          </a:ln>
+        </p:spPr>
+        <p:txBody>
+          <a:bodyPr anchor="ctr">
+            <a:normAutofit fontScale="94444" lnSpcReduction="10000"/>
+          </a:bodyPr>
+          <a:lstStyle/>
+          <a:p>
+            <a:pPr algn="l">
+              <a:defRPr sz="1350" b="1">
+                <a:solidFill>
+                  <a:srgbClr val="2F7A63"/>
+                </a:solidFill>
+                <a:latin typeface="Arial"/>
+                <a:ea typeface="Arial"/>
+                <a:cs typeface="Arial"/>
+              </a:defRPr>
+            </a:pPr>
+            <a:r>
+              <a:rPr sz="1350" b="1">
+                <a:solidFill>
+                  <a:srgbClr val="2F7A63"/>
+                </a:solidFill>
+                <a:latin typeface="Arial"/>
+                <a:ea typeface="Arial"/>
+                <a:cs typeface="Arial"/>
+              </a:rPr>
+              <a:t>最大差值：温度 1.72 ℃，湿度 5.00 %RH；15 条有效记录均纳入统计。</a:t>
+            </a:r>
+          </a:p>
+        </p:txBody>
+      </p:sp>
+      <p:sp>
+        <p:nvSpPr>
+          <p:cNvPr id="8" name="矩形 7">
+            <a:extLst>
+              <a:ext uri="{FF2B5EF4-FFF2-40B4-BE49-F238E27FC236}">
+                <a16:creationId xmlns:a16="http://schemas.microsoft.com/office/drawing/2014/main" id="{5418015A-955A-4F03-A71B-2B1059B4C200}"/>
+              </a:ext>
+            </a:extLst>
+          </p:cNvPr>
+          <p:cNvSpPr>
+            <a:spLocks noGrp="1"/>
+          </p:cNvSpPr>
+          <p:nvPr/>
+        </p:nvSpPr>
+        <p:spPr>
+          <a:xfrm>
+            <a:off x="685800" y="6115050"/>
+            <a:ext cx="10858500" cy="238125"/>
+          </a:xfrm>
+          <a:prstGeom prst="rect">
+            <a:avLst/>
+          </a:prstGeom>
+          <a:noFill/>
+          <a:ln w="0">
+            <a:noFill/>
+          </a:ln>
+        </p:spPr>
+        <p:txBody>
+          <a:bodyPr anchor="ctr">
+            <a:normAutofit fontScale="85556" lnSpcReduction="10000"/>
+          </a:bodyPr>
+          <a:lstStyle/>
+          <a:p>
+            <a:pPr algn="l">
+              <a:defRPr sz="1125" b="1">
+                <a:solidFill>
+                  <a:srgbClr val="113B36"/>
+                </a:solidFill>
+                <a:latin typeface="Arial"/>
+                <a:ea typeface="Arial"/>
+                <a:cs typeface="Arial"/>
+              </a:defRPr>
+            </a:pPr>
+            <a:r>
+              <a:rPr sz="1125" b="1">
+                <a:solidFill>
+                  <a:srgbClr val="113B36"/>
+                </a:solidFill>
+                <a:latin typeface="Arial"/>
+                <a:ea typeface="Arial"/>
+                <a:cs typeface="Arial"/>
+              </a:rPr>
+              <a:t>布点建议：≤200㎡设3点；200–500㎡设6点（2行×3区）；&gt;500㎡按每增加约100㎡或8–10m分区增设1点。</a:t>
+            </a:r>
+          </a:p>
+        </p:txBody>
+      </p:sp>
+      <p:sp>
+        <p:nvSpPr>
+          <p:cNvPr id="9" name="矩形 8">
+            <a:extLst>
+              <a:ext uri="{FF2B5EF4-FFF2-40B4-BE49-F238E27FC236}">
+                <a16:creationId xmlns:a16="http://schemas.microsoft.com/office/drawing/2014/main" id="{ABD39392-9D13-4744-A67B-FF4307647C16}"/>
+              </a:ext>
+            </a:extLst>
+          </p:cNvPr>
+          <p:cNvSpPr>
+            <a:spLocks noGrp="1"/>
+          </p:cNvSpPr>
+          <p:nvPr/>
+        </p:nvSpPr>
+        <p:spPr>
+          <a:xfrm>
+            <a:off x="685800" y="6429375"/>
+            <a:ext cx="10858500" cy="238125"/>
+          </a:xfrm>
+          <a:prstGeom prst="rect">
+            <a:avLst/>
+          </a:prstGeom>
+          <a:noFill/>
+          <a:ln w="0">
+            <a:noFill/>
+          </a:ln>
+        </p:spPr>
+        <p:txBody>
+          <a:bodyPr anchor="ctr">
+            <a:normAutofit fontScale="85556" lnSpcReduction="10000"/>
+          </a:bodyPr>
+          <a:lstStyle/>
+          <a:p>
+            <a:pPr algn="l">
+              <a:defRPr sz="1125" b="0">
+                <a:solidFill>
+                  <a:srgbClr val="68746E"/>
+                </a:solidFill>
+                <a:latin typeface="Arial"/>
+                <a:ea typeface="Arial"/>
+                <a:cs typeface="Arial"/>
+              </a:defRPr>
+            </a:pPr>
+            <a:r>
+              <a:rPr sz="1125" b="0">
+                <a:solidFill>
+                  <a:srgbClr val="68746E"/>
+                </a:solidFill>
+                <a:latin typeface="Arial"/>
+                <a:ea typeface="Arial"/>
+                <a:cs typeface="Arial"/>
+              </a:rPr>
+              <a:t>示例：6×30m=180㎡→3点；8×50m=400㎡→6点；10×60m=600㎡→9点。</a:t>
+            </a:r>
+          </a:p>
+        </p:txBody>
+      </p:sp>
+    </p:spTree>
+    <p:extLst>
+      <p:ext uri="{BB962C8B-B14F-4D97-AF65-F5344CB8AC3E}">
+        <p14:creationId xmlns:p14="http://schemas.microsoft.com/office/powerpoint/2010/main" val="1999851347"/>
+      </p:ext>
+    </p:extLst>
+  </p:cSld>
+  <p:clrMapOvr>
+    <a:masterClrMapping/>
+  </p:clrMapOvr>
+</p:sld>
+</file>
+
+<file path=ppt/slides/slide11.xml><?xml version="1.0" encoding="utf-8"?>
 <p:sld xmlns:a="http://schemas.openxmlformats.org/drawingml/2006/main" xmlns:r="http://schemas.openxmlformats.org/officeDocument/2006/relationships" xmlns:p="http://schemas.openxmlformats.org/presentationml/2006/main">
   <p:cSld>
     <p:bg>
@@ -2458,7 +3409,7 @@
                 <a:ea typeface="Arial"/>
                 <a:cs typeface="Arial"/>
               </a:rPr>
-              <a:t>10</a:t>
+              <a:t>11</a:t>
             </a:r>
             <a:endParaRPr sz="1600" b="1">
               <a:solidFill>
@@ -2563,7 +3514,7 @@
 </p:sld>
 </file>
 
-<file path=ppt/slides/slide11.xml><?xml version="1.0" encoding="utf-8"?>
+<file path=ppt/slides/slide12.xml><?xml version="1.0" encoding="utf-8"?>
 <p:sld xmlns:a="http://schemas.openxmlformats.org/drawingml/2006/main" xmlns:r="http://schemas.openxmlformats.org/officeDocument/2006/relationships" xmlns:p="http://schemas.openxmlformats.org/presentationml/2006/main">
   <p:cSld>
     <p:bg>
@@ -2734,7 +3685,7 @@
                 <a:ea typeface="Arial"/>
                 <a:cs typeface="Arial"/>
               </a:rPr>
-              <a:t>11</a:t>
+              <a:t>12</a:t>
             </a:r>
             <a:endParaRPr sz="1600" b="1">
               <a:solidFill>
@@ -3735,7 +4686,7 @@
 </p:sld>
 </file>
 
-<file path=ppt/slides/slide12.xml><?xml version="1.0" encoding="utf-8"?>
+<file path=ppt/slides/slide13.xml><?xml version="1.0" encoding="utf-8"?>
 <p:sld xmlns:a="http://schemas.openxmlformats.org/drawingml/2006/main" xmlns:r="http://schemas.openxmlformats.org/officeDocument/2006/relationships" xmlns:p="http://schemas.openxmlformats.org/presentationml/2006/main">
   <p:cSld>
     <p:bg>
@@ -3906,7 +4857,7 @@
                 <a:ea typeface="Arial"/>
                 <a:cs typeface="Arial"/>
               </a:rPr>
-              <a:t>12</a:t>
+              <a:t>13</a:t>
             </a:r>
             <a:endParaRPr sz="1600" b="1">
               <a:solidFill>
@@ -3971,40 +4922,7 @@
                 <a:ea typeface="Arial"/>
                 <a:cs typeface="Arial"/>
               </a:rPr>
-              <a:t>4 </a:t>
-            </a:r>
-            <a:r>
-              <a:rPr lang="zh-CN" altLang="en-US" sz="1600" b="1">
-                <a:solidFill>
-                  <a:srgbClr val="2F7A63"/>
-                </a:solidFill>
-                <a:latin typeface="Arial"/>
-                <a:ea typeface="Arial"/>
-                <a:cs typeface="Arial"/>
-              </a:rPr>
-              <a:t>项现场实测通过；回差、安全覆盖、传感器失效 </a:t>
-            </a:r>
-            <a:r>
-              <a:rPr lang="en-US" altLang="zh-CN" sz="1600" b="1">
-                <a:solidFill>
-                  <a:srgbClr val="2F7A63"/>
-                </a:solidFill>
-                <a:latin typeface="Arial"/>
-                <a:ea typeface="Arial"/>
-                <a:cs typeface="Arial"/>
-              </a:rPr>
-              <a:t>3 </a:t>
-            </a:r>
-            <a:r>
-              <a:rPr lang="zh-CN" altLang="en-US" sz="1600" b="1">
-                <a:solidFill>
-                  <a:srgbClr val="2F7A63"/>
-                </a:solidFill>
-                <a:latin typeface="Arial"/>
-                <a:ea typeface="Arial"/>
-                <a:cs typeface="Arial"/>
-              </a:rPr>
-              <a:t>项为宿主机逻辑测试，未现场验证</a:t>
+              <a:t>5 项现场实测通过：正常、预警、严重、报警静音、校时与分时</a:t>
             </a:r>
             <a:endParaRPr sz="1600" b="1">
               <a:solidFill>
@@ -4466,245 +5384,6 @@
                           <a:ea typeface="Arial"/>
                           <a:cs typeface="Arial"/>
                         </a:rPr>
-                        <a:t>回差退出</a:t>
-                      </a:r>
-                    </a:p>
-                  </a:txBody>
-                  <a:tcPr/>
-                </a:tc>
-                <a:tc>
-                  <a:txBody>
-                    <a:bodyPr/>
-                    <a:lstStyle/>
-                    <a:p>
-                      <a:r>
-                        <a:rPr lang="en-US" sz="1125">
-                          <a:solidFill>
-                            <a:srgbClr val="16261F"/>
-                          </a:solidFill>
-                          <a:latin typeface="Arial"/>
-                          <a:ea typeface="Arial"/>
-                          <a:cs typeface="Arial"/>
-                        </a:rPr>
-                        <a:t>28→27→26 ℃：WARNING→WARNING→NORMAL</a:t>
-                      </a:r>
-                      <a:endParaRPr sz="1125">
-                        <a:solidFill>
-                          <a:srgbClr val="16261F"/>
-                        </a:solidFill>
-                        <a:latin typeface="Arial"/>
-                        <a:ea typeface="Arial"/>
-                        <a:cs typeface="Arial"/>
-                      </a:endParaRPr>
-                    </a:p>
-                  </a:txBody>
-                  <a:tcPr/>
-                </a:tc>
-                <a:tc>
-                  <a:txBody>
-                    <a:bodyPr/>
-                    <a:lstStyle/>
-                    <a:p>
-                      <a:r>
-                        <a:rPr lang="zh-CN" altLang="en-US" sz="1125" b="0">
-                          <a:solidFill>
-                            <a:srgbClr val="16261F"/>
-                          </a:solidFill>
-                          <a:latin typeface="Arial"/>
-                          <a:ea typeface="Arial"/>
-                          <a:cs typeface="Arial"/>
-                        </a:rPr>
-                        <a:t>按代码逻辑，未现场验证</a:t>
-                      </a:r>
-                      <a:endParaRPr sz="1125" b="0">
-                        <a:solidFill>
-                          <a:srgbClr val="16261F"/>
-                        </a:solidFill>
-                        <a:latin typeface="Arial"/>
-                        <a:ea typeface="Arial"/>
-                        <a:cs typeface="Arial"/>
-                      </a:endParaRPr>
-                    </a:p>
-                  </a:txBody>
-                  <a:tcPr/>
-                </a:tc>
-                <a:extLst>
-                  <a:ext uri="{0D108BD9-81ED-4DB2-BD59-A6C34878D82A}">
-                    <a16:rowId xmlns:a16="http://schemas.microsoft.com/office/drawing/2014/main" val="10004"/>
-                  </a:ext>
-                </a:extLst>
-              </a:tr>
-              <a:tr h="398780">
-                <a:tc>
-                  <a:txBody>
-                    <a:bodyPr/>
-                    <a:lstStyle/>
-                    <a:p>
-                      <a:r>
-                        <a:rPr sz="1125">
-                          <a:solidFill>
-                            <a:srgbClr val="16261F"/>
-                          </a:solidFill>
-                          <a:latin typeface="Arial"/>
-                          <a:ea typeface="Arial"/>
-                          <a:cs typeface="Arial"/>
-                        </a:rPr>
-                        <a:t>5</a:t>
-                      </a:r>
-                    </a:p>
-                  </a:txBody>
-                  <a:tcPr/>
-                </a:tc>
-                <a:tc>
-                  <a:txBody>
-                    <a:bodyPr/>
-                    <a:lstStyle/>
-                    <a:p>
-                      <a:r>
-                        <a:rPr sz="1125">
-                          <a:solidFill>
-                            <a:srgbClr val="16261F"/>
-                          </a:solidFill>
-                          <a:latin typeface="Arial"/>
-                          <a:ea typeface="Arial"/>
-                          <a:cs typeface="Arial"/>
-                        </a:rPr>
-                        <a:t>安全覆盖</a:t>
-                      </a:r>
-                    </a:p>
-                  </a:txBody>
-                  <a:tcPr/>
-                </a:tc>
-                <a:tc>
-                  <a:txBody>
-                    <a:bodyPr/>
-                    <a:lstStyle/>
-                    <a:p>
-                      <a:r>
-                        <a:rPr lang="en-US" sz="1125">
-                          <a:solidFill>
-                            <a:srgbClr val="16261F"/>
-                          </a:solidFill>
-                          <a:latin typeface="Arial"/>
-                          <a:ea typeface="Arial"/>
-                          <a:cs typeface="Arial"/>
-                        </a:rPr>
-                        <a:t>CRITICAL </a:t>
-                      </a:r>
-                      <a:r>
-                        <a:rPr lang="zh-CN" altLang="en-US" sz="1125">
-                          <a:solidFill>
-                            <a:srgbClr val="16261F"/>
-                          </a:solidFill>
-                          <a:latin typeface="Arial"/>
-                          <a:ea typeface="Arial"/>
-                          <a:cs typeface="Arial"/>
-                        </a:rPr>
-                        <a:t>下 </a:t>
-                      </a:r>
-                      <a:r>
-                        <a:rPr lang="en-US" sz="1125">
-                          <a:solidFill>
-                            <a:srgbClr val="16261F"/>
-                          </a:solidFill>
-                          <a:latin typeface="Arial"/>
-                          <a:ea typeface="Arial"/>
-                          <a:cs typeface="Arial"/>
-                        </a:rPr>
-                        <a:t>FAN OFF </a:t>
-                      </a:r>
-                      <a:r>
-                        <a:rPr lang="zh-CN" altLang="en-US" sz="1125">
-                          <a:solidFill>
-                            <a:srgbClr val="16261F"/>
-                          </a:solidFill>
-                          <a:latin typeface="Arial"/>
-                          <a:ea typeface="Arial"/>
-                          <a:cs typeface="Arial"/>
-                        </a:rPr>
-                        <a:t>仍保持风扇开启</a:t>
-                      </a:r>
-                      <a:endParaRPr sz="1125">
-                        <a:solidFill>
-                          <a:srgbClr val="16261F"/>
-                        </a:solidFill>
-                        <a:latin typeface="Arial"/>
-                        <a:ea typeface="Arial"/>
-                        <a:cs typeface="Arial"/>
-                      </a:endParaRPr>
-                    </a:p>
-                  </a:txBody>
-                  <a:tcPr/>
-                </a:tc>
-                <a:tc>
-                  <a:txBody>
-                    <a:bodyPr/>
-                    <a:lstStyle/>
-                    <a:p>
-                      <a:r>
-                        <a:rPr lang="zh-CN" altLang="en-US" sz="1125" b="0">
-                          <a:solidFill>
-                            <a:srgbClr val="16261F"/>
-                          </a:solidFill>
-                          <a:latin typeface="Arial"/>
-                          <a:ea typeface="Arial"/>
-                          <a:cs typeface="Arial"/>
-                        </a:rPr>
-                        <a:t>按代码逻辑，未现场验证</a:t>
-                      </a:r>
-                      <a:endParaRPr sz="1125" b="0">
-                        <a:solidFill>
-                          <a:srgbClr val="16261F"/>
-                        </a:solidFill>
-                        <a:latin typeface="Arial"/>
-                        <a:ea typeface="Arial"/>
-                        <a:cs typeface="Arial"/>
-                      </a:endParaRPr>
-                    </a:p>
-                  </a:txBody>
-                  <a:tcPr/>
-                </a:tc>
-                <a:extLst>
-                  <a:ext uri="{0D108BD9-81ED-4DB2-BD59-A6C34878D82A}">
-                    <a16:rowId xmlns:a16="http://schemas.microsoft.com/office/drawing/2014/main" val="10005"/>
-                  </a:ext>
-                </a:extLst>
-              </a:tr>
-              <a:tr h="398780">
-                <a:tc>
-                  <a:txBody>
-                    <a:bodyPr/>
-                    <a:lstStyle/>
-                    <a:p>
-                      <a:r>
-                        <a:rPr sz="1125">
-                          <a:solidFill>
-                            <a:srgbClr val="16261F"/>
-                          </a:solidFill>
-                          <a:latin typeface="Arial"/>
-                          <a:ea typeface="Arial"/>
-                          <a:cs typeface="Arial"/>
-                        </a:rPr>
-                        <a:t>6</a:t>
-                      </a:r>
-                    </a:p>
-                  </a:txBody>
-                  <a:tcPr/>
-                </a:tc>
-                <a:tc>
-                  <a:txBody>
-                    <a:bodyPr/>
-                    <a:lstStyle/>
-                    <a:p>
-                      <a:r>
-                        <a:rPr sz="1125">
-                          <a:solidFill>
-                            <a:srgbClr val="16261F"/>
-                          </a:solidFill>
-                          <a:latin typeface="Arial"/>
-                          <a:ea typeface="Arial"/>
-                          <a:cs typeface="Arial"/>
-                        </a:rPr>
                         <a:t>报警静音</a:t>
                       </a:r>
                     </a:p>
@@ -4772,7 +5451,7 @@
                           <a:ea typeface="Arial"/>
                           <a:cs typeface="Arial"/>
                         </a:rPr>
-                        <a:t>7</a:t>
+                        <a:t>5</a:t>
                       </a:r>
                     </a:p>
                   </a:txBody>
@@ -4792,7 +5471,7 @@
                           <a:ea typeface="Arial"/>
                           <a:cs typeface="Arial"/>
                         </a:rPr>
-                        <a:t>传感器失效</a:t>
+                        <a:t>校时与分时</a:t>
                       </a:r>
                     </a:p>
                   </a:txBody>
@@ -4804,7 +5483,7 @@
                     <a:lstStyle/>
                     <a:p>
                       <a:r>
-                        <a:rPr lang="zh-CN" altLang="en-US" sz="1125">
+                        <a:rPr sz="1125">
                           <a:solidFill>
                             <a:srgbClr val="16261F"/>
                           </a:solidFill>
@@ -4812,16 +5491,8 @@
                           <a:ea typeface="Arial"/>
                           <a:cs typeface="Arial"/>
                         </a:rPr>
-                        <a:t>后断线风扇开；上电即断线风扇关</a:t>
+                        <a:t>TIME 跨 06:00 / 12:00 / 18:00 自动切换；STATUS 与 OLED 读回一致</a:t>
                       </a:r>
-                      <a:endParaRPr sz="1125">
-                        <a:solidFill>
-                          <a:srgbClr val="16261F"/>
-                        </a:solidFill>
-                        <a:latin typeface="Arial"/>
-                        <a:ea typeface="Arial"/>
-                        <a:cs typeface="Arial"/>
-                      </a:endParaRPr>
                     </a:p>
                   </a:txBody>
                   <a:tcPr/>
@@ -4832,7 +5503,7 @@
                     <a:lstStyle/>
                     <a:p>
                       <a:r>
-                        <a:rPr lang="zh-CN" altLang="en-US" sz="1125" b="0">
+                        <a:rPr sz="1125">
                           <a:solidFill>
                             <a:srgbClr val="16261F"/>
                           </a:solidFill>
@@ -4840,23 +5511,15 @@
                           <a:ea typeface="Arial"/>
                           <a:cs typeface="Arial"/>
                         </a:rPr>
-                        <a:t>按代码逻辑，未现场验证</a:t>
+                        <a:t>通过</a:t>
                       </a:r>
-                      <a:endParaRPr sz="1125" b="0">
-                        <a:solidFill>
-                          <a:srgbClr val="16261F"/>
-                        </a:solidFill>
-                        <a:latin typeface="Arial"/>
-                        <a:ea typeface="Arial"/>
-                        <a:cs typeface="Arial"/>
-                      </a:endParaRPr>
                     </a:p>
                   </a:txBody>
                   <a:tcPr/>
                 </a:tc>
                 <a:extLst>
                   <a:ext uri="{0D108BD9-81ED-4DB2-BD59-A6C34878D82A}">
-                    <a16:rowId xmlns:a16="http://schemas.microsoft.com/office/drawing/2014/main" val="10007"/>
+                    <a16:rowId xmlns:a16="http://schemas.microsoft.com/office/drawing/2014/main" val="10006"/>
                   </a:ext>
                 </a:extLst>
               </a:tr>
@@ -4898,129 +5561,7 @@
                   <a:srgbClr val="68746E"/>
                 </a:solidFill>
               </a:rPr>
-              <a:t>分时功能：</a:t>
-            </a:r>
-            <a:r>
-              <a:rPr lang="en-US" altLang="zh-CN" sz="1400">
-                <a:solidFill>
-                  <a:srgbClr val="68746E"/>
-                </a:solidFill>
-              </a:rPr>
-              <a:t>TIME </a:t>
-            </a:r>
-            <a:r>
-              <a:rPr lang="zh-CN" altLang="en-US" sz="1400">
-                <a:solidFill>
-                  <a:srgbClr val="68746E"/>
-                </a:solidFill>
-              </a:rPr>
-              <a:t>跨 </a:t>
-            </a:r>
-            <a:r>
-              <a:rPr lang="en-US" altLang="zh-CN" sz="1400">
-                <a:solidFill>
-                  <a:srgbClr val="68746E"/>
-                </a:solidFill>
-              </a:rPr>
-              <a:t>06:00 / 12:00 / 18:00 </a:t>
-            </a:r>
-            <a:r>
-              <a:rPr lang="zh-CN" altLang="en-US" sz="1400">
-                <a:solidFill>
-                  <a:srgbClr val="68746E"/>
-                </a:solidFill>
-              </a:rPr>
-              <a:t>自动切换；</a:t>
-            </a:r>
-            <a:r>
-              <a:rPr lang="en-US" altLang="zh-CN" sz="1400">
-                <a:solidFill>
-                  <a:srgbClr val="68746E"/>
-                </a:solidFill>
-              </a:rPr>
-              <a:t>SET DAY/PM/NIGHT</a:t>
-            </a:r>
-            <a:r>
-              <a:rPr lang="zh-CN" altLang="en-US" sz="1400">
-                <a:solidFill>
-                  <a:srgbClr val="68746E"/>
-                </a:solidFill>
-              </a:rPr>
-              <a:t>、</a:t>
-            </a:r>
-            <a:r>
-              <a:rPr lang="en-US" altLang="zh-CN" sz="1400">
-                <a:solidFill>
-                  <a:srgbClr val="68746E"/>
-                </a:solidFill>
-              </a:rPr>
-              <a:t>SET HUM </a:t>
-            </a:r>
-            <a:r>
-              <a:rPr lang="zh-CN" altLang="en-US" sz="1400">
-                <a:solidFill>
-                  <a:srgbClr val="68746E"/>
-                </a:solidFill>
-              </a:rPr>
-              <a:t>后 </a:t>
-            </a:r>
-            <a:r>
-              <a:rPr lang="en-US" altLang="zh-CN" sz="1400">
-                <a:solidFill>
-                  <a:srgbClr val="68746E"/>
-                </a:solidFill>
-              </a:rPr>
-              <a:t>STATUS </a:t>
-            </a:r>
-            <a:r>
-              <a:rPr lang="zh-CN" altLang="en-US" sz="1400">
-                <a:solidFill>
-                  <a:srgbClr val="68746E"/>
-                </a:solidFill>
-              </a:rPr>
-              <a:t>与 </a:t>
-            </a:r>
-            <a:r>
-              <a:rPr lang="en-US" altLang="zh-CN" sz="1400">
-                <a:solidFill>
-                  <a:srgbClr val="68746E"/>
-                </a:solidFill>
-              </a:rPr>
-              <a:t>OLED </a:t>
-            </a:r>
-            <a:r>
-              <a:rPr lang="zh-CN" altLang="en-US" sz="1400">
-                <a:solidFill>
-                  <a:srgbClr val="68746E"/>
-                </a:solidFill>
-              </a:rPr>
-              <a:t>读回一致。</a:t>
-            </a:r>
-          </a:p>
-          <a:p>
-            <a:r>
-              <a:rPr lang="zh-CN" altLang="en-US" sz="1400">
-                <a:solidFill>
-                  <a:srgbClr val="68746E"/>
-                </a:solidFill>
-              </a:rPr>
-              <a:t>回差、安全覆盖、传感器失效 </a:t>
-            </a:r>
-            <a:r>
-              <a:rPr lang="en-US" altLang="zh-CN" sz="1400">
-                <a:solidFill>
-                  <a:srgbClr val="68746E"/>
-                </a:solidFill>
-              </a:rPr>
-              <a:t>3 </a:t>
-            </a:r>
-            <a:r>
-              <a:rPr lang="zh-CN" altLang="en-US" sz="1400">
-                <a:solidFill>
-                  <a:srgbClr val="68746E"/>
-                </a:solidFill>
-              </a:rPr>
-              <a:t>项为宿主机逻辑测试，未现场验证；分时阈值沿用同一套安全逻辑。</a:t>
+              <a:t>分时功能：TIME 跨 06:00 / 12:00 / 18:00 自动切换；SET DAY/PM/NIGHT、SET HUM 后 STATUS 与 OLED 读回一致，并立即用于报警判断。</a:t>
             </a:r>
           </a:p>
         </p:txBody>
@@ -5038,7 +5579,7 @@
 </p:sld>
 </file>
 
-<file path=ppt/slides/slide13.xml><?xml version="1.0" encoding="utf-8"?>
+<file path=ppt/slides/slide14.xml><?xml version="1.0" encoding="utf-8"?>
 <p:sld xmlns:a="http://schemas.openxmlformats.org/drawingml/2006/main" xmlns:r="http://schemas.openxmlformats.org/officeDocument/2006/relationships" xmlns:p="http://schemas.openxmlformats.org/presentationml/2006/main">
   <p:cSld>
     <p:bg>
@@ -5202,7 +5743,7 @@
                   <a:srgbClr val="4F5936"/>
                 </a:solidFill>
               </a:rPr>
-              <a:t>左侧视频介绍硬件功能；右侧五段视频为实际功能验证证据（未验证项以文字说明标出）。</a:t>
+              <a:t>左侧视频介绍硬件功能；右侧五段视频为实际功能验证证据。</a:t>
             </a:r>
           </a:p>
         </p:txBody>
@@ -5820,7 +6361,7 @@
 </p:sld>
 </file>
 
-<file path=ppt/slides/slide14.xml><?xml version="1.0" encoding="utf-8"?>
+<file path=ppt/slides/slide15.xml><?xml version="1.0" encoding="utf-8"?>
 <p:sld xmlns:a="http://schemas.openxmlformats.org/drawingml/2006/main" xmlns:r="http://schemas.openxmlformats.org/officeDocument/2006/relationships" xmlns:p="http://schemas.openxmlformats.org/presentationml/2006/main">
   <p:cSld>
     <p:bg>
@@ -5991,7 +6532,7 @@
                 <a:ea typeface="Arial"/>
                 <a:cs typeface="Arial"/>
               </a:rPr>
-              <a:t>14</a:t>
+              <a:t>15</a:t>
             </a:r>
             <a:endParaRPr sz="1600" b="1">
               <a:solidFill>
@@ -6748,7 +7289,7 @@
 </p:sld>
 </file>
 
-<file path=ppt/slides/slide15.xml><?xml version="1.0" encoding="utf-8"?>
+<file path=ppt/slides/slide16.xml><?xml version="1.0" encoding="utf-8"?>
 <p:sld xmlns:a="http://schemas.openxmlformats.org/drawingml/2006/main" xmlns:r="http://schemas.openxmlformats.org/officeDocument/2006/relationships" xmlns:p="http://schemas.openxmlformats.org/presentationml/2006/main">
   <p:cSld>
     <p:bg>
@@ -6919,7 +7460,7 @@
                 <a:ea typeface="Arial"/>
                 <a:cs typeface="Arial"/>
               </a:rPr>
-              <a:t>15</a:t>
+              <a:t>16</a:t>
             </a:r>
             <a:endParaRPr sz="1600" b="1">
               <a:solidFill>
@@ -7617,7 +8158,7 @@
 </p:sld>
 </file>
 
-<file path=ppt/slides/slide16.xml><?xml version="1.0" encoding="utf-8"?>
+<file path=ppt/slides/slide17.xml><?xml version="1.0" encoding="utf-8"?>
 <p:sld xmlns:a="http://schemas.openxmlformats.org/drawingml/2006/main" xmlns:r="http://schemas.openxmlformats.org/officeDocument/2006/relationships" xmlns:p="http://schemas.openxmlformats.org/presentationml/2006/main">
   <p:cSld>
     <p:bg>
@@ -7831,83 +8372,8 @@
                 <a:ea typeface="Arial"/>
                 <a:cs typeface="Arial"/>
               </a:rPr>
-              <a:t>完成三种工况对比统计与功能验证，</a:t>
-            </a:r>
-          </a:p>
-          <a:p>
-            <a:pPr algn="l">
-              <a:defRPr sz="2025" b="0">
-                <a:solidFill>
-                  <a:srgbClr val="DDEFE8"/>
-                </a:solidFill>
-                <a:latin typeface="Arial"/>
-                <a:ea typeface="Arial"/>
-                <a:cs typeface="Arial"/>
-              </a:defRPr>
-            </a:pPr>
-            <a:r>
-              <a:rPr lang="zh-CN" altLang="en-US" sz="2025" b="0">
-                <a:solidFill>
-                  <a:srgbClr val="DDEFE8"/>
-                </a:solidFill>
-                <a:latin typeface="Arial"/>
-                <a:ea typeface="Arial"/>
-                <a:cs typeface="Arial"/>
-              </a:rPr>
-              <a:t>其中 </a:t>
-            </a:r>
-            <a:r>
-              <a:rPr lang="en-US" altLang="zh-CN" sz="2025" b="0">
-                <a:solidFill>
-                  <a:srgbClr val="DDEFE8"/>
-                </a:solidFill>
-                <a:latin typeface="Arial"/>
-                <a:ea typeface="Arial"/>
-                <a:cs typeface="Arial"/>
-              </a:rPr>
-              <a:t>4 </a:t>
-            </a:r>
-            <a:r>
-              <a:rPr lang="zh-CN" altLang="en-US" sz="2025" b="0">
-                <a:solidFill>
-                  <a:srgbClr val="DDEFE8"/>
-                </a:solidFill>
-                <a:latin typeface="Arial"/>
-                <a:ea typeface="Arial"/>
-                <a:cs typeface="Arial"/>
-              </a:rPr>
-              <a:t>项实机通过、</a:t>
-            </a:r>
-            <a:r>
-              <a:rPr lang="en-US" altLang="zh-CN" sz="2025" b="0">
-                <a:solidFill>
-                  <a:srgbClr val="DDEFE8"/>
-                </a:solidFill>
-                <a:latin typeface="Arial"/>
-                <a:ea typeface="Arial"/>
-                <a:cs typeface="Arial"/>
-              </a:rPr>
-              <a:t>3 </a:t>
-            </a:r>
-            <a:r>
-              <a:rPr lang="zh-CN" altLang="en-US" sz="2025" b="0">
-                <a:solidFill>
-                  <a:srgbClr val="DDEFE8"/>
-                </a:solidFill>
-                <a:latin typeface="Arial"/>
-                <a:ea typeface="Arial"/>
-                <a:cs typeface="Arial"/>
-              </a:rPr>
-              <a:t>项为逻辑测试。</a:t>
-            </a:r>
-            <a:endParaRPr sz="2025" b="0">
-              <a:solidFill>
-                <a:srgbClr val="DDEFE8"/>
-              </a:solidFill>
-              <a:latin typeface="Arial"/>
-              <a:ea typeface="Arial"/>
-              <a:cs typeface="Arial"/>
-            </a:endParaRPr>
+              <a:t>完成三种工况对比统计与五项功能验证，</a:t>
+            </a:r>
           </a:p>
         </p:txBody>
       </p:sp>
@@ -8584,16 +9050,8 @@
                   <a:srgbClr val="323B1F"/>
                 </a:solidFill>
               </a:rPr>
-              <a:t>05  </a:t>
-            </a:r>
-            <a:r>
-              <a:rPr lang="zh-CN" altLang="en-US" sz="1400">
-                <a:solidFill>
-                  <a:srgbClr val="323B1F"/>
-                </a:solidFill>
-              </a:rPr>
-              <a:t>控制逻辑与功能测试
-阈值、回差、安全覆盖与静音</a:t>
+              <a:t>05  控制逻辑与功能测试
+阈值、校时与分时、静音</a:t>
             </a:r>
           </a:p>
         </p:txBody>
@@ -9707,6 +10165,1017 @@
 </file>
 
 <file path=ppt/slides/slide4.xml><?xml version="1.0" encoding="utf-8"?>
+<p:sld xmlns:a="http://schemas.openxmlformats.org/drawingml/2006/main" xmlns:p="http://schemas.openxmlformats.org/presentationml/2006/main" xmlns:r="http://schemas.openxmlformats.org/officeDocument/2006/relationships">
+  <p:cSld>
+    <p:spTree>
+      <p:nvGrpSpPr>
+        <p:cNvPr id="1" name=""/>
+        <p:cNvGrpSpPr/>
+        <p:nvPr/>
+      </p:nvGrpSpPr>
+      <p:grpSpPr/>
+      <p:sp>
+        <p:nvSpPr>
+          <p:cNvPr id="901" name="矩形 17">
+            <a:extLst>
+              <a:ext uri="{FF2B5EF4-FFF2-40B4-BE49-F238E27FC236}">
+                <a16:creationId xmlns:a16="http://schemas.microsoft.com/office/drawing/2014/main" id="{2B9F81AB-71BB-4737-AE0D-E0EE94EEA9CD}"/>
+              </a:ext>
+            </a:extLst>
+          </p:cNvPr>
+          <p:cNvSpPr>
+            <a:spLocks noGrp="1"/>
+          </p:cNvSpPr>
+          <p:nvPr/>
+        </p:nvSpPr>
+        <p:spPr>
+          <a:xfrm>
+            <a:off x="685800" y="400050"/>
+            <a:ext cx="9048750" cy="514350"/>
+          </a:xfrm>
+          <a:prstGeom prst="rect">
+            <a:avLst/>
+          </a:prstGeom>
+          <a:noFill/>
+          <a:ln w="0">
+            <a:noFill/>
+          </a:ln>
+        </p:spPr>
+        <p:txBody>
+          <a:bodyPr anchor="ctr">
+            <a:normAutofit/>
+          </a:bodyPr>
+          <a:lstStyle/>
+          <a:p>
+            <a:pPr algn="l">
+              <a:defRPr sz="2550" b="1">
+                <a:solidFill>
+                  <a:srgbClr val="113B36"/>
+                </a:solidFill>
+                <a:latin typeface="Arial"/>
+                <a:ea typeface="Arial"/>
+                <a:cs typeface="Arial"/>
+              </a:defRPr>
+            </a:pPr>
+            <a:r>
+              <a:rPr sz="2550" b="1">
+                <a:solidFill>
+                  <a:srgbClr val="113B36"/>
+                </a:solidFill>
+                <a:latin typeface="Arial"/>
+                <a:ea typeface="Arial"/>
+                <a:cs typeface="Arial"/>
+              </a:rPr>
+              <a:t>成员分工</a:t>
+            </a:r>
+          </a:p>
+        </p:txBody>
+      </p:sp>
+      <p:sp>
+        <p:nvSpPr>
+          <p:cNvPr id="901" name="直接连接符 1">
+            <a:extLst>
+              <a:ext uri="{FF2B5EF4-FFF2-40B4-BE49-F238E27FC236}">
+                <a16:creationId xmlns:a16="http://schemas.microsoft.com/office/drawing/2014/main" id="{92E46528-883E-4661-BC42-A96C567DF710}"/>
+              </a:ext>
+            </a:extLst>
+          </p:cNvPr>
+          <p:cNvSpPr>
+            <a:spLocks noGrp="1"/>
+          </p:cNvSpPr>
+          <p:nvPr/>
+        </p:nvSpPr>
+        <p:spPr>
+          <a:xfrm>
+            <a:off x="685800" y="1028700"/>
+            <a:ext cx="10820400" cy="0"/>
+          </a:xfrm>
+          <a:prstGeom prst="line">
+            <a:avLst/>
+          </a:prstGeom>
+          <a:noFill/>
+          <a:ln w="9525">
+            <a:solidFill>
+              <a:srgbClr val="C9D8D0"/>
+            </a:solidFill>
+          </a:ln>
+        </p:spPr>
+        <p:txBody>
+          <a:bodyPr/>
+          <a:lstStyle/>
+          <a:p>
+            <a:endParaRPr lang="zh-CN" altLang="en-US"/>
+          </a:p>
+        </p:txBody>
+      </p:sp>
+      <p:sp>
+        <p:nvSpPr>
+          <p:cNvPr id="901" name="矩形 2">
+            <a:extLst>
+              <a:ext uri="{FF2B5EF4-FFF2-40B4-BE49-F238E27FC236}">
+                <a16:creationId xmlns:a16="http://schemas.microsoft.com/office/drawing/2014/main" id="{9DD2C869-40A8-4CD4-95D8-0E899E25AC8A}"/>
+              </a:ext>
+            </a:extLst>
+          </p:cNvPr>
+          <p:cNvSpPr>
+            <a:spLocks noGrp="1"/>
+          </p:cNvSpPr>
+          <p:nvPr/>
+        </p:nvSpPr>
+        <p:spPr>
+          <a:xfrm>
+            <a:off x="10906125" y="409575"/>
+            <a:ext cx="571500" cy="342900"/>
+          </a:xfrm>
+          <a:prstGeom prst="rect">
+            <a:avLst/>
+          </a:prstGeom>
+          <a:noFill/>
+          <a:ln w="0">
+            <a:noFill/>
+          </a:ln>
+        </p:spPr>
+        <p:txBody>
+          <a:bodyPr anchor="ctr">
+            <a:normAutofit/>
+          </a:bodyPr>
+          <a:lstStyle/>
+          <a:p>
+            <a:pPr algn="r">
+              <a:defRPr sz="1200" b="1">
+                <a:solidFill>
+                  <a:srgbClr val="2F7A63"/>
+                </a:solidFill>
+                <a:latin typeface="Arial"/>
+                <a:ea typeface="Arial"/>
+                <a:cs typeface="Arial"/>
+              </a:defRPr>
+            </a:pPr>
+            <a:r>
+              <a:rPr lang="en-US" altLang="zh-CN" sz="1600" b="1">
+                <a:solidFill>
+                  <a:srgbClr val="2F7A63"/>
+                </a:solidFill>
+                <a:latin typeface="Arial"/>
+                <a:ea typeface="Arial"/>
+                <a:cs typeface="Arial"/>
+              </a:rPr>
+              <a:t>04</a:t>
+            </a:r>
+            <a:endParaRPr sz="1600" b="1">
+              <a:solidFill>
+                <a:srgbClr val="2F7A63"/>
+              </a:solidFill>
+              <a:latin typeface="Arial"/>
+              <a:ea typeface="Arial"/>
+              <a:cs typeface="Arial"/>
+            </a:endParaRPr>
+          </a:p>
+        </p:txBody>
+      </p:sp>
+      <p:sp>
+        <p:nvSpPr>
+          <p:cNvPr id="901" name="矩形 3">
+            <a:extLst>
+              <a:ext uri="{FF2B5EF4-FFF2-40B4-BE49-F238E27FC236}">
+                <a16:creationId xmlns:a16="http://schemas.microsoft.com/office/drawing/2014/main" id="{13658425-41D1-4F0E-A386-48CA211B9526}"/>
+              </a:ext>
+            </a:extLst>
+          </p:cNvPr>
+          <p:cNvSpPr>
+            <a:spLocks noGrp="1"/>
+          </p:cNvSpPr>
+          <p:nvPr/>
+        </p:nvSpPr>
+        <p:spPr>
+          <a:xfrm>
+            <a:off x="685800" y="1352550"/>
+            <a:ext cx="9334500" cy="400050"/>
+          </a:xfrm>
+          <a:prstGeom prst="rect">
+            <a:avLst/>
+          </a:prstGeom>
+          <a:noFill/>
+          <a:ln w="0">
+            <a:noFill/>
+          </a:ln>
+        </p:spPr>
+        <p:txBody>
+          <a:bodyPr anchor="ctr">
+            <a:normAutofit/>
+          </a:bodyPr>
+          <a:lstStyle/>
+          <a:p>
+            <a:pPr algn="l">
+              <a:defRPr sz="1875" b="1">
+                <a:solidFill>
+                  <a:srgbClr val="2F7A63"/>
+                </a:solidFill>
+                <a:latin typeface="Arial"/>
+                <a:ea typeface="Arial"/>
+                <a:cs typeface="Arial"/>
+              </a:defRPr>
+            </a:pPr>
+            <a:r>
+              <a:rPr sz="1875" b="1">
+                <a:solidFill>
+                  <a:srgbClr val="2F7A63"/>
+                </a:solidFill>
+                <a:latin typeface="Arial"/>
+                <a:ea typeface="Arial"/>
+                <a:cs typeface="Arial"/>
+              </a:rPr>
+              <a:t>两名成员围绕设计、实现、测试与答辩协作，公共任务各占 50%</a:t>
+            </a:r>
+          </a:p>
+        </p:txBody>
+      </p:sp>
+      <p:sp>
+        <p:nvSpPr>
+          <p:cNvPr id="901" name="矩形 4">
+            <a:extLst>
+              <a:ext uri="{FF2B5EF4-FFF2-40B4-BE49-F238E27FC236}">
+                <a16:creationId xmlns:a16="http://schemas.microsoft.com/office/drawing/2014/main" id="{158DAEC4-9D02-474C-8D7A-64C3DD483F30}"/>
+              </a:ext>
+            </a:extLst>
+          </p:cNvPr>
+          <p:cNvSpPr>
+            <a:spLocks noGrp="1"/>
+          </p:cNvSpPr>
+          <p:nvPr/>
+        </p:nvSpPr>
+        <p:spPr>
+          <a:xfrm>
+            <a:off x="685800" y="1762125"/>
+            <a:ext cx="10001250" cy="304800"/>
+          </a:xfrm>
+          <a:prstGeom prst="rect">
+            <a:avLst/>
+          </a:prstGeom>
+          <a:noFill/>
+          <a:ln w="0">
+            <a:noFill/>
+          </a:ln>
+        </p:spPr>
+        <p:txBody>
+          <a:bodyPr anchor="ctr">
+            <a:normAutofit fontScale="93333"/>
+          </a:bodyPr>
+          <a:lstStyle/>
+          <a:p>
+            <a:pPr algn="l">
+              <a:defRPr sz="1500" b="0">
+                <a:solidFill>
+                  <a:srgbClr val="68746E"/>
+                </a:solidFill>
+                <a:latin typeface="Arial"/>
+                <a:ea typeface="Arial"/>
+                <a:cs typeface="Arial"/>
+              </a:defRPr>
+            </a:pPr>
+            <a:r>
+              <a:rPr sz="1500" b="0">
+                <a:solidFill>
+                  <a:srgbClr val="68746E"/>
+                </a:solidFill>
+                <a:latin typeface="Arial"/>
+                <a:ea typeface="Arial"/>
+                <a:cs typeface="Arial"/>
+              </a:rPr>
+              <a:t>分工口径与报告 1.4 成员分工、表 1-1 一致。</a:t>
+            </a:r>
+          </a:p>
+        </p:txBody>
+      </p:sp>
+      <p:sp>
+        <p:nvSpPr>
+          <p:cNvPr id="901" name="矩形: 圆角 5">
+            <a:extLst>
+              <a:ext uri="{FF2B5EF4-FFF2-40B4-BE49-F238E27FC236}">
+                <a16:creationId xmlns:a16="http://schemas.microsoft.com/office/drawing/2014/main" id="{A19792F9-9F26-4F0B-AAD0-B7FD8616A853}"/>
+              </a:ext>
+            </a:extLst>
+          </p:cNvPr>
+          <p:cNvSpPr>
+            <a:spLocks noGrp="1"/>
+          </p:cNvSpPr>
+          <p:nvPr/>
+        </p:nvSpPr>
+        <p:spPr>
+          <a:xfrm>
+            <a:off x="685800" y="2476500"/>
+            <a:ext cx="3143250" cy="1762125"/>
+          </a:xfrm>
+          <a:prstGeom prst="roundRect">
+            <a:avLst>
+              <a:gd name="adj" fmla="val 4324"/>
+            </a:avLst>
+          </a:prstGeom>
+          <a:solidFill>
+            <a:srgbClr val="FFFFFF"/>
+          </a:solidFill>
+          <a:ln w="9525">
+            <a:solidFill>
+              <a:srgbClr val="C9D8D0"/>
+            </a:solidFill>
+          </a:ln>
+        </p:spPr>
+        <p:txBody>
+          <a:bodyPr/>
+          <a:lstStyle/>
+          <a:p>
+            <a:endParaRPr lang="zh-CN" altLang="en-US"/>
+          </a:p>
+        </p:txBody>
+      </p:sp>
+      <p:sp>
+        <p:nvSpPr>
+          <p:cNvPr id="901" name="矩形 6">
+            <a:extLst>
+              <a:ext uri="{FF2B5EF4-FFF2-40B4-BE49-F238E27FC236}">
+                <a16:creationId xmlns:a16="http://schemas.microsoft.com/office/drawing/2014/main" id="{EC9E12E9-FAE4-4AB4-B17C-2659C0D0072F}"/>
+              </a:ext>
+            </a:extLst>
+          </p:cNvPr>
+          <p:cNvSpPr>
+            <a:spLocks noGrp="1"/>
+          </p:cNvSpPr>
+          <p:nvPr/>
+        </p:nvSpPr>
+        <p:spPr>
+          <a:xfrm>
+            <a:off x="685800" y="2476500"/>
+            <a:ext cx="66675" cy="1762125"/>
+          </a:xfrm>
+          <a:prstGeom prst="rect">
+            <a:avLst/>
+          </a:prstGeom>
+          <a:solidFill>
+            <a:srgbClr val="2F7A63"/>
+          </a:solidFill>
+          <a:ln w="0">
+            <a:solidFill>
+              <a:srgbClr val="2F7A63"/>
+            </a:solidFill>
+          </a:ln>
+        </p:spPr>
+        <p:txBody>
+          <a:bodyPr/>
+          <a:lstStyle/>
+          <a:p>
+            <a:endParaRPr lang="zh-CN" altLang="en-US"/>
+          </a:p>
+        </p:txBody>
+      </p:sp>
+      <p:sp>
+        <p:nvSpPr>
+          <p:cNvPr id="901" name="矩形 7">
+            <a:extLst>
+              <a:ext uri="{FF2B5EF4-FFF2-40B4-BE49-F238E27FC236}">
+                <a16:creationId xmlns:a16="http://schemas.microsoft.com/office/drawing/2014/main" id="{CC357C67-1851-4914-AD23-77A44180CDD9}"/>
+              </a:ext>
+            </a:extLst>
+          </p:cNvPr>
+          <p:cNvSpPr>
+            <a:spLocks noGrp="1"/>
+          </p:cNvSpPr>
+          <p:nvPr/>
+        </p:nvSpPr>
+        <p:spPr>
+          <a:xfrm>
+            <a:off x="914400" y="2647950"/>
+            <a:ext cx="2781300" cy="285750"/>
+          </a:xfrm>
+          <a:prstGeom prst="rect">
+            <a:avLst/>
+          </a:prstGeom>
+          <a:noFill/>
+          <a:ln w="0">
+            <a:noFill/>
+          </a:ln>
+        </p:spPr>
+        <p:txBody>
+          <a:bodyPr anchor="ctr">
+            <a:normAutofit fontScale="92273" lnSpcReduction="20000"/>
+          </a:bodyPr>
+          <a:lstStyle/>
+          <a:p>
+            <a:pPr algn="l">
+              <a:defRPr sz="1650" b="1">
+                <a:solidFill>
+                  <a:srgbClr val="113B36"/>
+                </a:solidFill>
+                <a:latin typeface="Arial"/>
+                <a:ea typeface="Arial"/>
+                <a:cs typeface="Arial"/>
+              </a:defRPr>
+            </a:pPr>
+            <a:r>
+              <a:rPr sz="1650" b="1">
+                <a:solidFill>
+                  <a:srgbClr val="113B36"/>
+                </a:solidFill>
+                <a:latin typeface="Arial"/>
+                <a:ea typeface="Arial"/>
+                <a:cs typeface="Arial"/>
+              </a:rPr>
+              <a:t>杨昌昊 · 软件与数据</a:t>
+            </a:r>
+          </a:p>
+        </p:txBody>
+      </p:sp>
+      <p:sp>
+        <p:nvSpPr>
+          <p:cNvPr id="901" name="矩形 8">
+            <a:extLst>
+              <a:ext uri="{FF2B5EF4-FFF2-40B4-BE49-F238E27FC236}">
+                <a16:creationId xmlns:a16="http://schemas.microsoft.com/office/drawing/2014/main" id="{A76C6453-00DE-4FC7-A106-CC2F47E7101C}"/>
+              </a:ext>
+            </a:extLst>
+          </p:cNvPr>
+          <p:cNvSpPr>
+            <a:spLocks noGrp="1"/>
+          </p:cNvSpPr>
+          <p:nvPr/>
+        </p:nvSpPr>
+        <p:spPr>
+          <a:xfrm>
+            <a:off x="914400" y="3009900"/>
+            <a:ext cx="2743200" cy="1095375"/>
+          </a:xfrm>
+          <a:prstGeom prst="rect">
+            <a:avLst/>
+          </a:prstGeom>
+          <a:noFill/>
+          <a:ln w="0">
+            <a:noFill/>
+          </a:ln>
+        </p:spPr>
+        <p:txBody>
+          <a:bodyPr anchor="t">
+            <a:normAutofit/>
+          </a:bodyPr>
+          <a:lstStyle/>
+          <a:p>
+            <a:pPr algn="l">
+              <a:defRPr sz="1350" b="0">
+                <a:solidFill>
+                  <a:srgbClr val="68746E"/>
+                </a:solidFill>
+                <a:latin typeface="Arial"/>
+                <a:ea typeface="Arial"/>
+                <a:cs typeface="Arial"/>
+              </a:defRPr>
+            </a:pPr>
+            <a:r>
+              <a:rPr sz="1350" b="0">
+                <a:solidFill>
+                  <a:srgbClr val="68746E"/>
+                </a:solidFill>
+                <a:latin typeface="Arial"/>
+                <a:ea typeface="Arial"/>
+                <a:cs typeface="Arial"/>
+              </a:rPr>
+              <a:t>软件程序设计</a:t>
+            </a:r>
+          </a:p>
+          <a:p>
+            <a:pPr algn="l">
+              <a:defRPr sz="1350" b="0">
+                <a:solidFill>
+                  <a:srgbClr val="68746E"/>
+                </a:solidFill>
+                <a:latin typeface="Arial"/>
+                <a:ea typeface="Arial"/>
+                <a:cs typeface="Arial"/>
+              </a:defRPr>
+            </a:pPr>
+            <a:r>
+              <a:rPr sz="1350" b="0">
+                <a:solidFill>
+                  <a:srgbClr val="68746E"/>
+                </a:solidFill>
+                <a:latin typeface="Arial"/>
+                <a:ea typeface="Arial"/>
+                <a:cs typeface="Arial"/>
+              </a:rPr>
+              <a:t>蓝牙命令与分时阈值</a:t>
+            </a:r>
+          </a:p>
+          <a:p>
+            <a:pPr algn="l">
+              <a:defRPr sz="1350" b="0">
+                <a:solidFill>
+                  <a:srgbClr val="68746E"/>
+                </a:solidFill>
+                <a:latin typeface="Arial"/>
+                <a:ea typeface="Arial"/>
+                <a:cs typeface="Arial"/>
+              </a:defRPr>
+            </a:pPr>
+            <a:r>
+              <a:rPr sz="1350" b="0">
+                <a:solidFill>
+                  <a:srgbClr val="68746E"/>
+                </a:solidFill>
+                <a:latin typeface="Arial"/>
+                <a:ea typeface="Arial"/>
+                <a:cs typeface="Arial"/>
+              </a:rPr>
+              <a:t>温湿度数据测量与整理</a:t>
+            </a:r>
+          </a:p>
+        </p:txBody>
+      </p:sp>
+      <p:sp>
+        <p:nvSpPr>
+          <p:cNvPr id="901" name="矩形: 圆角 9">
+            <a:extLst>
+              <a:ext uri="{FF2B5EF4-FFF2-40B4-BE49-F238E27FC236}">
+                <a16:creationId xmlns:a16="http://schemas.microsoft.com/office/drawing/2014/main" id="{853FD2D2-1092-4329-917A-C41EA5A96073}"/>
+              </a:ext>
+            </a:extLst>
+          </p:cNvPr>
+          <p:cNvSpPr>
+            <a:spLocks noGrp="1"/>
+          </p:cNvSpPr>
+          <p:nvPr/>
+        </p:nvSpPr>
+        <p:spPr>
+          <a:xfrm>
+            <a:off x="4514850" y="2476500"/>
+            <a:ext cx="3143250" cy="1762125"/>
+          </a:xfrm>
+          <a:prstGeom prst="roundRect">
+            <a:avLst>
+              <a:gd name="adj" fmla="val 4324"/>
+            </a:avLst>
+          </a:prstGeom>
+          <a:solidFill>
+            <a:srgbClr val="FFFFFF"/>
+          </a:solidFill>
+          <a:ln w="9525">
+            <a:solidFill>
+              <a:srgbClr val="C9D8D0"/>
+            </a:solidFill>
+          </a:ln>
+        </p:spPr>
+        <p:txBody>
+          <a:bodyPr/>
+          <a:lstStyle/>
+          <a:p>
+            <a:endParaRPr lang="zh-CN" altLang="en-US"/>
+          </a:p>
+        </p:txBody>
+      </p:sp>
+      <p:sp>
+        <p:nvSpPr>
+          <p:cNvPr id="901" name="矩形 10">
+            <a:extLst>
+              <a:ext uri="{FF2B5EF4-FFF2-40B4-BE49-F238E27FC236}">
+                <a16:creationId xmlns:a16="http://schemas.microsoft.com/office/drawing/2014/main" id="{EA2D308A-02A8-44B4-81C8-F6349648B157}"/>
+              </a:ext>
+            </a:extLst>
+          </p:cNvPr>
+          <p:cNvSpPr>
+            <a:spLocks noGrp="1"/>
+          </p:cNvSpPr>
+          <p:nvPr/>
+        </p:nvSpPr>
+        <p:spPr>
+          <a:xfrm>
+            <a:off x="4514850" y="2476500"/>
+            <a:ext cx="66675" cy="1762125"/>
+          </a:xfrm>
+          <a:prstGeom prst="rect">
+            <a:avLst/>
+          </a:prstGeom>
+          <a:solidFill>
+            <a:srgbClr val="D9902F"/>
+          </a:solidFill>
+          <a:ln w="0">
+            <a:solidFill>
+              <a:srgbClr val="D9902F"/>
+            </a:solidFill>
+          </a:ln>
+        </p:spPr>
+        <p:txBody>
+          <a:bodyPr/>
+          <a:lstStyle/>
+          <a:p>
+            <a:endParaRPr lang="zh-CN" altLang="en-US"/>
+          </a:p>
+        </p:txBody>
+      </p:sp>
+      <p:sp>
+        <p:nvSpPr>
+          <p:cNvPr id="901" name="矩形 11">
+            <a:extLst>
+              <a:ext uri="{FF2B5EF4-FFF2-40B4-BE49-F238E27FC236}">
+                <a16:creationId xmlns:a16="http://schemas.microsoft.com/office/drawing/2014/main" id="{2CE5150C-99A8-45A7-AAFE-5C35FABF4C6A}"/>
+              </a:ext>
+            </a:extLst>
+          </p:cNvPr>
+          <p:cNvSpPr>
+            <a:spLocks noGrp="1"/>
+          </p:cNvSpPr>
+          <p:nvPr/>
+        </p:nvSpPr>
+        <p:spPr>
+          <a:xfrm>
+            <a:off x="4743450" y="2647950"/>
+            <a:ext cx="2781300" cy="285750"/>
+          </a:xfrm>
+          <a:prstGeom prst="rect">
+            <a:avLst/>
+          </a:prstGeom>
+          <a:noFill/>
+          <a:ln w="0">
+            <a:noFill/>
+          </a:ln>
+        </p:spPr>
+        <p:txBody>
+          <a:bodyPr anchor="ctr">
+            <a:normAutofit fontScale="92273" lnSpcReduction="20000"/>
+          </a:bodyPr>
+          <a:lstStyle/>
+          <a:p>
+            <a:pPr algn="l">
+              <a:defRPr sz="1650" b="1">
+                <a:solidFill>
+                  <a:srgbClr val="113B36"/>
+                </a:solidFill>
+                <a:latin typeface="Arial"/>
+                <a:ea typeface="Arial"/>
+                <a:cs typeface="Arial"/>
+              </a:defRPr>
+            </a:pPr>
+            <a:r>
+              <a:rPr sz="1650" b="1">
+                <a:solidFill>
+                  <a:srgbClr val="113B36"/>
+                </a:solidFill>
+                <a:latin typeface="Arial"/>
+                <a:ea typeface="Arial"/>
+                <a:cs typeface="Arial"/>
+              </a:rPr>
+              <a:t>潘正川 · 硬件与搭建</a:t>
+            </a:r>
+          </a:p>
+        </p:txBody>
+      </p:sp>
+      <p:sp>
+        <p:nvSpPr>
+          <p:cNvPr id="901" name="矩形 12">
+            <a:extLst>
+              <a:ext uri="{FF2B5EF4-FFF2-40B4-BE49-F238E27FC236}">
+                <a16:creationId xmlns:a16="http://schemas.microsoft.com/office/drawing/2014/main" id="{DBA97F59-EACC-436A-B333-435E9A14F238}"/>
+              </a:ext>
+            </a:extLst>
+          </p:cNvPr>
+          <p:cNvSpPr>
+            <a:spLocks noGrp="1"/>
+          </p:cNvSpPr>
+          <p:nvPr/>
+        </p:nvSpPr>
+        <p:spPr>
+          <a:xfrm>
+            <a:off x="4743450" y="3009900"/>
+            <a:ext cx="2743200" cy="1095375"/>
+          </a:xfrm>
+          <a:prstGeom prst="rect">
+            <a:avLst/>
+          </a:prstGeom>
+          <a:noFill/>
+          <a:ln w="0">
+            <a:noFill/>
+          </a:ln>
+        </p:spPr>
+        <p:txBody>
+          <a:bodyPr anchor="t">
+            <a:normAutofit/>
+          </a:bodyPr>
+          <a:lstStyle/>
+          <a:p>
+            <a:pPr algn="l">
+              <a:defRPr sz="1350" b="0">
+                <a:solidFill>
+                  <a:srgbClr val="68746E"/>
+                </a:solidFill>
+                <a:latin typeface="Arial"/>
+                <a:ea typeface="Arial"/>
+                <a:cs typeface="Arial"/>
+              </a:defRPr>
+            </a:pPr>
+            <a:r>
+              <a:rPr sz="1350" b="0">
+                <a:solidFill>
+                  <a:srgbClr val="68746E"/>
+                </a:solidFill>
+                <a:latin typeface="Arial"/>
+                <a:ea typeface="Arial"/>
+                <a:cs typeface="Arial"/>
+              </a:rPr>
+              <a:t>硬件选型</a:t>
+            </a:r>
+          </a:p>
+          <a:p>
+            <a:pPr algn="l">
+              <a:defRPr sz="1350" b="0">
+                <a:solidFill>
+                  <a:srgbClr val="68746E"/>
+                </a:solidFill>
+                <a:latin typeface="Arial"/>
+                <a:ea typeface="Arial"/>
+                <a:cs typeface="Arial"/>
+              </a:defRPr>
+            </a:pPr>
+            <a:r>
+              <a:rPr sz="1350" b="0">
+                <a:solidFill>
+                  <a:srgbClr val="68746E"/>
+                </a:solidFill>
+                <a:latin typeface="Arial"/>
+                <a:ea typeface="Arial"/>
+                <a:cs typeface="Arial"/>
+              </a:rPr>
+              <a:t>接线、驱动与系统搭建</a:t>
+            </a:r>
+          </a:p>
+          <a:p>
+            <a:pPr algn="l">
+              <a:defRPr sz="1350" b="0">
+                <a:solidFill>
+                  <a:srgbClr val="68746E"/>
+                </a:solidFill>
+                <a:latin typeface="Arial"/>
+                <a:ea typeface="Arial"/>
+                <a:cs typeface="Arial"/>
+              </a:defRPr>
+            </a:pPr>
+            <a:r>
+              <a:rPr sz="1350" b="0">
+                <a:solidFill>
+                  <a:srgbClr val="68746E"/>
+                </a:solidFill>
+                <a:latin typeface="Arial"/>
+                <a:ea typeface="Arial"/>
+                <a:cs typeface="Arial"/>
+              </a:rPr>
+              <a:t>硬件功能测试</a:t>
+            </a:r>
+          </a:p>
+        </p:txBody>
+      </p:sp>
+      <p:sp>
+        <p:nvSpPr>
+          <p:cNvPr id="901" name="矩形: 圆角 13">
+            <a:extLst>
+              <a:ext uri="{FF2B5EF4-FFF2-40B4-BE49-F238E27FC236}">
+                <a16:creationId xmlns:a16="http://schemas.microsoft.com/office/drawing/2014/main" id="{5447E7B6-22C8-46A7-A3B1-39ABAEC4939E}"/>
+              </a:ext>
+            </a:extLst>
+          </p:cNvPr>
+          <p:cNvSpPr>
+            <a:spLocks noGrp="1"/>
+          </p:cNvSpPr>
+          <p:nvPr/>
+        </p:nvSpPr>
+        <p:spPr>
+          <a:xfrm>
+            <a:off x="8343900" y="2476500"/>
+            <a:ext cx="3143250" cy="1762125"/>
+          </a:xfrm>
+          <a:prstGeom prst="roundRect">
+            <a:avLst>
+              <a:gd name="adj" fmla="val 4324"/>
+            </a:avLst>
+          </a:prstGeom>
+          <a:solidFill>
+            <a:srgbClr val="FFFFFF"/>
+          </a:solidFill>
+          <a:ln w="9525">
+            <a:solidFill>
+              <a:srgbClr val="C9D8D0"/>
+            </a:solidFill>
+          </a:ln>
+        </p:spPr>
+        <p:txBody>
+          <a:bodyPr/>
+          <a:lstStyle/>
+          <a:p>
+            <a:endParaRPr lang="zh-CN" altLang="en-US"/>
+          </a:p>
+        </p:txBody>
+      </p:sp>
+      <p:sp>
+        <p:nvSpPr>
+          <p:cNvPr id="901" name="矩形 14">
+            <a:extLst>
+              <a:ext uri="{FF2B5EF4-FFF2-40B4-BE49-F238E27FC236}">
+                <a16:creationId xmlns:a16="http://schemas.microsoft.com/office/drawing/2014/main" id="{79C22101-0C4F-4F04-A7F1-5D71506DCD17}"/>
+              </a:ext>
+            </a:extLst>
+          </p:cNvPr>
+          <p:cNvSpPr>
+            <a:spLocks noGrp="1"/>
+          </p:cNvSpPr>
+          <p:nvPr/>
+        </p:nvSpPr>
+        <p:spPr>
+          <a:xfrm>
+            <a:off x="8343900" y="2476500"/>
+            <a:ext cx="66675" cy="1762125"/>
+          </a:xfrm>
+          <a:prstGeom prst="rect">
+            <a:avLst/>
+          </a:prstGeom>
+          <a:solidFill>
+            <a:srgbClr val="113B36"/>
+          </a:solidFill>
+          <a:ln w="0">
+            <a:solidFill>
+              <a:srgbClr val="113B36"/>
+            </a:solidFill>
+          </a:ln>
+        </p:spPr>
+        <p:txBody>
+          <a:bodyPr/>
+          <a:lstStyle/>
+          <a:p>
+            <a:endParaRPr lang="zh-CN" altLang="en-US"/>
+          </a:p>
+        </p:txBody>
+      </p:sp>
+      <p:sp>
+        <p:nvSpPr>
+          <p:cNvPr id="901" name="矩形 15">
+            <a:extLst>
+              <a:ext uri="{FF2B5EF4-FFF2-40B4-BE49-F238E27FC236}">
+                <a16:creationId xmlns:a16="http://schemas.microsoft.com/office/drawing/2014/main" id="{AB83FF93-FDAD-47EE-8DB7-7932BB192163}"/>
+              </a:ext>
+            </a:extLst>
+          </p:cNvPr>
+          <p:cNvSpPr>
+            <a:spLocks noGrp="1"/>
+          </p:cNvSpPr>
+          <p:nvPr/>
+        </p:nvSpPr>
+        <p:spPr>
+          <a:xfrm>
+            <a:off x="8572500" y="2647950"/>
+            <a:ext cx="2781300" cy="285750"/>
+          </a:xfrm>
+          <a:prstGeom prst="rect">
+            <a:avLst/>
+          </a:prstGeom>
+          <a:noFill/>
+          <a:ln w="0">
+            <a:noFill/>
+          </a:ln>
+        </p:spPr>
+        <p:txBody>
+          <a:bodyPr anchor="ctr">
+            <a:normAutofit fontScale="92273" lnSpcReduction="20000"/>
+          </a:bodyPr>
+          <a:lstStyle/>
+          <a:p>
+            <a:pPr algn="l">
+              <a:defRPr sz="1650" b="1">
+                <a:solidFill>
+                  <a:srgbClr val="113B36"/>
+                </a:solidFill>
+                <a:latin typeface="Arial"/>
+                <a:ea typeface="Arial"/>
+                <a:cs typeface="Arial"/>
+              </a:defRPr>
+            </a:pPr>
+            <a:r>
+              <a:rPr sz="1650" b="1">
+                <a:solidFill>
+                  <a:srgbClr val="113B36"/>
+                </a:solidFill>
+                <a:latin typeface="Arial"/>
+                <a:ea typeface="Arial"/>
+                <a:cs typeface="Arial"/>
+              </a:rPr>
+              <a:t>共同完成 · 各 50%</a:t>
+            </a:r>
+          </a:p>
+        </p:txBody>
+      </p:sp>
+      <p:sp>
+        <p:nvSpPr>
+          <p:cNvPr id="901" name="矩形 16">
+            <a:extLst>
+              <a:ext uri="{FF2B5EF4-FFF2-40B4-BE49-F238E27FC236}">
+                <a16:creationId xmlns:a16="http://schemas.microsoft.com/office/drawing/2014/main" id="{C9B74A9C-2C7E-4C85-AEB9-46DCE49B2455}"/>
+              </a:ext>
+            </a:extLst>
+          </p:cNvPr>
+          <p:cNvSpPr>
+            <a:spLocks noGrp="1"/>
+          </p:cNvSpPr>
+          <p:nvPr/>
+        </p:nvSpPr>
+        <p:spPr>
+          <a:xfrm>
+            <a:off x="8572500" y="3009900"/>
+            <a:ext cx="2743200" cy="1095375"/>
+          </a:xfrm>
+          <a:prstGeom prst="rect">
+            <a:avLst/>
+          </a:prstGeom>
+          <a:noFill/>
+          <a:ln w="0">
+            <a:noFill/>
+          </a:ln>
+        </p:spPr>
+        <p:txBody>
+          <a:bodyPr anchor="t">
+            <a:normAutofit/>
+          </a:bodyPr>
+          <a:lstStyle/>
+          <a:p>
+            <a:pPr algn="l">
+              <a:defRPr sz="1350" b="0">
+                <a:solidFill>
+                  <a:srgbClr val="68746E"/>
+                </a:solidFill>
+                <a:latin typeface="Arial"/>
+                <a:ea typeface="Arial"/>
+                <a:cs typeface="Arial"/>
+              </a:defRPr>
+            </a:pPr>
+            <a:r>
+              <a:rPr sz="1350" b="0">
+                <a:solidFill>
+                  <a:srgbClr val="68746E"/>
+                </a:solidFill>
+                <a:latin typeface="Arial"/>
+                <a:ea typeface="Arial"/>
+                <a:cs typeface="Arial"/>
+              </a:rPr>
+              <a:t>系统方案与资料查找</a:t>
+            </a:r>
+          </a:p>
+          <a:p>
+            <a:pPr algn="l">
+              <a:defRPr sz="1350" b="0">
+                <a:solidFill>
+                  <a:srgbClr val="68746E"/>
+                </a:solidFill>
+                <a:latin typeface="Arial"/>
+                <a:ea typeface="Arial"/>
+                <a:cs typeface="Arial"/>
+              </a:defRPr>
+            </a:pPr>
+            <a:r>
+              <a:rPr sz="1350" b="0">
+                <a:solidFill>
+                  <a:srgbClr val="68746E"/>
+                </a:solidFill>
+                <a:latin typeface="Arial"/>
+                <a:ea typeface="Arial"/>
+                <a:cs typeface="Arial"/>
+              </a:rPr>
+              <a:t>实验记录复核与 PPT 整理</a:t>
+            </a:r>
+          </a:p>
+          <a:p>
+            <a:pPr algn="l">
+              <a:defRPr sz="1350" b="0">
+                <a:solidFill>
+                  <a:srgbClr val="68746E"/>
+                </a:solidFill>
+                <a:latin typeface="Arial"/>
+                <a:ea typeface="Arial"/>
+                <a:cs typeface="Arial"/>
+              </a:defRPr>
+            </a:pPr>
+            <a:r>
+              <a:rPr sz="1350" b="0">
+                <a:solidFill>
+                  <a:srgbClr val="68746E"/>
+                </a:solidFill>
+                <a:latin typeface="Arial"/>
+                <a:ea typeface="Arial"/>
+                <a:cs typeface="Arial"/>
+              </a:rPr>
+              <a:t>答辩准备与现场联调</a:t>
+            </a:r>
+          </a:p>
+        </p:txBody>
+      </p:sp>
+    </p:spTree>
+  </p:cSld>
+  <p:clrMapOvr>
+    <a:masterClrMapping/>
+  </p:clrMapOvr>
+</p:sld>
+</file>
+
+<file path=ppt/slides/slide5.xml><?xml version="1.0" encoding="utf-8"?>
 <p:sld xmlns:a="http://schemas.openxmlformats.org/drawingml/2006/main" xmlns:r="http://schemas.openxmlformats.org/officeDocument/2006/relationships" xmlns:p="http://schemas.openxmlformats.org/presentationml/2006/main">
   <p:cSld>
     <p:bg>
@@ -9877,7 +11346,7 @@
                 <a:ea typeface="Arial"/>
                 <a:cs typeface="Arial"/>
               </a:rPr>
-              <a:t>04</a:t>
+              <a:t>05</a:t>
             </a:r>
             <a:endParaRPr sz="1600" b="1">
               <a:solidFill>
@@ -9982,7 +11451,7 @@
 </p:sld>
 </file>
 
-<file path=ppt/slides/slide5.xml><?xml version="1.0" encoding="utf-8"?>
+<file path=ppt/slides/slide6.xml><?xml version="1.0" encoding="utf-8"?>
 <p:sld xmlns:a="http://schemas.openxmlformats.org/drawingml/2006/main" xmlns:r="http://schemas.openxmlformats.org/officeDocument/2006/relationships" xmlns:p="http://schemas.openxmlformats.org/presentationml/2006/main">
   <p:cSld>
     <p:bg>
@@ -10153,7 +11622,7 @@
                 <a:ea typeface="Arial"/>
                 <a:cs typeface="Arial"/>
               </a:rPr>
-              <a:t>05</a:t>
+              <a:t>06</a:t>
             </a:r>
             <a:endParaRPr sz="1600" b="1">
               <a:solidFill>
@@ -11052,7 +12521,7 @@
 </p:sld>
 </file>
 
-<file path=ppt/slides/slide6.xml><?xml version="1.0" encoding="utf-8"?>
+<file path=ppt/slides/slide7.xml><?xml version="1.0" encoding="utf-8"?>
 <p:sld xmlns:a="http://schemas.openxmlformats.org/drawingml/2006/main" xmlns:r="http://schemas.openxmlformats.org/officeDocument/2006/relationships" xmlns:p="http://schemas.openxmlformats.org/presentationml/2006/main">
   <p:cSld>
     <p:bg>
@@ -11223,7 +12692,7 @@
                 <a:ea typeface="Arial"/>
                 <a:cs typeface="Arial"/>
               </a:rPr>
-              <a:t>06</a:t>
+              <a:t>07</a:t>
             </a:r>
             <a:endParaRPr sz="1600" b="1">
               <a:solidFill>
@@ -11535,7 +13004,7 @@
 </p:sld>
 </file>
 
-<file path=ppt/slides/slide7.xml><?xml version="1.0" encoding="utf-8"?>
+<file path=ppt/slides/slide8.xml><?xml version="1.0" encoding="utf-8"?>
 <p:sld xmlns:a="http://schemas.openxmlformats.org/drawingml/2006/main" xmlns:r="http://schemas.openxmlformats.org/officeDocument/2006/relationships" xmlns:p="http://schemas.openxmlformats.org/presentationml/2006/main">
   <p:cSld>
     <p:bg>
@@ -11706,7 +13175,7 @@
                 <a:ea typeface="Arial"/>
                 <a:cs typeface="Arial"/>
               </a:rPr>
-              <a:t>07</a:t>
+              <a:t>08</a:t>
             </a:r>
             <a:endParaRPr sz="1600" b="1">
               <a:solidFill>
@@ -12580,7 +14049,7 @@
 </p:sld>
 </file>
 
-<file path=ppt/slides/slide8.xml><?xml version="1.0" encoding="utf-8"?>
+<file path=ppt/slides/slide9.xml><?xml version="1.0" encoding="utf-8"?>
 <p:sld xmlns:a="http://schemas.openxmlformats.org/drawingml/2006/main" xmlns:r="http://schemas.openxmlformats.org/officeDocument/2006/relationships" xmlns:p="http://schemas.openxmlformats.org/presentationml/2006/main">
   <p:cSld>
     <p:bg>
@@ -12751,7 +14220,7 @@
                 <a:ea typeface="Arial"/>
                 <a:cs typeface="Arial"/>
               </a:rPr>
-              <a:t>08</a:t>
+              <a:t>09</a:t>
             </a:r>
             <a:endParaRPr sz="1600" b="1">
               <a:solidFill>
@@ -13206,955 +14675,6 @@
     <p:extLst>
       <p:ext uri="{BB962C8B-B14F-4D97-AF65-F5344CB8AC3E}">
         <p14:creationId xmlns:p14="http://schemas.microsoft.com/office/powerpoint/2010/main" val="2120459216"/>
-      </p:ext>
-    </p:extLst>
-  </p:cSld>
-  <p:clrMapOvr>
-    <a:masterClrMapping/>
-  </p:clrMapOvr>
-</p:sld>
-</file>
-
-<file path=ppt/slides/slide9.xml><?xml version="1.0" encoding="utf-8"?>
-<p:sld xmlns:a="http://schemas.openxmlformats.org/drawingml/2006/main" xmlns:r="http://schemas.openxmlformats.org/officeDocument/2006/relationships" xmlns:p="http://schemas.openxmlformats.org/presentationml/2006/main">
-  <p:cSld>
-    <p:bg>
-      <p:bgPr>
-        <a:solidFill>
-          <a:srgbClr val="FFFFFF"/>
-        </a:solidFill>
-        <a:effectLst/>
-      </p:bgPr>
-    </p:bg>
-    <p:spTree>
-      <p:nvGrpSpPr>
-        <p:cNvPr id="1" name=""/>
-        <p:cNvGrpSpPr/>
-        <p:nvPr/>
-      </p:nvGrpSpPr>
-      <p:grpSpPr>
-        <a:xfrm>
-          <a:off x="0" y="0"/>
-          <a:ext cx="0" cy="0"/>
-          <a:chOff x="0" y="0"/>
-          <a:chExt cx="0" cy="0"/>
-        </a:xfrm>
-      </p:grpSpPr>
-      <p:sp>
-        <p:nvSpPr>
-          <p:cNvPr id="10" name="矩形 9">
-            <a:extLst>
-              <a:ext uri="{FF2B5EF4-FFF2-40B4-BE49-F238E27FC236}">
-                <a16:creationId xmlns:a16="http://schemas.microsoft.com/office/drawing/2014/main" id="{B2C06F17-B563-4DED-BB97-AB8AB49AFF0D}"/>
-              </a:ext>
-            </a:extLst>
-          </p:cNvPr>
-          <p:cNvSpPr>
-            <a:spLocks noGrp="1"/>
-          </p:cNvSpPr>
-          <p:nvPr/>
-        </p:nvSpPr>
-        <p:spPr>
-          <a:xfrm>
-            <a:off x="685800" y="400050"/>
-            <a:ext cx="9048750" cy="514350"/>
-          </a:xfrm>
-          <a:prstGeom prst="rect">
-            <a:avLst/>
-          </a:prstGeom>
-          <a:noFill/>
-          <a:ln w="0">
-            <a:noFill/>
-          </a:ln>
-        </p:spPr>
-        <p:txBody>
-          <a:bodyPr anchor="ctr">
-            <a:normAutofit/>
-          </a:bodyPr>
-          <a:lstStyle/>
-          <a:p>
-            <a:pPr algn="l">
-              <a:defRPr sz="2550" b="1">
-                <a:solidFill>
-                  <a:srgbClr val="113B36"/>
-                </a:solidFill>
-                <a:latin typeface="Arial"/>
-                <a:ea typeface="Arial"/>
-                <a:cs typeface="Arial"/>
-              </a:defRPr>
-            </a:pPr>
-            <a:r>
-              <a:rPr sz="2550" b="1">
-                <a:solidFill>
-                  <a:srgbClr val="113B36"/>
-                </a:solidFill>
-                <a:latin typeface="Arial"/>
-                <a:ea typeface="Arial"/>
-                <a:cs typeface="Arial"/>
-              </a:rPr>
-              <a:t>教室布点与数据记录</a:t>
-            </a:r>
-          </a:p>
-        </p:txBody>
-      </p:sp>
-      <p:sp>
-        <p:nvSpPr>
-          <p:cNvPr id="2" name="直接连接符 1">
-            <a:extLst>
-              <a:ext uri="{FF2B5EF4-FFF2-40B4-BE49-F238E27FC236}">
-                <a16:creationId xmlns:a16="http://schemas.microsoft.com/office/drawing/2014/main" id="{759348C0-0134-4D76-AB28-2CC2F11ECFD6}"/>
-              </a:ext>
-            </a:extLst>
-          </p:cNvPr>
-          <p:cNvSpPr>
-            <a:spLocks noGrp="1"/>
-          </p:cNvSpPr>
-          <p:nvPr/>
-        </p:nvSpPr>
-        <p:spPr>
-          <a:xfrm>
-            <a:off x="685800" y="1028700"/>
-            <a:ext cx="10820400" cy="0"/>
-          </a:xfrm>
-          <a:prstGeom prst="line">
-            <a:avLst/>
-          </a:prstGeom>
-          <a:noFill/>
-          <a:ln w="9525">
-            <a:solidFill>
-              <a:srgbClr val="C9D8D0"/>
-            </a:solidFill>
-          </a:ln>
-        </p:spPr>
-        <p:txBody>
-          <a:bodyPr/>
-          <a:lstStyle/>
-          <a:p>
-            <a:endParaRPr lang="zh-CN" altLang="en-US"/>
-          </a:p>
-        </p:txBody>
-      </p:sp>
-      <p:sp>
-        <p:nvSpPr>
-          <p:cNvPr id="3" name="矩形 2">
-            <a:extLst>
-              <a:ext uri="{FF2B5EF4-FFF2-40B4-BE49-F238E27FC236}">
-                <a16:creationId xmlns:a16="http://schemas.microsoft.com/office/drawing/2014/main" id="{060562C0-A275-4950-A8D0-3E46EA89AC94}"/>
-              </a:ext>
-            </a:extLst>
-          </p:cNvPr>
-          <p:cNvSpPr>
-            <a:spLocks noGrp="1"/>
-          </p:cNvSpPr>
-          <p:nvPr/>
-        </p:nvSpPr>
-        <p:spPr>
-          <a:xfrm>
-            <a:off x="10906125" y="409575"/>
-            <a:ext cx="571500" cy="342900"/>
-          </a:xfrm>
-          <a:prstGeom prst="rect">
-            <a:avLst/>
-          </a:prstGeom>
-          <a:noFill/>
-          <a:ln w="0">
-            <a:noFill/>
-          </a:ln>
-        </p:spPr>
-        <p:txBody>
-          <a:bodyPr anchor="ctr">
-            <a:normAutofit/>
-          </a:bodyPr>
-          <a:lstStyle/>
-          <a:p>
-            <a:pPr algn="r">
-              <a:defRPr sz="1200" b="1">
-                <a:solidFill>
-                  <a:srgbClr val="2F7A63"/>
-                </a:solidFill>
-                <a:latin typeface="Arial"/>
-                <a:ea typeface="Arial"/>
-                <a:cs typeface="Arial"/>
-              </a:defRPr>
-            </a:pPr>
-            <a:r>
-              <a:rPr lang="en-US" altLang="zh-CN" sz="1600" b="1">
-                <a:solidFill>
-                  <a:srgbClr val="2F7A63"/>
-                </a:solidFill>
-                <a:latin typeface="Arial"/>
-                <a:ea typeface="Arial"/>
-                <a:cs typeface="Arial"/>
-              </a:rPr>
-              <a:t>09</a:t>
-            </a:r>
-            <a:endParaRPr sz="1600" b="1">
-              <a:solidFill>
-                <a:srgbClr val="2F7A63"/>
-              </a:solidFill>
-              <a:latin typeface="Arial"/>
-              <a:ea typeface="Arial"/>
-              <a:cs typeface="Arial"/>
-            </a:endParaRPr>
-          </a:p>
-        </p:txBody>
-      </p:sp>
-      <p:sp>
-        <p:nvSpPr>
-          <p:cNvPr id="4" name="矩形 3">
-            <a:extLst>
-              <a:ext uri="{FF2B5EF4-FFF2-40B4-BE49-F238E27FC236}">
-                <a16:creationId xmlns:a16="http://schemas.microsoft.com/office/drawing/2014/main" id="{331E90BD-0A4D-418F-8CD1-69C1D4112FB8}"/>
-              </a:ext>
-            </a:extLst>
-          </p:cNvPr>
-          <p:cNvSpPr>
-            <a:spLocks noGrp="1"/>
-          </p:cNvSpPr>
-          <p:nvPr/>
-        </p:nvSpPr>
-        <p:spPr>
-          <a:xfrm>
-            <a:off x="685800" y="1333500"/>
-            <a:ext cx="9334500" cy="361950"/>
-          </a:xfrm>
-          <a:prstGeom prst="rect">
-            <a:avLst/>
-          </a:prstGeom>
-          <a:noFill/>
-          <a:ln w="0">
-            <a:noFill/>
-          </a:ln>
-        </p:spPr>
-        <p:txBody>
-          <a:bodyPr anchor="ctr">
-            <a:normAutofit fontScale="94667" lnSpcReduction="10000"/>
-          </a:bodyPr>
-          <a:lstStyle/>
-          <a:p>
-            <a:pPr algn="l">
-              <a:defRPr sz="1875" b="1">
-                <a:solidFill>
-                  <a:srgbClr val="2F7A63"/>
-                </a:solidFill>
-                <a:latin typeface="Arial"/>
-                <a:ea typeface="Arial"/>
-                <a:cs typeface="Arial"/>
-              </a:defRPr>
-            </a:pPr>
-            <a:r>
-              <a:rPr sz="1875" b="1">
-                <a:solidFill>
-                  <a:srgbClr val="2F7A63"/>
-                </a:solidFill>
-                <a:latin typeface="Arial"/>
-                <a:ea typeface="Arial"/>
-                <a:cs typeface="Arial"/>
-              </a:rPr>
-              <a:t>测试空间：长 9.6 m，宽 6.6 m，高 3.4 m</a:t>
-            </a:r>
-          </a:p>
-        </p:txBody>
-      </p:sp>
-      <p:graphicFrame>
-        <p:nvGraphicFramePr>
-          <p:cNvPr id="14" name="表格 13"/>
-          <p:cNvGraphicFramePr/>
-          <p:nvPr>
-            <p:extLst>
-              <p:ext uri="{D42A27DB-BD31-4B8C-83A1-F6EECF244321}">
-                <p14:modId xmlns:p14="http://schemas.microsoft.com/office/powerpoint/2010/main" val="2472991045"/>
-              </p:ext>
-            </p:extLst>
-          </p:nvPr>
-        </p:nvGraphicFramePr>
-        <p:xfrm>
-          <a:off x="685800" y="2095500"/>
-          <a:ext cx="10763252" cy="2476500"/>
-        </p:xfrm>
-        <a:graphic>
-          <a:graphicData uri="http://schemas.openxmlformats.org/drawingml/2006/table">
-            <a:tbl>
-              <a:tblPr firstRow="1" bandRow="1"/>
-              <a:tblGrid>
-                <a:gridCol w="2690813">
-                  <a:extLst>
-                    <a:ext uri="{9D8B030D-6E8A-4147-A177-3AD203B41FA5}">
-                      <a16:colId xmlns:a16="http://schemas.microsoft.com/office/drawing/2014/main" val="20000"/>
-                    </a:ext>
-                  </a:extLst>
-                </a:gridCol>
-                <a:gridCol w="2690813">
-                  <a:extLst>
-                    <a:ext uri="{9D8B030D-6E8A-4147-A177-3AD203B41FA5}">
-                      <a16:colId xmlns:a16="http://schemas.microsoft.com/office/drawing/2014/main" val="20001"/>
-                    </a:ext>
-                  </a:extLst>
-                </a:gridCol>
-                <a:gridCol w="2690813">
-                  <a:extLst>
-                    <a:ext uri="{9D8B030D-6E8A-4147-A177-3AD203B41FA5}">
-                      <a16:colId xmlns:a16="http://schemas.microsoft.com/office/drawing/2014/main" val="20002"/>
-                    </a:ext>
-                  </a:extLst>
-                </a:gridCol>
-                <a:gridCol w="2690813">
-                  <a:extLst>
-                    <a:ext uri="{9D8B030D-6E8A-4147-A177-3AD203B41FA5}">
-                      <a16:colId xmlns:a16="http://schemas.microsoft.com/office/drawing/2014/main" val="20003"/>
-                    </a:ext>
-                  </a:extLst>
-                </a:gridCol>
-              </a:tblGrid>
-              <a:tr h="711200">
-                <a:tc>
-                  <a:txBody>
-                    <a:bodyPr/>
-                    <a:lstStyle/>
-                    <a:p>
-                      <a:r>
-                        <a:rPr sz="1275" b="1">
-                          <a:solidFill>
-                            <a:srgbClr val="FFFFFF"/>
-                          </a:solidFill>
-                          <a:latin typeface="Arial"/>
-                          <a:ea typeface="Arial"/>
-                          <a:cs typeface="Arial"/>
-                        </a:rPr>
-                        <a:t>实验</a:t>
-                      </a:r>
-                    </a:p>
-                  </a:txBody>
-                  <a:tcPr>
-                    <a:solidFill>
-                      <a:srgbClr val="113B36"/>
-                    </a:solidFill>
-                  </a:tcPr>
-                </a:tc>
-                <a:tc>
-                  <a:txBody>
-                    <a:bodyPr/>
-                    <a:lstStyle/>
-                    <a:p>
-                      <a:r>
-                        <a:rPr sz="1275" b="1">
-                          <a:solidFill>
-                            <a:srgbClr val="FFFFFF"/>
-                          </a:solidFill>
-                          <a:latin typeface="Arial"/>
-                          <a:ea typeface="Arial"/>
-                          <a:cs typeface="Arial"/>
-                        </a:rPr>
-                        <a:t>样本量</a:t>
-                      </a:r>
-                    </a:p>
-                  </a:txBody>
-                  <a:tcPr>
-                    <a:solidFill>
-                      <a:srgbClr val="113B36"/>
-                    </a:solidFill>
-                  </a:tcPr>
-                </a:tc>
-                <a:tc>
-                  <a:txBody>
-                    <a:bodyPr/>
-                    <a:lstStyle/>
-                    <a:p>
-                      <a:r>
-                        <a:rPr sz="1275" b="1">
-                          <a:solidFill>
-                            <a:srgbClr val="FFFFFF"/>
-                          </a:solidFill>
-                          <a:latin typeface="Arial"/>
-                          <a:ea typeface="Arial"/>
-                          <a:cs typeface="Arial"/>
-                        </a:rPr>
-                        <a:t>记录内容</a:t>
-                      </a:r>
-                    </a:p>
-                  </a:txBody>
-                  <a:tcPr>
-                    <a:solidFill>
-                      <a:srgbClr val="113B36"/>
-                    </a:solidFill>
-                  </a:tcPr>
-                </a:tc>
-                <a:tc>
-                  <a:txBody>
-                    <a:bodyPr/>
-                    <a:lstStyle/>
-                    <a:p>
-                      <a:r>
-                        <a:rPr sz="1275" b="1">
-                          <a:solidFill>
-                            <a:srgbClr val="FFFFFF"/>
-                          </a:solidFill>
-                          <a:latin typeface="Arial"/>
-                          <a:ea typeface="Arial"/>
-                          <a:cs typeface="Arial"/>
-                        </a:rPr>
-                        <a:t>结果</a:t>
-                      </a:r>
-                    </a:p>
-                  </a:txBody>
-                  <a:tcPr>
-                    <a:solidFill>
-                      <a:srgbClr val="113B36"/>
-                    </a:solidFill>
-                  </a:tcPr>
-                </a:tc>
-                <a:extLst>
-                  <a:ext uri="{0D108BD9-81ED-4DB2-BD59-A6C34878D82A}">
-                    <a16:rowId xmlns:a16="http://schemas.microsoft.com/office/drawing/2014/main" val="10000"/>
-                  </a:ext>
-                </a:extLst>
-              </a:tr>
-              <a:tr h="711200">
-                <a:tc>
-                  <a:txBody>
-                    <a:bodyPr/>
-                    <a:lstStyle/>
-                    <a:p>
-                      <a:r>
-                        <a:rPr sz="1200">
-                          <a:solidFill>
-                            <a:srgbClr val="16261F"/>
-                          </a:solidFill>
-                          <a:latin typeface="Arial"/>
-                          <a:ea typeface="Arial"/>
-                          <a:cs typeface="Arial"/>
-                        </a:rPr>
-                        <a:t>准确性对比</a:t>
-                      </a:r>
-                    </a:p>
-                  </a:txBody>
-                  <a:tcPr/>
-                </a:tc>
-                <a:tc>
-                  <a:txBody>
-                    <a:bodyPr/>
-                    <a:lstStyle/>
-                    <a:p>
-                      <a:r>
-                        <a:rPr sz="1200">
-                          <a:solidFill>
-                            <a:srgbClr val="16261F"/>
-                          </a:solidFill>
-                          <a:latin typeface="Arial"/>
-                          <a:ea typeface="Arial"/>
-                          <a:cs typeface="Arial"/>
-                        </a:rPr>
-                        <a:t>30 组</a:t>
-                      </a:r>
-                    </a:p>
-                  </a:txBody>
-                  <a:tcPr/>
-                </a:tc>
-                <a:tc>
-                  <a:txBody>
-                    <a:bodyPr/>
-                    <a:lstStyle/>
-                    <a:p>
-                      <a:r>
-                        <a:rPr sz="1200">
-                          <a:solidFill>
-                            <a:srgbClr val="16261F"/>
-                          </a:solidFill>
-                          <a:latin typeface="Arial"/>
-                          <a:ea typeface="Arial"/>
-                          <a:cs typeface="Arial"/>
-                        </a:rPr>
-                        <a:t>DHT22 与 SHT40 同位置对比，三种工况各 10 组</a:t>
-                      </a:r>
-                    </a:p>
-                  </a:txBody>
-                  <a:tcPr/>
-                </a:tc>
-                <a:tc>
-                  <a:txBody>
-                    <a:bodyPr/>
-                    <a:lstStyle/>
-                    <a:p>
-                      <a:r>
-                        <a:rPr sz="1200">
-                          <a:solidFill>
-                            <a:srgbClr val="16261F"/>
-                          </a:solidFill>
-                          <a:latin typeface="Arial"/>
-                          <a:ea typeface="Arial"/>
-                          <a:cs typeface="Arial"/>
-                        </a:rPr>
-                        <a:t>完成统计</a:t>
-                      </a:r>
-                    </a:p>
-                  </a:txBody>
-                  <a:tcPr/>
-                </a:tc>
-                <a:extLst>
-                  <a:ext uri="{0D108BD9-81ED-4DB2-BD59-A6C34878D82A}">
-                    <a16:rowId xmlns:a16="http://schemas.microsoft.com/office/drawing/2014/main" val="10001"/>
-                  </a:ext>
-                </a:extLst>
-              </a:tr>
-              <a:tr h="711200">
-                <a:tc>
-                  <a:txBody>
-                    <a:bodyPr/>
-                    <a:lstStyle/>
-                    <a:p>
-                      <a:r>
-                        <a:rPr sz="1200">
-                          <a:solidFill>
-                            <a:srgbClr val="16261F"/>
-                          </a:solidFill>
-                          <a:latin typeface="Arial"/>
-                          <a:ea typeface="Arial"/>
-                          <a:cs typeface="Arial"/>
-                        </a:rPr>
-                        <a:t>三点布点</a:t>
-                      </a:r>
-                    </a:p>
-                  </a:txBody>
-                  <a:tcPr/>
-                </a:tc>
-                <a:tc>
-                  <a:txBody>
-                    <a:bodyPr/>
-                    <a:lstStyle/>
-                    <a:p>
-                      <a:r>
-                        <a:rPr sz="1200">
-                          <a:solidFill>
-                            <a:srgbClr val="16261F"/>
-                          </a:solidFill>
-                          <a:latin typeface="Arial"/>
-                          <a:ea typeface="Arial"/>
-                          <a:cs typeface="Arial"/>
-                        </a:rPr>
-                        <a:t>15 组</a:t>
-                      </a:r>
-                    </a:p>
-                  </a:txBody>
-                  <a:tcPr/>
-                </a:tc>
-                <a:tc>
-                  <a:txBody>
-                    <a:bodyPr/>
-                    <a:lstStyle/>
-                    <a:p>
-                      <a:r>
-                        <a:rPr sz="1200">
-                          <a:solidFill>
-                            <a:srgbClr val="16261F"/>
-                          </a:solidFill>
-                          <a:latin typeface="Arial"/>
-                          <a:ea typeface="Arial"/>
-                          <a:cs typeface="Arial"/>
-                        </a:rPr>
-                        <a:t>门口、中间、末尾各 5 条温湿度记录</a:t>
-                      </a:r>
-                    </a:p>
-                  </a:txBody>
-                  <a:tcPr/>
-                </a:tc>
-                <a:tc>
-                  <a:txBody>
-                    <a:bodyPr/>
-                    <a:lstStyle/>
-                    <a:p>
-                      <a:r>
-                        <a:rPr sz="1200">
-                          <a:solidFill>
-                            <a:srgbClr val="16261F"/>
-                          </a:solidFill>
-                          <a:latin typeface="Arial"/>
-                          <a:ea typeface="Arial"/>
-                          <a:cs typeface="Arial"/>
-                        </a:rPr>
-                        <a:t>完成统计</a:t>
-                      </a:r>
-                    </a:p>
-                  </a:txBody>
-                  <a:tcPr/>
-                </a:tc>
-                <a:extLst>
-                  <a:ext uri="{0D108BD9-81ED-4DB2-BD59-A6C34878D82A}">
-                    <a16:rowId xmlns:a16="http://schemas.microsoft.com/office/drawing/2014/main" val="10002"/>
-                  </a:ext>
-                </a:extLst>
-              </a:tr>
-              <a:tr h="711200">
-                <a:tc>
-                  <a:txBody>
-                    <a:bodyPr/>
-                    <a:lstStyle/>
-                    <a:p>
-                      <a:r>
-                        <a:rPr sz="1200">
-                          <a:solidFill>
-                            <a:srgbClr val="16261F"/>
-                          </a:solidFill>
-                          <a:latin typeface="Arial"/>
-                          <a:ea typeface="Arial"/>
-                          <a:cs typeface="Arial"/>
-                        </a:rPr>
-                        <a:t>功能验证</a:t>
-                      </a:r>
-                    </a:p>
-                  </a:txBody>
-                  <a:tcPr/>
-                </a:tc>
-                <a:tc>
-                  <a:txBody>
-                    <a:bodyPr/>
-                    <a:lstStyle/>
-                    <a:p>
-                      <a:r>
-                        <a:rPr sz="1200">
-                          <a:solidFill>
-                            <a:srgbClr val="16261F"/>
-                          </a:solidFill>
-                          <a:latin typeface="Arial"/>
-                          <a:ea typeface="Arial"/>
-                          <a:cs typeface="Arial"/>
-                        </a:rPr>
-                        <a:t>7 项</a:t>
-                      </a:r>
-                    </a:p>
-                  </a:txBody>
-                  <a:tcPr/>
-                </a:tc>
-                <a:tc>
-                  <a:txBody>
-                    <a:bodyPr/>
-                    <a:lstStyle/>
-                    <a:p>
-                      <a:r>
-                        <a:rPr lang="zh-CN" altLang="en-US" sz="1200">
-                          <a:solidFill>
-                            <a:srgbClr val="16261F"/>
-                          </a:solidFill>
-                          <a:latin typeface="Arial"/>
-                          <a:ea typeface="Arial"/>
-                          <a:cs typeface="Arial"/>
-                        </a:rPr>
-                        <a:t>正常、预警、严重、静音 </a:t>
-                      </a:r>
-                      <a:r>
-                        <a:rPr lang="en-US" altLang="zh-CN" sz="1200">
-                          <a:solidFill>
-                            <a:srgbClr val="16261F"/>
-                          </a:solidFill>
-                          <a:latin typeface="Arial"/>
-                          <a:ea typeface="Arial"/>
-                          <a:cs typeface="Arial"/>
-                        </a:rPr>
-                        <a:t>4 </a:t>
-                      </a:r>
-                      <a:r>
-                        <a:rPr lang="zh-CN" altLang="en-US" sz="1200">
-                          <a:solidFill>
-                            <a:srgbClr val="16261F"/>
-                          </a:solidFill>
-                          <a:latin typeface="Arial"/>
-                          <a:ea typeface="Arial"/>
-                          <a:cs typeface="Arial"/>
-                        </a:rPr>
-                        <a:t>项实机验证；回差、安全覆盖、失效为逻辑测试</a:t>
-                      </a:r>
-                      <a:endParaRPr sz="1200">
-                        <a:solidFill>
-                          <a:srgbClr val="16261F"/>
-                        </a:solidFill>
-                        <a:latin typeface="Arial"/>
-                        <a:ea typeface="Arial"/>
-                        <a:cs typeface="Arial"/>
-                      </a:endParaRPr>
-                    </a:p>
-                  </a:txBody>
-                  <a:tcPr/>
-                </a:tc>
-                <a:tc>
-                  <a:txBody>
-                    <a:bodyPr/>
-                    <a:lstStyle/>
-                    <a:p>
-                      <a:r>
-                        <a:rPr lang="en-US" altLang="zh-CN" sz="1200">
-                          <a:solidFill>
-                            <a:srgbClr val="16261F"/>
-                          </a:solidFill>
-                          <a:latin typeface="Arial"/>
-                          <a:ea typeface="Arial"/>
-                          <a:cs typeface="Arial"/>
-                        </a:rPr>
-                        <a:t>4 </a:t>
-                      </a:r>
-                      <a:r>
-                        <a:rPr lang="zh-CN" altLang="en-US" sz="1200">
-                          <a:solidFill>
-                            <a:srgbClr val="16261F"/>
-                          </a:solidFill>
-                          <a:latin typeface="Arial"/>
-                          <a:ea typeface="Arial"/>
-                          <a:cs typeface="Arial"/>
-                        </a:rPr>
-                        <a:t>项实测通过</a:t>
-                      </a:r>
-                      <a:endParaRPr sz="1200">
-                        <a:solidFill>
-                          <a:srgbClr val="16261F"/>
-                        </a:solidFill>
-                        <a:latin typeface="Arial"/>
-                        <a:ea typeface="Arial"/>
-                        <a:cs typeface="Arial"/>
-                      </a:endParaRPr>
-                    </a:p>
-                  </a:txBody>
-                  <a:tcPr/>
-                </a:tc>
-                <a:extLst>
-                  <a:ext uri="{0D108BD9-81ED-4DB2-BD59-A6C34878D82A}">
-                    <a16:rowId xmlns:a16="http://schemas.microsoft.com/office/drawing/2014/main" val="10003"/>
-                  </a:ext>
-                </a:extLst>
-              </a:tr>
-            </a:tbl>
-          </a:graphicData>
-        </a:graphic>
-      </p:graphicFrame>
-      <p:sp>
-        <p:nvSpPr>
-          <p:cNvPr id="6" name="矩形 5">
-            <a:extLst>
-              <a:ext uri="{FF2B5EF4-FFF2-40B4-BE49-F238E27FC236}">
-                <a16:creationId xmlns:a16="http://schemas.microsoft.com/office/drawing/2014/main" id="{BB4A1191-94D3-4B22-88FC-432EF1756C39}"/>
-              </a:ext>
-            </a:extLst>
-          </p:cNvPr>
-          <p:cNvSpPr>
-            <a:spLocks noGrp="1"/>
-          </p:cNvSpPr>
-          <p:nvPr/>
-        </p:nvSpPr>
-        <p:spPr>
-          <a:xfrm>
-            <a:off x="685800" y="5200650"/>
-            <a:ext cx="10858500" cy="333375"/>
-          </a:xfrm>
-          <a:prstGeom prst="rect">
-            <a:avLst/>
-          </a:prstGeom>
-          <a:noFill/>
-          <a:ln w="0">
-            <a:noFill/>
-          </a:ln>
-        </p:spPr>
-        <p:txBody>
-          <a:bodyPr anchor="ctr">
-            <a:normAutofit/>
-          </a:bodyPr>
-          <a:lstStyle/>
-          <a:p>
-            <a:pPr algn="l">
-              <a:defRPr sz="1425" b="0">
-                <a:solidFill>
-                  <a:srgbClr val="68746E"/>
-                </a:solidFill>
-                <a:latin typeface="Arial"/>
-                <a:ea typeface="Arial"/>
-                <a:cs typeface="Arial"/>
-              </a:defRPr>
-            </a:pPr>
-            <a:r>
-              <a:rPr sz="1425" b="0">
-                <a:solidFill>
-                  <a:srgbClr val="68746E"/>
-                </a:solidFill>
-                <a:latin typeface="Arial"/>
-                <a:ea typeface="Arial"/>
-                <a:cs typeface="Arial"/>
-              </a:rPr>
-              <a:t>三点均值：门口 27.80 ℃ / 61.06 %RH；中间 26.08 ℃ / 66.04 %RH；末尾 26.44 ℃ / 64.18 %RH。</a:t>
-            </a:r>
-          </a:p>
-        </p:txBody>
-      </p:sp>
-      <p:sp>
-        <p:nvSpPr>
-          <p:cNvPr id="7" name="矩形 6">
-            <a:extLst>
-              <a:ext uri="{FF2B5EF4-FFF2-40B4-BE49-F238E27FC236}">
-                <a16:creationId xmlns:a16="http://schemas.microsoft.com/office/drawing/2014/main" id="{B3E9D2BE-56A2-4439-B605-81C4C990C9D2}"/>
-              </a:ext>
-            </a:extLst>
-          </p:cNvPr>
-          <p:cNvSpPr>
-            <a:spLocks noGrp="1"/>
-          </p:cNvSpPr>
-          <p:nvPr/>
-        </p:nvSpPr>
-        <p:spPr>
-          <a:xfrm>
-            <a:off x="685800" y="5753100"/>
-            <a:ext cx="10858500" cy="285750"/>
-          </a:xfrm>
-          <a:prstGeom prst="rect">
-            <a:avLst/>
-          </a:prstGeom>
-          <a:noFill/>
-          <a:ln w="0">
-            <a:noFill/>
-          </a:ln>
-        </p:spPr>
-        <p:txBody>
-          <a:bodyPr anchor="ctr">
-            <a:normAutofit fontScale="94444" lnSpcReduction="10000"/>
-          </a:bodyPr>
-          <a:lstStyle/>
-          <a:p>
-            <a:pPr algn="l">
-              <a:defRPr sz="1350" b="1">
-                <a:solidFill>
-                  <a:srgbClr val="2F7A63"/>
-                </a:solidFill>
-                <a:latin typeface="Arial"/>
-                <a:ea typeface="Arial"/>
-                <a:cs typeface="Arial"/>
-              </a:defRPr>
-            </a:pPr>
-            <a:r>
-              <a:rPr sz="1350" b="1">
-                <a:solidFill>
-                  <a:srgbClr val="2F7A63"/>
-                </a:solidFill>
-                <a:latin typeface="Arial"/>
-                <a:ea typeface="Arial"/>
-                <a:cs typeface="Arial"/>
-              </a:rPr>
-              <a:t>最大差值：温度 1.72 ℃，湿度 5.00 %RH；15 条有效记录均纳入统计。</a:t>
-            </a:r>
-          </a:p>
-        </p:txBody>
-      </p:sp>
-      <p:sp>
-        <p:nvSpPr>
-          <p:cNvPr id="8" name="矩形 7">
-            <a:extLst>
-              <a:ext uri="{FF2B5EF4-FFF2-40B4-BE49-F238E27FC236}">
-                <a16:creationId xmlns:a16="http://schemas.microsoft.com/office/drawing/2014/main" id="{5418015A-955A-4F03-A71B-2B1059B4C200}"/>
-              </a:ext>
-            </a:extLst>
-          </p:cNvPr>
-          <p:cNvSpPr>
-            <a:spLocks noGrp="1"/>
-          </p:cNvSpPr>
-          <p:nvPr/>
-        </p:nvSpPr>
-        <p:spPr>
-          <a:xfrm>
-            <a:off x="685800" y="6115050"/>
-            <a:ext cx="10858500" cy="238125"/>
-          </a:xfrm>
-          <a:prstGeom prst="rect">
-            <a:avLst/>
-          </a:prstGeom>
-          <a:noFill/>
-          <a:ln w="0">
-            <a:noFill/>
-          </a:ln>
-        </p:spPr>
-        <p:txBody>
-          <a:bodyPr anchor="ctr">
-            <a:normAutofit fontScale="85556" lnSpcReduction="10000"/>
-          </a:bodyPr>
-          <a:lstStyle/>
-          <a:p>
-            <a:pPr algn="l">
-              <a:defRPr sz="1125" b="1">
-                <a:solidFill>
-                  <a:srgbClr val="113B36"/>
-                </a:solidFill>
-                <a:latin typeface="Arial"/>
-                <a:ea typeface="Arial"/>
-                <a:cs typeface="Arial"/>
-              </a:defRPr>
-            </a:pPr>
-            <a:r>
-              <a:rPr sz="1125" b="1">
-                <a:solidFill>
-                  <a:srgbClr val="113B36"/>
-                </a:solidFill>
-                <a:latin typeface="Arial"/>
-                <a:ea typeface="Arial"/>
-                <a:cs typeface="Arial"/>
-              </a:rPr>
-              <a:t>布点建议：≤200㎡设3点；200–500㎡设6点（2行×3区）；&gt;500㎡按每增加约100㎡或8–10m分区增设1点。</a:t>
-            </a:r>
-          </a:p>
-        </p:txBody>
-      </p:sp>
-      <p:sp>
-        <p:nvSpPr>
-          <p:cNvPr id="9" name="矩形 8">
-            <a:extLst>
-              <a:ext uri="{FF2B5EF4-FFF2-40B4-BE49-F238E27FC236}">
-                <a16:creationId xmlns:a16="http://schemas.microsoft.com/office/drawing/2014/main" id="{ABD39392-9D13-4744-A67B-FF4307647C16}"/>
-              </a:ext>
-            </a:extLst>
-          </p:cNvPr>
-          <p:cNvSpPr>
-            <a:spLocks noGrp="1"/>
-          </p:cNvSpPr>
-          <p:nvPr/>
-        </p:nvSpPr>
-        <p:spPr>
-          <a:xfrm>
-            <a:off x="685800" y="6429375"/>
-            <a:ext cx="10858500" cy="238125"/>
-          </a:xfrm>
-          <a:prstGeom prst="rect">
-            <a:avLst/>
-          </a:prstGeom>
-          <a:noFill/>
-          <a:ln w="0">
-            <a:noFill/>
-          </a:ln>
-        </p:spPr>
-        <p:txBody>
-          <a:bodyPr anchor="ctr">
-            <a:normAutofit fontScale="85556" lnSpcReduction="10000"/>
-          </a:bodyPr>
-          <a:lstStyle/>
-          <a:p>
-            <a:pPr algn="l">
-              <a:defRPr sz="1125" b="0">
-                <a:solidFill>
-                  <a:srgbClr val="68746E"/>
-                </a:solidFill>
-                <a:latin typeface="Arial"/>
-                <a:ea typeface="Arial"/>
-                <a:cs typeface="Arial"/>
-              </a:defRPr>
-            </a:pPr>
-            <a:r>
-              <a:rPr sz="1125" b="0">
-                <a:solidFill>
-                  <a:srgbClr val="68746E"/>
-                </a:solidFill>
-                <a:latin typeface="Arial"/>
-                <a:ea typeface="Arial"/>
-                <a:cs typeface="Arial"/>
-              </a:rPr>
-              <a:t>示例：6×30m=180㎡→3点；8×50m=400㎡→6点；10×60m=600㎡→9点。</a:t>
-            </a:r>
-          </a:p>
-        </p:txBody>
-      </p:sp>
-    </p:spTree>
-    <p:extLst>
-      <p:ext uri="{BB962C8B-B14F-4D97-AF65-F5344CB8AC3E}">
-        <p14:creationId xmlns:p14="http://schemas.microsoft.com/office/powerpoint/2010/main" val="1999851347"/>
       </p:ext>
     </p:extLst>
   </p:cSld>

--- a/docs/submission/室内大棚温湿度监测与风扇控制系统_答辩汇报_脱敏版.pptx
+++ b/docs/submission/室内大棚温湿度监测与风扇控制系统_答辩汇报_脱敏版.pptx
@@ -3106,7 +3106,7 @@
                 <a:ea typeface="Arial"/>
                 <a:cs typeface="Arial"/>
               </a:rPr>
-              <a:t>最大差值：温度 1.72 ℃，湿度 5.00 %RH；15 条有效记录均纳入统计。</a:t>
+              <a:t>点内离散度：每点5组标准差 温度 0.21～0.27 ℃、湿度 0.87～1.35 %RH；三点均值极差 温度 1.72 ℃、湿度 4.98 %RH。</a:t>
             </a:r>
           </a:p>
         </p:txBody>
@@ -3163,7 +3163,7 @@
                 <a:ea typeface="Arial"/>
                 <a:cs typeface="Arial"/>
               </a:rPr>
-              <a:t>布点建议：≤200㎡设3点；200–500㎡设6点（2行×3区）；&gt;500㎡按每增加约100㎡或8–10m分区增设1点。</a:t>
+              <a:t>布点准则：相邻测点的温差 &lt; 温度回差 1 ℃、湿度差 &lt; 湿度回差 5 %RH；满足时选点位置不改变报警结论。</a:t>
             </a:r>
           </a:p>
         </p:txBody>
@@ -3220,7 +3220,7 @@
                 <a:ea typeface="Arial"/>
                 <a:cs typeface="Arial"/>
               </a:rPr>
-              <a:t>示例：6×30m=180㎡→3点；8×50m=400㎡→6点；10×60m=600㎡→9点。</a:t>
+              <a:t>本例 9.6 m 跨度温度极差 1.72 ℃ 已超 1 ℃，单点不足代表全场；按门口/中部/风机侧/边墙试点复测后合并或细分，不给面积定额。</a:t>
             </a:r>
           </a:p>
         </p:txBody>

--- a/docs/submission/室内大棚温湿度监测与风扇控制系统_答辩汇报_脱敏版.pptx
+++ b/docs/submission/室内大棚温湿度监测与风扇控制系统_答辩汇报_脱敏版.pptx
@@ -12878,7 +12878,7 @@
                 <a:ea typeface="Arial"/>
                 <a:cs typeface="Arial"/>
               </a:rPr>
-              <a:t>[12][13]</a:t>
+              <a:t>[11][12]</a:t>
             </a:r>
             <a:r>
               <a:rPr lang="zh-CN" altLang="en-US" sz="1250" b="0">

--- a/docs/submission/室内大棚温湿度监测与风扇控制系统_答辩汇报_脱敏版.pptx
+++ b/docs/submission/室内大棚温湿度监测与风扇控制系统_答辩汇报_脱敏版.pptx
@@ -12878,7 +12878,7 @@
                 <a:ea typeface="Arial"/>
                 <a:cs typeface="Arial"/>
               </a:rPr>
-              <a:t>[11][12]</a:t>
+              <a:t>[10][11]</a:t>
             </a:r>
             <a:r>
               <a:rPr lang="zh-CN" altLang="en-US" sz="1250" b="0">
